--- a/Labs/lab3/Lab03.pptx
+++ b/Labs/lab3/Lab03.pptx
@@ -407,6 +407,68 @@
 </inkml:ink>
 </file>
 
+<file path=ppt/ink/ink18.xml><?xml version="1.0" encoding="utf-8"?>
+<inkml:ink xmlns:inkml="http://www.w3.org/2003/InkML">
+  <inkml:definitions>
+    <inkml:context xml:id="ctx0">
+      <inkml:inkSource xml:id="inkSrc0">
+        <inkml:traceFormat>
+          <inkml:channel name="X" type="integer" min="-2.14748E9" max="2.14748E9" units="cm"/>
+          <inkml:channel name="Y" type="integer" min="-2.14748E9" max="2.14748E9" units="cm"/>
+          <inkml:channel name="F" type="integer" max="32767" units="dev"/>
+          <inkml:channel name="OA" type="integer" max="360" units="deg"/>
+          <inkml:channel name="OE" type="integer" max="90" units="deg"/>
+        </inkml:traceFormat>
+        <inkml:channelProperties>
+          <inkml:channelProperty channel="X" name="resolution" value="1000" units="1/cm"/>
+          <inkml:channelProperty channel="Y" name="resolution" value="1000" units="1/cm"/>
+          <inkml:channelProperty channel="F" name="resolution" value="0" units="1/dev"/>
+          <inkml:channelProperty channel="OA" name="resolution" value="1000" units="1/deg"/>
+          <inkml:channelProperty channel="OE" name="resolution" value="1000" units="1/deg"/>
+        </inkml:channelProperties>
+      </inkml:inkSource>
+      <inkml:timestamp xml:id="ts0" timeString="2026-02-12T19:33:39.863"/>
+    </inkml:context>
+    <inkml:brush xml:id="br0">
+      <inkml:brushProperty name="width" value="0.025" units="cm"/>
+      <inkml:brushProperty name="height" value="0.025" units="cm"/>
+    </inkml:brush>
+  </inkml:definitions>
+  <inkml:trace contextRef="#ctx0" brushRef="#br0">265 140 14371 0 0,'-7'16'145'0'0,"-1"0"0"0"0,-1-1-1 0 0,0 0 1 0 0,-1 0 0 0 0,-1-1 0 0 0,0 0 0 0 0,-1-1-1 0 0,0 0 1 0 0,-1-1 0 0 0,0 0 0 0 0,-1-1 0 0 0,-1-1-1 0 0,-18 10 1 0 0,31-18-101 0 0,-1-1 0 0 0,0 0 1 0 0,0 1-1 0 0,0-1 0 0 0,0-1 0 0 0,0 1 0 0 0,0 0 0 0 0,0-1 1 0 0,0 0-1 0 0,0 1 0 0 0,-1-1 0 0 0,1 0 0 0 0,0-1 0 0 0,0 1 1 0 0,0 0-1 0 0,0-1 0 0 0,-4-1 0 0 0,4 1-33 0 0,2 0-1 0 0,-1-1 1 0 0,0 1 0 0 0,0 0-1 0 0,0-1 1 0 0,0 1 0 0 0,1-1-1 0 0,-1 0 1 0 0,1 1 0 0 0,-1-1-1 0 0,1 0 1 0 0,0 0 0 0 0,0 0-1 0 0,0 0 1 0 0,0 0 0 0 0,0 0-1 0 0,0 0 1 0 0,0 0 0 0 0,1-1-1 0 0,-1 1 1 0 0,1 0 0 0 0,0 0-1 0 0,-1-1 1 0 0,1-2 0 0 0,0-11-1 0 0,0-1 1 0 0,2 1-1 0 0,-1-1 1 0 0,2 1 0 0 0,0 0-1 0 0,1 0 1 0 0,1 0-1 0 0,0 0 1 0 0,1 1 0 0 0,1-1-1 0 0,0 2 1 0 0,1-1-1 0 0,1 1 1 0 0,0 0 0 0 0,16-18-1 0 0,-22 30 1 0 0,-1-1 0 0 0,1 1 0 0 0,-1 0 0 0 0,1 0-1 0 0,0 0 1 0 0,0 0 0 0 0,0 0 0 0 0,0 1 0 0 0,1-1 0 0 0,-1 1 0 0 0,0 0-1 0 0,0 0 1 0 0,1 0 0 0 0,-1 0 0 0 0,1 1 0 0 0,-1-1 0 0 0,1 1 0 0 0,-1 0 0 0 0,1 0-1 0 0,-1 0 1 0 0,1 1 0 0 0,-1-1 0 0 0,1 1 0 0 0,-1-1 0 0 0,0 1 0 0 0,4 2-1 0 0,8 3 124 0 0,-1 1 0 0 0,1 1-1 0 0,-2 0 1 0 0,21 16 0 0 0,6 2 30 0 0,85 41 87 0 0,-108-59-519 0 0,1-1-1 0 0,1-1 1 0 0,-1-1 0 0 0,1 0-1 0 0,25 2 1 0 0,-40-6-156 0 0,0-1 0 0 0,-1 0 0 0 0,1 0 0 0 0,0 0 0 0 0,0-1 0 0 0,7-1 0 0 0,-8 1-488 0 0,0 0-1 0 0,0-1 1 0 0,0 1 0 0 0,0-1-1 0 0,0 1 1 0 0,0-1 0 0 0,-1 0 0 0 0,5-4-1 0 0,0 0-991 0 0</inkml:trace>
+</inkml:ink>
+</file>
+
+<file path=ppt/ink/ink19.xml><?xml version="1.0" encoding="utf-8"?>
+<inkml:ink xmlns:inkml="http://www.w3.org/2003/InkML">
+  <inkml:definitions>
+    <inkml:context xml:id="ctx0">
+      <inkml:inkSource xml:id="inkSrc0">
+        <inkml:traceFormat>
+          <inkml:channel name="X" type="integer" min="-2.14748E9" max="2.14748E9" units="cm"/>
+          <inkml:channel name="Y" type="integer" min="-2.14748E9" max="2.14748E9" units="cm"/>
+          <inkml:channel name="F" type="integer" max="32767" units="dev"/>
+          <inkml:channel name="OA" type="integer" max="360" units="deg"/>
+          <inkml:channel name="OE" type="integer" max="90" units="deg"/>
+        </inkml:traceFormat>
+        <inkml:channelProperties>
+          <inkml:channelProperty channel="X" name="resolution" value="1000" units="1/cm"/>
+          <inkml:channelProperty channel="Y" name="resolution" value="1000" units="1/cm"/>
+          <inkml:channelProperty channel="F" name="resolution" value="0" units="1/dev"/>
+          <inkml:channelProperty channel="OA" name="resolution" value="1000" units="1/deg"/>
+          <inkml:channelProperty channel="OE" name="resolution" value="1000" units="1/deg"/>
+        </inkml:channelProperties>
+      </inkml:inkSource>
+      <inkml:timestamp xml:id="ts0" timeString="2026-02-12T19:33:40.703"/>
+    </inkml:context>
+    <inkml:brush xml:id="br0">
+      <inkml:brushProperty name="width" value="0.025" units="cm"/>
+      <inkml:brushProperty name="height" value="0.025" units="cm"/>
+    </inkml:brush>
+  </inkml:definitions>
+  <inkml:trace contextRef="#ctx0" brushRef="#br0">31 701 8 0 0,'-1'1'236'0'0,"0"0"1"0"0,0-1-1 0 0,0 1 1 0 0,0 0-1 0 0,0-1 1 0 0,0 1-1 0 0,0-1 1 0 0,0 1-1 0 0,0-1 1 0 0,0 1-1 0 0,0-1 1 0 0,0 0-1 0 0,-1 1 1 0 0,1-1-1 0 0,0 0 0 0 0,0 0 1 0 0,0 0-1 0 0,-1 0 1 0 0,1 0-1 0 0,-2-1 1 0 0,3 1-170 0 0,-1 0 1 0 0,1-1 0 0 0,-1 1-1 0 0,1-1 1 0 0,-1 0 0 0 0,1 1-1 0 0,0-1 1 0 0,-1 1 0 0 0,1-1-1 0 0,0 0 1 0 0,-1 1-1 0 0,1-1 1 0 0,0 1 0 0 0,0-1-1 0 0,0 0 1 0 0,-1 1 0 0 0,1-1-1 0 0,0 0 1 0 0,0 0 0 0 0,0 1-1 0 0,0-1 1 0 0,0 0 0 0 0,0 1-1 0 0,0-1 1 0 0,1 0-1 0 0,-1 1 1 0 0,0-1 0 0 0,0 0-1 0 0,0 1 1 0 0,1-1 0 0 0,-1 0-1 0 0,0 1 1 0 0,1-2 0 0 0,97-212 6545 0 0,-6 14-6209 0 0,-47 75-309 0 0,0-4-5212 0 0,-40 119 3118 0 0,0 2 778 0 0</inkml:trace>
+</inkml:ink>
+</file>
+
 <file path=ppt/ink/ink2.xml><?xml version="1.0" encoding="utf-8"?>
 <inkml:ink xmlns:inkml="http://www.w3.org/2003/InkML">
   <inkml:definitions>
@@ -435,6 +497,316 @@
     </inkml:brush>
   </inkml:definitions>
   <inkml:trace contextRef="#ctx0" brushRef="#br0">444 120 512 0 0,'-2'-3'240'0'0,"1"1"1"0"0,0-1-1 0 0,-1 1 1 0 0,1-1-1 0 0,-1 1 0 0 0,0 0 1 0 0,0-1-1 0 0,0 1 0 0 0,0 0 1 0 0,0 0-1 0 0,0 0 0 0 0,-1 1 1 0 0,1-1-1 0 0,0 1 1 0 0,-1-1-1 0 0,0 1 0 0 0,1 0 1 0 0,-1 0-1 0 0,0 0 0 0 0,1 0 1 0 0,-1 0-1 0 0,0 1 0 0 0,0-1 1 0 0,0 1-1 0 0,0 0 0 0 0,0-1 1 0 0,0 1-1 0 0,0 1 1 0 0,1-1-1 0 0,-1 0 0 0 0,-4 2 1 0 0,-2 0-98 0 0,1 0 1 0 0,0 1 0 0 0,-1 0-1 0 0,1 0 1 0 0,1 1 0 0 0,-1 0 0 0 0,0 0-1 0 0,1 1 1 0 0,-9 7 0 0 0,-101 106 2074 0 0,73-71-1558 0 0,35-38-580 0 0,-12 12 425 0 0,1 2 0 0 0,-30 43 0 0 0,48-63-477 0 0,0 1 1 0 0,0 0 0 0 0,0 0 0 0 0,1 0-1 0 0,0 0 1 0 0,0 0 0 0 0,0 0-1 0 0,0 0 1 0 0,0 0 0 0 0,1 0 0 0 0,0 7-1 0 0,0-10-27 0 0,0 0 0 0 0,0 1 0 0 0,1-1 0 0 0,-1 0 0 0 0,0 0 0 0 0,1 0 0 0 0,-1 1 0 0 0,1-1 0 0 0,-1 0 0 0 0,1 0 0 0 0,0 0 0 0 0,-1 0-1 0 0,1 0 1 0 0,0 0 0 0 0,0 0 0 0 0,0 0 0 0 0,0 0 0 0 0,0 0 0 0 0,0 0 0 0 0,0-1 0 0 0,0 1 0 0 0,0 0 0 0 0,0-1 0 0 0,0 1 0 0 0,0-1 0 0 0,0 1 0 0 0,1-1 0 0 0,-1 1 0 0 0,0-1-1 0 0,0 0 1 0 0,1 0 0 0 0,-1 0 0 0 0,0 1 0 0 0,1-1 0 0 0,-1-1 0 0 0,0 1 0 0 0,0 0 0 0 0,1 0 0 0 0,-1 0 0 0 0,0-1 0 0 0,2 1 0 0 0,6-3 4 0 0,0 1 1 0 0,0-1 0 0 0,0-1-1 0 0,0 1 1 0 0,0-1-1 0 0,-1-1 1 0 0,14-9 0 0 0,52-44-46 0 0,32-33-51 0 0,165-107 1 0 0,-236 175 95 0 0,44-26-46 0 0,-70 44 41 0 0,0 0-1 0 0,1 1 1 0 0,0 1-1 0 0,-1-1 1 0 0,1 2-1 0 0,17-4 1 0 0,-25 6 2 0 0,0 0 0 0 0,0-1 0 0 0,0 1 0 0 0,0 0 0 0 0,0 0 0 0 0,0 0 0 0 0,0 1 0 0 0,0-1 0 0 0,0 0 0 0 0,0 1 0 0 0,-1-1 0 0 0,1 1 0 0 0,0-1-1 0 0,0 1 1 0 0,0 0 0 0 0,-1 0 0 0 0,1 0 0 0 0,0 0 0 0 0,2 2 0 0 0,-3-1 3 0 0,0 0 1 0 0,0-1-1 0 0,0 1 0 0 0,0 0 0 0 0,0-1 1 0 0,-1 1-1 0 0,1 0 0 0 0,-1 0 0 0 0,1-1 1 0 0,-1 1-1 0 0,0 0 0 0 0,1 0 0 0 0,-1 0 1 0 0,0 0-1 0 0,0 0 0 0 0,-1 2 0 0 0,-1 8 13 0 0,0-1 1 0 0,-2 1-1 0 0,1-1 0 0 0,-10 21 0 0 0,-1-1 108 0 0,-2-1 0 0 0,0 0 0 0 0,-2-1 0 0 0,-1-1 0 0 0,-2-1 0 0 0,0 0 0 0 0,-2-2 1 0 0,-31 28-1 0 0,39-37 238 0 0,14-16-344 0 0,1 0-1 0 0,-1 1 1 0 0,1-1 0 0 0,-1 0 0 0 0,1 1 0 0 0,0-1-1 0 0,-1 1 1 0 0,1-1 0 0 0,-1 1 0 0 0,1-1 0 0 0,0 1 0 0 0,-1-1-1 0 0,1 1 1 0 0,0-1 0 0 0,0 1 0 0 0,0-1 0 0 0,-1 1-1 0 0,1 0 1 0 0,0-1 0 0 0,0 1 0 0 0,0-1 0 0 0,0 1-1 0 0,0 0 1 0 0,0-1 0 0 0,0 1 0 0 0,0-1 0 0 0,0 2 0 0 0,2-2 7 0 0,0-1 1 0 0,1 1 0 0 0,-1-1-1 0 0,0 0 1 0 0,0 0 0 0 0,0 1-1 0 0,0-1 1 0 0,0 0 0 0 0,-1-1-1 0 0,3-1 1 0 0,3-1-15 0 0,19-10 0 0 0,-1-2-1 0 0,0 0 1 0 0,-2-2 0 0 0,32-29 0 0 0,33-26-66 0 0,-35 34 16 0 0,-12 8 14 0 0,50-28 1 0 0,-78 51 15 0 0,0 2-1 0 0,0 0 1 0 0,0 0 0 0 0,0 1-1 0 0,1 1 1 0 0,0 1-1 0 0,0-1 1 0 0,26-1 0 0 0,-35 5 4 0 0,0 0 1 0 0,0 0 0 0 0,0 1 0 0 0,0-1-1 0 0,0 1 1 0 0,0 0 0 0 0,0 1 0 0 0,-1-1 0 0 0,1 1-1 0 0,0 0 1 0 0,-1 0 0 0 0,1 1 0 0 0,-1-1 0 0 0,0 1-1 0 0,0 0 1 0 0,0 0 0 0 0,0 0 0 0 0,6 7-1 0 0,0 3 40 0 0,0 1 0 0 0,0 0-1 0 0,-2 0 1 0 0,10 20-1 0 0,-10-17 2 0 0,1-1 0 0 0,19 27 0 0 0,-26-40-118 0 0,1-1 0 0 0,0 1-1 0 0,0 0 1 0 0,0-1 0 0 0,0 0-1 0 0,1 1 1 0 0,-1-1 0 0 0,1-1-1 0 0,-1 1 1 0 0,1 0 0 0 0,-1-1-1 0 0,1 0 1 0 0,0 0 0 0 0,0 0-1 0 0,5 1 1 0 0,-5-2-647 0 0,-1 0 0 0 0,0 0 0 0 0,0 0 0 0 0,1 0 0 0 0,-1-1 0 0 0,0 1 0 0 0,0-1 0 0 0,0 0 0 0 0,1 1 0 0 0,-1-2 0 0 0,5-2 0 0 0,-1 0-957 0 0</inkml:trace>
+</inkml:ink>
+</file>
+
+<file path=ppt/ink/ink20.xml><?xml version="1.0" encoding="utf-8"?>
+<inkml:ink xmlns:inkml="http://www.w3.org/2003/InkML">
+  <inkml:definitions>
+    <inkml:context xml:id="ctx0">
+      <inkml:inkSource xml:id="inkSrc0">
+        <inkml:traceFormat>
+          <inkml:channel name="X" type="integer" min="-2.14748E9" max="2.14748E9" units="cm"/>
+          <inkml:channel name="Y" type="integer" min="-2.14748E9" max="2.14748E9" units="cm"/>
+          <inkml:channel name="F" type="integer" max="32767" units="dev"/>
+          <inkml:channel name="OA" type="integer" max="360" units="deg"/>
+          <inkml:channel name="OE" type="integer" max="90" units="deg"/>
+        </inkml:traceFormat>
+        <inkml:channelProperties>
+          <inkml:channelProperty channel="X" name="resolution" value="1000" units="1/cm"/>
+          <inkml:channelProperty channel="Y" name="resolution" value="1000" units="1/cm"/>
+          <inkml:channelProperty channel="F" name="resolution" value="0" units="1/dev"/>
+          <inkml:channelProperty channel="OA" name="resolution" value="1000" units="1/deg"/>
+          <inkml:channelProperty channel="OE" name="resolution" value="1000" units="1/deg"/>
+        </inkml:channelProperties>
+      </inkml:inkSource>
+      <inkml:timestamp xml:id="ts0" timeString="2026-02-12T19:33:41.642"/>
+    </inkml:context>
+    <inkml:brush xml:id="br0">
+      <inkml:brushProperty name="width" value="0.025" units="cm"/>
+      <inkml:brushProperty name="height" value="0.025" units="cm"/>
+    </inkml:brush>
+  </inkml:definitions>
+  <inkml:trace contextRef="#ctx0" brushRef="#br0">123 780 1112 0 0,'0'1'192'0'0,"-1"0"-1"0"0,0 0 0 0 0,1 0 0 0 0,-1 0 1 0 0,0 0-1 0 0,0 0 0 0 0,0 0 1 0 0,1 0-1 0 0,-1-1 0 0 0,0 1 1 0 0,0 0-1 0 0,0-1 0 0 0,0 1 0 0 0,-1 0 1 0 0,1-1-1 0 0,0 1 0 0 0,0-1 1 0 0,0 0-1 0 0,0 1 0 0 0,0-1 0 0 0,-1 0 1 0 0,-1 0-1 0 0,2 0-70 0 0,0-1 0 0 0,0 1 0 0 0,-1-1 0 0 0,1 1 0 0 0,0-1 0 0 0,0 1 0 0 0,0-1 0 0 0,0 0 0 0 0,0 0 0 0 0,0 0 0 0 0,0 0 0 0 0,0 1 0 0 0,0-1 0 0 0,0 0 0 0 0,1-1 0 0 0,-1 1 0 0 0,-1-2 0 0 0,-2-6 175 0 0,-1-1 0 0 0,1-1 0 0 0,-5-20-1 0 0,6 22-66 0 0,-10-38 626 0 0,2-1-1 0 0,3-1 1 0 0,1 0 0 0 0,0-54-1 0 0,6 63-739 0 0,3 0-1 0 0,1 1 1 0 0,2-1 0 0 0,2 1-1 0 0,18-60 1 0 0,-24 97-113 0 0,21-58 49 0 0,-20 55-31 0 0,0 1 1 0 0,0-1-1 0 0,0 1 1 0 0,1 0-1 0 0,0 0 1 0 0,0 0 0 0 0,0 0-1 0 0,0 1 1 0 0,1-1-1 0 0,6-5 1 0 0,-10 9-15 0 0,1 0 1 0 0,-1-1-1 0 0,1 1 1 0 0,-1 0-1 0 0,0 0 1 0 0,1-1-1 0 0,-1 1 1 0 0,1 0 0 0 0,-1 0-1 0 0,1-1 1 0 0,-1 1-1 0 0,1 0 1 0 0,-1 0-1 0 0,1 0 1 0 0,-1 0-1 0 0,1 0 1 0 0,-1 0-1 0 0,1 0 1 0 0,-1 0-1 0 0,1 0 1 0 0,-1 0 0 0 0,1 0-1 0 0,-1 0 1 0 0,1 0-1 0 0,-1 1 1 0 0,1-1-1 0 0,-1 0 1 0 0,1 0-1 0 0,-1 0 1 0 0,1 1-1 0 0,-1-1 1 0 0,1 0-1 0 0,-1 1 1 0 0,1-1 0 0 0,0 2-1 0 0,-1-1 0 0 0,1 0 1 0 0,0 1-1 0 0,-1-1 0 0 0,1 1 1 0 0,-1-1-1 0 0,0 1 1 0 0,1-1-1 0 0,-1 1 0 0 0,0-1 1 0 0,0 3-1 0 0,0 4 11 0 0,-1-1-1 0 0,1 0 1 0 0,-2 0-1 0 0,-1 8 1 0 0,-4 4-17 0 0,-2 0 0 0 0,0-1 1 0 0,-13 21-1 0 0,0-3 216 0 0,94-101-86 0 0,-58 53-113 0 0,0 0 0 0 0,26-15 0 0 0,-36 24-18 0 0,1 1-1 0 0,0-1 1 0 0,-1 1-1 0 0,1 0 1 0 0,0 1 0 0 0,0-1-1 0 0,0 1 1 0 0,0 0 0 0 0,1 0-1 0 0,-1 0 1 0 0,0 1-1 0 0,0 0 1 0 0,1 0 0 0 0,4 1-1 0 0,-9-1-6 0 0,0 0 1 0 0,0 0-1 0 0,1 0 0 0 0,-1 1 0 0 0,0-1 0 0 0,0 0 0 0 0,0 1 1 0 0,0-1-1 0 0,0 1 0 0 0,-1-1 0 0 0,1 1 0 0 0,0 0 0 0 0,0-1 0 0 0,0 1 1 0 0,0 0-1 0 0,-1 0 0 0 0,1 0 0 0 0,0-1 0 0 0,-1 1 0 0 0,1 0 1 0 0,0 0-1 0 0,-1 0 0 0 0,1 0 0 0 0,-1 0 0 0 0,1 1 0 0 0,-1 1-1 0 0,1-1 0 0 0,-1 1 0 0 0,0 0-1 0 0,0-1 1 0 0,0 1 0 0 0,0-1-1 0 0,-1 1 1 0 0,1-1 0 0 0,0 1 0 0 0,-2 3-1 0 0,-2 4 6 0 0,0 1-1 0 0,-1-1 1 0 0,-11 18-1 0 0,4-10 63 0 0,-1 0 0 0 0,-1-1 1 0 0,-1-1-1 0 0,-23 19 0 0 0,6-8 270 0 0,-47 30 0 0 0,77-55-383 0 0,-1-1 0 0 0,1 0 0 0 0,0 1 0 0 0,-1-1-1 0 0,1 0 1 0 0,-1 0 0 0 0,0-1 0 0 0,1 1 0 0 0,-1 0 0 0 0,0-1 0 0 0,-5 0 0 0 0,7 0-144 0 0,0 0 1 0 0,0 0 0 0 0,-1 0 0 0 0,1-1-1 0 0,0 1 1 0 0,0 0 0 0 0,-1-1 0 0 0,1 1-1 0 0,0-1 1 0 0,0 1 0 0 0,0-1 0 0 0,0 0-1 0 0,0 1 1 0 0,0-1 0 0 0,0 0 0 0 0,0 0-1 0 0,0 0 1 0 0,0 0 0 0 0,1 0 0 0 0,-1 0-1 0 0,0 0 1 0 0,0 0 0 0 0,1 0 0 0 0,-1 0-1 0 0,1 0 1 0 0,-1 0 0 0 0,1-1 0 0 0,-1 0-1 0 0,0-5-1806 0 0</inkml:trace>
+</inkml:ink>
+</file>
+
+<file path=ppt/ink/ink21.xml><?xml version="1.0" encoding="utf-8"?>
+<inkml:ink xmlns:inkml="http://www.w3.org/2003/InkML">
+  <inkml:definitions>
+    <inkml:context xml:id="ctx0">
+      <inkml:inkSource xml:id="inkSrc0">
+        <inkml:traceFormat>
+          <inkml:channel name="X" type="integer" min="-2.14748E9" max="2.14748E9" units="cm"/>
+          <inkml:channel name="Y" type="integer" min="-2.14748E9" max="2.14748E9" units="cm"/>
+          <inkml:channel name="F" type="integer" max="32767" units="dev"/>
+          <inkml:channel name="OA" type="integer" max="360" units="deg"/>
+          <inkml:channel name="OE" type="integer" max="90" units="deg"/>
+        </inkml:traceFormat>
+        <inkml:channelProperties>
+          <inkml:channelProperty channel="X" name="resolution" value="1000" units="1/cm"/>
+          <inkml:channelProperty channel="Y" name="resolution" value="1000" units="1/cm"/>
+          <inkml:channelProperty channel="F" name="resolution" value="0" units="1/dev"/>
+          <inkml:channelProperty channel="OA" name="resolution" value="1000" units="1/deg"/>
+          <inkml:channelProperty channel="OE" name="resolution" value="1000" units="1/deg"/>
+        </inkml:channelProperties>
+      </inkml:inkSource>
+      <inkml:timestamp xml:id="ts0" timeString="2026-02-12T19:33:51.806"/>
+    </inkml:context>
+    <inkml:brush xml:id="br0">
+      <inkml:brushProperty name="width" value="0.025" units="cm"/>
+      <inkml:brushProperty name="height" value="0.025" units="cm"/>
+    </inkml:brush>
+  </inkml:definitions>
+  <inkml:trace contextRef="#ctx0" brushRef="#br0">10 1 512 0 0,'5'85'-504'0'0,"-17"-78"504"0"0,10-6 0 0 0,7-2 0 0 0,-2 1 0 0 0</inkml:trace>
+</inkml:ink>
+</file>
+
+<file path=ppt/ink/ink22.xml><?xml version="1.0" encoding="utf-8"?>
+<inkml:ink xmlns:inkml="http://www.w3.org/2003/InkML">
+  <inkml:definitions>
+    <inkml:context xml:id="ctx0">
+      <inkml:inkSource xml:id="inkSrc0">
+        <inkml:traceFormat>
+          <inkml:channel name="X" type="integer" min="-2.14748E9" max="2.14748E9" units="cm"/>
+          <inkml:channel name="Y" type="integer" min="-2.14748E9" max="2.14748E9" units="cm"/>
+          <inkml:channel name="F" type="integer" max="32767" units="dev"/>
+          <inkml:channel name="OA" type="integer" max="360" units="deg"/>
+          <inkml:channel name="OE" type="integer" max="90" units="deg"/>
+        </inkml:traceFormat>
+        <inkml:channelProperties>
+          <inkml:channelProperty channel="X" name="resolution" value="1000" units="1/cm"/>
+          <inkml:channelProperty channel="Y" name="resolution" value="1000" units="1/cm"/>
+          <inkml:channelProperty channel="F" name="resolution" value="0" units="1/dev"/>
+          <inkml:channelProperty channel="OA" name="resolution" value="1000" units="1/deg"/>
+          <inkml:channelProperty channel="OE" name="resolution" value="1000" units="1/deg"/>
+        </inkml:channelProperties>
+      </inkml:inkSource>
+      <inkml:timestamp xml:id="ts0" timeString="2026-02-12T19:33:52.655"/>
+    </inkml:context>
+    <inkml:brush xml:id="br0">
+      <inkml:brushProperty name="width" value="0.025" units="cm"/>
+      <inkml:brushProperty name="height" value="0.025" units="cm"/>
+    </inkml:brush>
+  </inkml:definitions>
+  <inkml:trace contextRef="#ctx0" brushRef="#br0">13 174 8 0 0,'-5'-10'-359'0'0,"-1"3"4986"0"0,4 11-22 0 0,6 9-3188 0 0,6 13-696 0 0,2-1-1 0 0,2 0 0 0 0,0-1 1 0 0,22 29-1 0 0,-18-27-254 0 0,4 10-32 0 0,18 26 39 0 0,-37-57-436 0 0,1-1 0 0 0,0 1 0 0 0,0-1-1 0 0,0 0 1 0 0,1 0 0 0 0,-1-1 0 0 0,1 1-1 0 0,0-1 1 0 0,8 4 0 0 0,-12-7-29 0 0,-1 1 0 0 0,1-1-1 0 0,0 0 1 0 0,-1 0 0 0 0,1 1 0 0 0,-1-1 0 0 0,1 0 0 0 0,-1 0 0 0 0,1 0 0 0 0,0 0 0 0 0,-1 0 0 0 0,1 0 0 0 0,-1 0 0 0 0,1 0 0 0 0,0 0 0 0 0,-1 0 0 0 0,1 0 0 0 0,-1 0-1 0 0,1 0 1 0 0,0-1 0 0 0,-1 1 0 0 0,1 0 0 0 0,-1 0 0 0 0,1-1 0 0 0,-1 1 0 0 0,1 0 0 0 0,-1-1 0 0 0,1 1 0 0 0,0-1 0 0 0,0-1 0 0 0,0 1 1 0 0,-1 0 0 0 0,1-1-1 0 0,0 1 1 0 0,-1-1-1 0 0,1 1 1 0 0,-1-1 0 0 0,1 0-1 0 0,-1 1 1 0 0,0-1-1 0 0,0-2 1 0 0,-4-44-38 0 0,4 45 18 0 0,-8-39 77 0 0,-15-43 0 0 0,12 46-58 0 0,5 11 1 0 0,6 26-11 0 0,-1 1 0 0 0,1-1 0 0 0,0 0 0 0 0,0 1 0 0 0,0-1-1 0 0,0 0 1 0 0,0 0 0 0 0,0 1 0 0 0,1-1 0 0 0,-1 0 0 0 0,0 1 0 0 0,1-1 0 0 0,1-3 0 0 0,-2 5 6 0 0,0 0-1 0 0,1 0 0 0 0,-1 0 1 0 0,1 0-1 0 0,-1 0 1 0 0,0-1-1 0 0,1 1 1 0 0,-1 0-1 0 0,0 0 0 0 0,1 0 1 0 0,-1 0-1 0 0,1 0 1 0 0,-1 1-1 0 0,0-1 1 0 0,1 0-1 0 0,-1 0 1 0 0,0 0-1 0 0,1 0 0 0 0,-1 0 1 0 0,0 0-1 0 0,1 1 1 0 0,-1-1-1 0 0,0 0 1 0 0,1 0-1 0 0,-1 0 0 0 0,0 1 1 0 0,0-1-1 0 0,1 0 1 0 0,-1 0-1 0 0,0 1 1 0 0,0-1-1 0 0,1 1 1 0 0,10 11-13 0 0,-10-11 1 0 0,53 65 172 0 0,36 41-99 0 0,-77-93-19 0 0,1-1 0 0 0,0-1 0 0 0,1 0 0 0 0,1-1 0 0 0,21 12 0 0 0,-37-23-33 0 0,1 1 0 0 0,0 0 0 0 0,0-1 0 0 0,0 1 0 0 0,0-1 1 0 0,-1 1-1 0 0,1-1 0 0 0,0 1 0 0 0,0-1 0 0 0,0 0 0 0 0,0 1 0 0 0,0-1 1 0 0,0 0-1 0 0,0 0 0 0 0,0 0 0 0 0,0 0 0 0 0,0 0 0 0 0,0 0 1 0 0,0 0-1 0 0,0 0 0 0 0,0 0 0 0 0,0-1 0 0 0,0 1 0 0 0,0 0 0 0 0,0-1 1 0 0,0 1-1 0 0,2-1 0 0 0,-3-1 7 0 0,1 1 0 0 0,-1 0 1 0 0,1-1-1 0 0,-1 1 0 0 0,0 0 0 0 0,0-1 1 0 0,0 1-1 0 0,1 0 0 0 0,-1-1 0 0 0,-1 1 1 0 0,1-1-1 0 0,0 1 0 0 0,0 0 0 0 0,0-1 1 0 0,-1 1-1 0 0,1 0 0 0 0,-1-1 0 0 0,1 1 1 0 0,-1 0-1 0 0,0-2 0 0 0,-14-28-32 0 0,-2 1-1 0 0,-1 1 1 0 0,-23-31 0 0 0,-10-14-323 0 0,45 63 60 0 0,-1 1 0 0 0,-1 0 0 0 0,-8-10 0 0 0,24 44-71 0 0,-3-17 357 0 0,0 0-1 0 0,0 0 0 0 0,1-1 0 0 0,0 0 1 0 0,0 0-1 0 0,0-1 0 0 0,1 1 1 0 0,12 6-1 0 0,-17-11-2 0 0,0 1 1 0 0,1-1-1 0 0,-1 0 1 0 0,0 0-1 0 0,0-1 1 0 0,1 1-1 0 0,-1 0 1 0 0,0-1-1 0 0,1 1 1 0 0,-1-1-1 0 0,0 0 1 0 0,1 0-1 0 0,-1 0 1 0 0,1 0 0 0 0,-1 0-1 0 0,0 0 1 0 0,1-1-1 0 0,-1 1 1 0 0,1-1-1 0 0,-1 0 1 0 0,0 0-1 0 0,0 0 1 0 0,0 0-1 0 0,1 0 1 0 0,-1 0-1 0 0,0 0 1 0 0,0-1-1 0 0,0 1 1 0 0,-1-1-1 0 0,1 1 1 0 0,0-1-1 0 0,0 0 1 0 0,-1 0-1 0 0,0 0 1 0 0,3-3-1 0 0,-1-1 5 0 0,1 0 0 0 0,-1 0 0 0 0,0-1 0 0 0,0 0-1 0 0,-1 0 1 0 0,0 1 0 0 0,0-1 0 0 0,0 0 0 0 0,-1-1 0 0 0,0 1 0 0 0,-1 0 0 0 0,0 0 0 0 0,0 0-1 0 0,0-1 1 0 0,-1 1 0 0 0,0 0 0 0 0,0 0 0 0 0,-1 0 0 0 0,0 0 0 0 0,0 0 0 0 0,0 0-1 0 0,-1 1 1 0 0,0-1 0 0 0,-1 1 0 0 0,0 0 0 0 0,1 0 0 0 0,-2 0 0 0 0,1 0 0 0 0,-1 1-1 0 0,0-1 1 0 0,0 1 0 0 0,0 0 0 0 0,-1 1 0 0 0,-11-8 0 0 0,16 11-15 0 0,0 1 1 0 0,0-1-1 0 0,0 0 1 0 0,0 1-1 0 0,0-1 1 0 0,-1 1-1 0 0,1-1 1 0 0,0 1-1 0 0,0 0 1 0 0,0-1 0 0 0,-1 1-1 0 0,1 0 1 0 0,0 0-1 0 0,0 0 1 0 0,-1 0-1 0 0,1 0 1 0 0,0 0-1 0 0,0 0 1 0 0,-1 1-1 0 0,-1-1 1 0 0,2 1 4 0 0,1 0 1 0 0,-1-1-1 0 0,0 1 1 0 0,1 0-1 0 0,-1-1 1 0 0,1 1 0 0 0,-1 0-1 0 0,1 0 1 0 0,0 0-1 0 0,-1-1 1 0 0,1 1-1 0 0,0 0 1 0 0,-1 0-1 0 0,1 0 1 0 0,0 0-1 0 0,0 0 1 0 0,0 0 0 0 0,0 0-1 0 0,0-1 1 0 0,0 1-1 0 0,0 1 1 0 0,1 8 40 0 0,1-1 0 0 0,0 0 1 0 0,0 0-1 0 0,4 9 1 0 0,-6-18-42 0 0,11 34 115 0 0,2-2-1 0 0,19 37 1 0 0,-27-59-103 0 0,1-1 0 0 0,0 1 0 0 0,0-1 1 0 0,1-1-1 0 0,0 1 0 0 0,0-1 0 0 0,1 0 0 0 0,0-1 0 0 0,1 1 0 0 0,-1-2 1 0 0,12 7-1 0 0,-17-11-15 0 0,1 0 0 0 0,0 0 1 0 0,0-1-1 0 0,0 1 0 0 0,-1-1 0 0 0,1 0 1 0 0,0-1-1 0 0,0 1 0 0 0,1 0 0 0 0,-1-1 1 0 0,0 0-1 0 0,0 0 0 0 0,4-1 0 0 0,-6 1-171 0 0,1-1-1 0 0,-1 0 1 0 0,0 1-1 0 0,0-1 1 0 0,0 0-1 0 0,1 0 1 0 0,-1 0-1 0 0,0-1 1 0 0,3-2-1 0 0,-3 2-490 0 0,0 0 0 0 0,0 0 0 0 0,0 0 0 0 0,0 0-1 0 0,0-1 1 0 0,-1 1 0 0 0,1-1 0 0 0,2-5 0 0 0,-1-1-2551 0 0,0 0-226 0 0</inkml:trace>
+</inkml:ink>
+</file>
+
+<file path=ppt/ink/ink23.xml><?xml version="1.0" encoding="utf-8"?>
+<inkml:ink xmlns:inkml="http://www.w3.org/2003/InkML">
+  <inkml:definitions>
+    <inkml:context xml:id="ctx0">
+      <inkml:inkSource xml:id="inkSrc0">
+        <inkml:traceFormat>
+          <inkml:channel name="X" type="integer" min="-2.14748E9" max="2.14748E9" units="cm"/>
+          <inkml:channel name="Y" type="integer" min="-2.14748E9" max="2.14748E9" units="cm"/>
+          <inkml:channel name="F" type="integer" max="32767" units="dev"/>
+          <inkml:channel name="OA" type="integer" max="360" units="deg"/>
+          <inkml:channel name="OE" type="integer" max="90" units="deg"/>
+        </inkml:traceFormat>
+        <inkml:channelProperties>
+          <inkml:channelProperty channel="X" name="resolution" value="1000" units="1/cm"/>
+          <inkml:channelProperty channel="Y" name="resolution" value="1000" units="1/cm"/>
+          <inkml:channelProperty channel="F" name="resolution" value="0" units="1/dev"/>
+          <inkml:channelProperty channel="OA" name="resolution" value="1000" units="1/deg"/>
+          <inkml:channelProperty channel="OE" name="resolution" value="1000" units="1/deg"/>
+        </inkml:channelProperties>
+      </inkml:inkSource>
+      <inkml:timestamp xml:id="ts0" timeString="2026-02-12T19:33:53.231"/>
+    </inkml:context>
+    <inkml:brush xml:id="br0">
+      <inkml:brushProperty name="width" value="0.025" units="cm"/>
+      <inkml:brushProperty name="height" value="0.025" units="cm"/>
+    </inkml:brush>
+  </inkml:definitions>
+  <inkml:trace contextRef="#ctx0" brushRef="#br0">3 43 8 0 0,'0'-1'60'0'0,"0"0"0"0"0,-1 0 0 0 0,1 0 1 0 0,-1 0-1 0 0,1 0 0 0 0,0 0 0 0 0,0 0 0 0 0,0 0 0 0 0,0 0 1 0 0,-1 0-1 0 0,1 0 0 0 0,1 0 0 0 0,-1 0 0 0 0,0 0 0 0 0,0 0 1 0 0,0-1-1 0 0,10 12 3147 0 0,13 29 787 0 0,-22-37-4271 0 0,113 176 4538 0 0,-22-38-2215 0 0,-88-136-1605 0 0,-3-5-139 0 0,-1-12-10 0 0,-6-19-227 0 0,-25-81 56 0 0,19 76-114 0 0,2 0 1 0 0,2-1-1 0 0,-6-49 1 0 0,14 83-7 0 0,0 1 1 0 0,0 0-1 0 0,0 0 1 0 0,0 0-1 0 0,1 0 1 0 0,-1 0 0 0 0,1 0-1 0 0,1-5 1 0 0,-1 7 3 0 0,-1 1-1 0 0,0-1 1 0 0,0 1 0 0 0,0 0 0 0 0,1-1 0 0 0,-1 1 0 0 0,0 0 0 0 0,0-1 0 0 0,1 1 0 0 0,-1 0 0 0 0,0 0 0 0 0,1-1 0 0 0,-1 1-1 0 0,0 0 1 0 0,1 0 0 0 0,-1-1 0 0 0,1 1 0 0 0,-1 0 0 0 0,0 0 0 0 0,1 0 0 0 0,-1 0 0 0 0,1 0 0 0 0,-1 0 0 0 0,0-1 0 0 0,1 1-1 0 0,1 1 6 0 0,-1-1-1 0 0,0 0 0 0 0,0 1 0 0 0,0-1 0 0 0,0 1 0 0 0,0-1 0 0 0,0 1 0 0 0,0-1 1 0 0,0 1-1 0 0,0 0 0 0 0,0-1 0 0 0,0 1 0 0 0,-1 0 0 0 0,2 1 0 0 0,11 12 121 0 0,-1 1 1 0 0,-1 1-1 0 0,19 33 0 0 0,-24-35-192 0 0,2-1 1 0 0,0 0 0 0 0,1-1-1 0 0,0 0 1 0 0,1 0-1 0 0,0-1 1 0 0,18 16 0 0 0,-27-26-146 0 0,1 0 0 0 0,-1 0 0 0 0,1 0 0 0 0,0 0 0 0 0,0 0 1 0 0,-1-1-1 0 0,1 1 0 0 0,0 0 0 0 0,4 0 0 0 0,-5-1-135 0 0,0 0 0 0 0,0 0 0 0 0,0 0-1 0 0,0 0 1 0 0,0 0 0 0 0,0-1 0 0 0,0 1 0 0 0,0 0 0 0 0,0 0 0 0 0,0-1-1 0 0,0 1 1 0 0,0 0 0 0 0,0-1 0 0 0,-1 1 0 0 0,1-1 0 0 0,0 0-1 0 0,0 1 1 0 0,0-1 0 0 0,0 1 0 0 0,0-2 0 0 0,4-4-1128 0 0</inkml:trace>
+</inkml:ink>
+</file>
+
+<file path=ppt/ink/ink24.xml><?xml version="1.0" encoding="utf-8"?>
+<inkml:ink xmlns:inkml="http://www.w3.org/2003/InkML">
+  <inkml:definitions>
+    <inkml:context xml:id="ctx0">
+      <inkml:inkSource xml:id="inkSrc0">
+        <inkml:traceFormat>
+          <inkml:channel name="X" type="integer" min="-2.14748E9" max="2.14748E9" units="cm"/>
+          <inkml:channel name="Y" type="integer" min="-2.14748E9" max="2.14748E9" units="cm"/>
+          <inkml:channel name="F" type="integer" max="32767" units="dev"/>
+          <inkml:channel name="OA" type="integer" max="360" units="deg"/>
+          <inkml:channel name="OE" type="integer" max="90" units="deg"/>
+        </inkml:traceFormat>
+        <inkml:channelProperties>
+          <inkml:channelProperty channel="X" name="resolution" value="1000" units="1/cm"/>
+          <inkml:channelProperty channel="Y" name="resolution" value="1000" units="1/cm"/>
+          <inkml:channelProperty channel="F" name="resolution" value="0" units="1/dev"/>
+          <inkml:channelProperty channel="OA" name="resolution" value="1000" units="1/deg"/>
+          <inkml:channelProperty channel="OE" name="resolution" value="1000" units="1/deg"/>
+        </inkml:channelProperties>
+      </inkml:inkSource>
+      <inkml:timestamp xml:id="ts0" timeString="2026-02-12T19:33:53.629"/>
+    </inkml:context>
+    <inkml:brush xml:id="br0">
+      <inkml:brushProperty name="width" value="0.025" units="cm"/>
+      <inkml:brushProperty name="height" value="0.025" units="cm"/>
+    </inkml:brush>
+  </inkml:definitions>
+  <inkml:trace contextRef="#ctx0" brushRef="#br0">27 1 48 0 0,'-1'0'256'0'0,"0"0"0"0"0,0-1 0 0 0,1 1-1 0 0,-1 0 1 0 0,0 0 0 0 0,0 0 0 0 0,1 0 0 0 0,-1 0 0 0 0,0 0 0 0 0,0 1 0 0 0,0-1-1 0 0,1 0 1 0 0,-1 0 0 0 0,0 0 0 0 0,1 1 0 0 0,-1-1 0 0 0,0 0 0 0 0,1 1-1 0 0,-1-1 1 0 0,0 1 0 0 0,1-1 0 0 0,-1 1 0 0 0,1-1 0 0 0,-1 1 0 0 0,0-1-1 0 0,1 1 1 0 0,-1 0 0 0 0,0 1 68 0 0,0 0 1 0 0,0 1-1 0 0,0-1 0 0 0,0 0 0 0 0,1 0 1 0 0,-1 1-1 0 0,1-1 0 0 0,0 0 0 0 0,-1 4 1 0 0,1 6 288 0 0,1 1 0 0 0,3 20 0 0 0,-3-29-303 0 0,22 111 1509 0 0,-19-102-1665 0 0,0 0 0 0 0,1 0 0 0 0,0-1 0 0 0,1 0 0 0 0,0 0 0 0 0,13 18 0 0 0,-18-29-129 0 0,0 1 0 0 0,0-1 1 0 0,0 0-1 0 0,1 1 1 0 0,-1-1-1 0 0,0 0 1 0 0,1 0-1 0 0,-1 0 0 0 0,1 0 1 0 0,-1 0-1 0 0,1 0 1 0 0,-1 0-1 0 0,1 0 0 0 0,0 0 1 0 0,-1-1-1 0 0,3 1 1 0 0,-3-1-16 0 0,-1 0 0 0 0,0 0 0 0 0,1 0 0 0 0,-1 0 0 0 0,1 0 0 0 0,-1 0 0 0 0,1 0 0 0 0,-1 0 0 0 0,0-1 1 0 0,1 1-1 0 0,-1 0 0 0 0,1 0 0 0 0,-1 0 0 0 0,0-1 0 0 0,1 1 0 0 0,-1 0 0 0 0,0-1 0 0 0,1 1 0 0 0,-1 0 0 0 0,0-1 0 0 0,0 1 1 0 0,1 0-1 0 0,-1-1 0 0 0,4-18 50 0 0,-5 2-8 0 0,-2-1 0 0 0,1 1-1 0 0,-2 0 1 0 0,0 0 0 0 0,-9-21-1 0 0,7 22-20 0 0,1-1 0 0 0,0 0 1 0 0,1 0-1 0 0,1 0 0 0 0,-1-22 0 0 0,4 39-22 0 0,0 0 0 0 0,0-1 0 0 0,0 1 0 0 0,0 0 0 0 0,0 0 0 0 0,0 0 1 0 0,0-1-1 0 0,0 1 0 0 0,0 0 0 0 0,0 0 0 0 0,0-1 0 0 0,0 1 0 0 0,0 0 1 0 0,0 0-1 0 0,0 0 0 0 0,0-1 0 0 0,0 1 0 0 0,0 0 0 0 0,0 0 0 0 0,0-1 1 0 0,1 1-1 0 0,-1 0 0 0 0,0 0 0 0 0,0 0 0 0 0,0 0 0 0 0,0-1 1 0 0,0 1-1 0 0,1 0 0 0 0,-1 0 0 0 0,0 0 0 0 0,0 0 0 0 0,0 0 0 0 0,1-1 1 0 0,-1 1-1 0 0,0 0 0 0 0,0 0 0 0 0,0 0 0 0 0,1 0 0 0 0,-1 0 0 0 0,0 0 1 0 0,1 0-1 0 0,9 6 240 0 0,12 17-5 0 0,-21-21-223 0 0,41 55 391 0 0,6 7-326 0 0,-42-56-107 0 0,0-1 0 0 0,1-1 0 0 0,0 1 1 0 0,0-1-1 0 0,1-1 0 0 0,9 6 1 0 0,-15-9-89 0 0,0-1 0 0 0,0 0 0 0 0,0 0 0 0 0,1 0 1 0 0,-1-1-1 0 0,0 1 0 0 0,1 0 0 0 0,-1-1 0 0 0,1 0 1 0 0,-1 1-1 0 0,0-1 0 0 0,1 0 0 0 0,3-1 1 0 0,-5 1-103 0 0,0 0 1 0 0,0 0 0 0 0,0-1 0 0 0,-1 1 0 0 0,1-1 0 0 0,0 1 0 0 0,0-1 0 0 0,0 1 0 0 0,0-1-1 0 0,0 0 1 0 0,-1 1 0 0 0,1-1 0 0 0,0 0 0 0 0,0 0 0 0 0,-1 1 0 0 0,1-1 0 0 0,-1 0 0 0 0,1 0 0 0 0,-1 0-1 0 0,1 0 1 0 0,-1 0 0 0 0,1 0 0 0 0,-1 0 0 0 0,0 0 0 0 0,0 0 0 0 0,1 0 0 0 0,-1 0 0 0 0,0 0-1 0 0,0 0 1 0 0,0 0 0 0 0,0 0 0 0 0,0-2 0 0 0,0-4-1730 0 0,0-2-149 0 0</inkml:trace>
+</inkml:ink>
+</file>
+
+<file path=ppt/ink/ink25.xml><?xml version="1.0" encoding="utf-8"?>
+<inkml:ink xmlns:inkml="http://www.w3.org/2003/InkML">
+  <inkml:definitions>
+    <inkml:context xml:id="ctx0">
+      <inkml:inkSource xml:id="inkSrc0">
+        <inkml:traceFormat>
+          <inkml:channel name="X" type="integer" min="-2.14748E9" max="2.14748E9" units="cm"/>
+          <inkml:channel name="Y" type="integer" min="-2.14748E9" max="2.14748E9" units="cm"/>
+          <inkml:channel name="F" type="integer" max="32767" units="dev"/>
+          <inkml:channel name="OA" type="integer" max="360" units="deg"/>
+          <inkml:channel name="OE" type="integer" max="90" units="deg"/>
+        </inkml:traceFormat>
+        <inkml:channelProperties>
+          <inkml:channelProperty channel="X" name="resolution" value="1000" units="1/cm"/>
+          <inkml:channelProperty channel="Y" name="resolution" value="1000" units="1/cm"/>
+          <inkml:channelProperty channel="F" name="resolution" value="0" units="1/dev"/>
+          <inkml:channelProperty channel="OA" name="resolution" value="1000" units="1/deg"/>
+          <inkml:channelProperty channel="OE" name="resolution" value="1000" units="1/deg"/>
+        </inkml:channelProperties>
+      </inkml:inkSource>
+      <inkml:timestamp xml:id="ts0" timeString="2026-02-12T19:33:54.159"/>
+    </inkml:context>
+    <inkml:brush xml:id="br0">
+      <inkml:brushProperty name="width" value="0.025" units="cm"/>
+      <inkml:brushProperty name="height" value="0.025" units="cm"/>
+    </inkml:brush>
+  </inkml:definitions>
+  <inkml:trace contextRef="#ctx0" brushRef="#br0">1 142 8 0 0,'5'16'2179'0'0,"1"1"0"0"0,1-1 0 0 0,10 16 0 0 0,-7-12-1108 0 0,23 38 1340 0 0,-29-53-2279 0 0,-1 0-1 0 0,1 1 1 0 0,1-1-1 0 0,-1-1 1 0 0,1 1-1 0 0,0-1 1 0 0,0 0-1 0 0,6 4 1 0 0,-11-7-124 0 0,1-1 0 0 0,-1 0 0 0 0,0 0 0 0 0,1 1 0 0 0,-1-1 0 0 0,0 0 0 0 0,1 0 0 0 0,-1 0 1 0 0,1 1-1 0 0,-1-1 0 0 0,0 0 0 0 0,1 0 0 0 0,-1 0 0 0 0,1 0 0 0 0,-1 0 0 0 0,1 0 1 0 0,-1 0-1 0 0,0 0 0 0 0,1 0 0 0 0,-1 0 0 0 0,1 0 0 0 0,-1 0 0 0 0,1 0 0 0 0,-1-1 0 0 0,0 1 1 0 0,1 0-1 0 0,-1 0 0 0 0,1 0 0 0 0,-1-1 0 0 0,0 1 0 0 0,1 0 0 0 0,-1 0 0 0 0,0-1 1 0 0,1 1-1 0 0,-1 0 0 0 0,0-1 0 0 0,1 1 0 0 0,3-21 136 0 0,-8-23-15 0 0,4 44-126 0 0,-8-37 46 0 0,5 27-48 0 0,0-1 1 0 0,1 1-1 0 0,0-1 0 0 0,1 0 1 0 0,1 0-1 0 0,0-17 0 0 0,0 28 5 0 0,0-1 0 0 0,0 1 0 0 0,0-1 0 0 0,0 1 0 0 0,0-1 0 0 0,1 1 0 0 0,-1 0 0 0 0,0-1 0 0 0,0 1 1 0 0,0-1-1 0 0,0 1 0 0 0,1 0 0 0 0,-1-1 0 0 0,0 1 0 0 0,1 0 0 0 0,-1-1 0 0 0,0 1 0 0 0,0 0 0 0 0,1-1 0 0 0,-1 1 0 0 0,1 0 0 0 0,-1 0 0 0 0,0-1 0 0 0,1 1 0 0 0,-1 0 0 0 0,0 0 0 0 0,1 0 0 0 0,-1 0 0 0 0,1 0 0 0 0,-1-1 0 0 0,1 1 0 0 0,-1 0 0 0 0,0 0 0 0 0,1 0 0 0 0,-1 0 0 0 0,1 0 0 0 0,-1 0 0 0 0,1 0 0 0 0,-1 1 0 0 0,1-1 0 0 0,-1 0 0 0 0,0 0 0 0 0,1 0 0 0 0,-1 0 0 0 0,1 0 0 0 0,-1 1 0 0 0,0-1 0 0 0,1 0 0 0 0,-1 0 0 0 0,0 1 0 0 0,1-1 0 0 0,-1 0 0 0 0,1 1 0 0 0,25 20 124 0 0,-15-12-89 0 0,-10-8-30 0 0,0-1-1 0 0,0 1 0 0 0,-1-1 0 0 0,1 1 1 0 0,1 0-1 0 0,-1-1 0 0 0,0 1 0 0 0,0-1 1 0 0,0 0-1 0 0,0 1 0 0 0,0-1 0 0 0,0 0 1 0 0,0 0-1 0 0,0 0 0 0 0,1 0 0 0 0,-1 0 1 0 0,0 0-1 0 0,0 0 0 0 0,0 0 0 0 0,0 0 1 0 0,0 0-1 0 0,1-1 0 0 0,-1 1 0 0 0,0 0 1 0 0,0-1-1 0 0,1 0 0 0 0,0 0 19 0 0,-1-1 0 0 0,0 1 0 0 0,0-1 0 0 0,0 1-1 0 0,0-1 1 0 0,0 1 0 0 0,0-1 0 0 0,0 1 0 0 0,-1-1 0 0 0,1 0 0 0 0,-1 0-1 0 0,1 1 1 0 0,-1-1 0 0 0,1-3 0 0 0,0-4 75 0 0,-1 1 0 0 0,0-1 1 0 0,0 1-1 0 0,-1-1 0 0 0,0 1 0 0 0,-2-10 0 0 0,-1 4-38 0 0,4 8-43 0 0,-2 0 0 0 0,1 1-1 0 0,0-1 1 0 0,-1 0-1 0 0,0 1 1 0 0,-1 0 0 0 0,1 0-1 0 0,-1-1 1 0 0,0 1 0 0 0,-6-8-1 0 0,8 16 23 0 0,0 0-1 0 0,1 0 1 0 0,0 0 0 0 0,0 0-1 0 0,0 0 1 0 0,0 0-1 0 0,0 0 1 0 0,2 5 0 0 0,0 9 100 0 0,2 1 0 0 0,0-1 0 0 0,1 0 0 0 0,13 28 0 0 0,-16-40-99 0 0,0 0 0 0 0,0 0 0 0 0,1 0 0 0 0,0 0 0 0 0,0-1-1 0 0,0 1 1 0 0,1-1 0 0 0,-1 0 0 0 0,1 0 0 0 0,0 0 0 0 0,0-1 0 0 0,0 1-1 0 0,1-1 1 0 0,-1 0 0 0 0,1 0 0 0 0,0 0 0 0 0,0-1 0 0 0,0 0 0 0 0,8 3 0 0 0,-11-5-32 0 0,1 0 0 0 0,-1 1 1 0 0,0-1-1 0 0,1 0 1 0 0,-1 0-1 0 0,1 0 1 0 0,-1-1-1 0 0,0 1 0 0 0,1 0 1 0 0,-1-1-1 0 0,0 0 1 0 0,1 1-1 0 0,-1-1 1 0 0,0 0-1 0 0,0 0 0 0 0,1 0 1 0 0,-1-1-1 0 0,0 1 1 0 0,0 0-1 0 0,-1-1 0 0 0,1 0 1 0 0,0 1-1 0 0,0-1 1 0 0,-1 0-1 0 0,1 0 1 0 0,-1 0-1 0 0,1 0 0 0 0,-1 0 1 0 0,0 0-1 0 0,1-3 1 0 0,12-35-1343 0 0,-6 0-4247 0 0,-6 28 2224 0 0,0 1 1504 0 0</inkml:trace>
+</inkml:ink>
+</file>
+
+<file path=ppt/ink/ink26.xml><?xml version="1.0" encoding="utf-8"?>
+<inkml:ink xmlns:inkml="http://www.w3.org/2003/InkML">
+  <inkml:definitions>
+    <inkml:context xml:id="ctx0">
+      <inkml:inkSource xml:id="inkSrc0">
+        <inkml:traceFormat>
+          <inkml:channel name="X" type="integer" min="-2.14748E9" max="2.14748E9" units="cm"/>
+          <inkml:channel name="Y" type="integer" min="-2.14748E9" max="2.14748E9" units="cm"/>
+          <inkml:channel name="F" type="integer" max="32767" units="dev"/>
+          <inkml:channel name="OA" type="integer" max="360" units="deg"/>
+          <inkml:channel name="OE" type="integer" max="90" units="deg"/>
+        </inkml:traceFormat>
+        <inkml:channelProperties>
+          <inkml:channelProperty channel="X" name="resolution" value="1000" units="1/cm"/>
+          <inkml:channelProperty channel="Y" name="resolution" value="1000" units="1/cm"/>
+          <inkml:channelProperty channel="F" name="resolution" value="0" units="1/dev"/>
+          <inkml:channelProperty channel="OA" name="resolution" value="1000" units="1/deg"/>
+          <inkml:channelProperty channel="OE" name="resolution" value="1000" units="1/deg"/>
+        </inkml:channelProperties>
+      </inkml:inkSource>
+      <inkml:timestamp xml:id="ts0" timeString="2026-02-12T19:33:54.767"/>
+    </inkml:context>
+    <inkml:brush xml:id="br0">
+      <inkml:brushProperty name="width" value="0.025" units="cm"/>
+      <inkml:brushProperty name="height" value="0.025" units="cm"/>
+    </inkml:brush>
+  </inkml:definitions>
+  <inkml:trace contextRef="#ctx0" brushRef="#br0">15 234 8 0 0,'-1'3'2642'0'0,"0"-5"-587"0"0,-2-14 630 0 0,-2-26-674 0 0,4 34-1667 0 0,-2-74 1941 0 0,3 73-2071 0 0,0 1 0 0 0,1-1-1 0 0,0 0 1 0 0,1 1 0 0 0,0-1 0 0 0,0 1 0 0 0,5-10-1 0 0,-7 18-188 0 0,0-1 0 0 0,0 1-1 0 0,0-1 1 0 0,0 1-1 0 0,1-1 1 0 0,-1 1 0 0 0,0 0-1 0 0,0-1 1 0 0,1 1-1 0 0,-1-1 1 0 0,0 1 0 0 0,1 0-1 0 0,-1-1 1 0 0,0 1 0 0 0,1 0-1 0 0,-1-1 1 0 0,1 1-1 0 0,-1 0 1 0 0,1-1 0 0 0,-1 1-1 0 0,1 0 1 0 0,-1 0-1 0 0,1 0 1 0 0,-1 0 0 0 0,1-1-1 0 0,-1 1 1 0 0,1 0 0 0 0,-1 0-1 0 0,1 0 1 0 0,0 0 20 0 0,0 1 0 0 0,0-1 1 0 0,0 1-1 0 0,0-1 0 0 0,0 1 1 0 0,0-1-1 0 0,0 1 0 0 0,0 0 1 0 0,-1-1-1 0 0,1 1 0 0 0,0 0 1 0 0,0-1-1 0 0,0 3 0 0 0,17 27 648 0 0,-1 16-519 0 0,-3-1 0 0 0,-2 2 0 0 0,8 56 0 0 0,-9-43-138 0 0,23 72-1 0 0,-34-131-31 0 0,0 0 0 0 0,0 0-1 0 0,1 0 1 0 0,-1-1 0 0 0,0 1 0 0 0,1 0 0 0 0,-1 0 0 0 0,1 0-1 0 0,-1 0 1 0 0,1 0 0 0 0,-1-1 0 0 0,1 1 0 0 0,0 0 0 0 0,-1 0 0 0 0,1-1-1 0 0,0 1 1 0 0,0-1 0 0 0,-1 1 0 0 0,2 0 0 0 0,-1-1 3 0 0,0 0 1 0 0,-1 0-1 0 0,1 0 1 0 0,0 0 0 0 0,-1 0-1 0 0,1 0 1 0 0,-1 0-1 0 0,1 0 1 0 0,0-1-1 0 0,-1 1 1 0 0,1 0 0 0 0,-1 0-1 0 0,1-1 1 0 0,-1 1-1 0 0,1 0 1 0 0,-1-1-1 0 0,1 1 1 0 0,-1-1 0 0 0,1 1-1 0 0,-1 0 1 0 0,1-1-1 0 0,0 0 1 0 0,4-6 78 0 0,-1 0 1 0 0,1-1 0 0 0,5-12-1 0 0,-3 6-54 0 0,14-21 134 0 0,-11 21-169 0 0,-1 0-1 0 0,-1-1 0 0 0,0 1 0 0 0,9-30 0 0 0,-17 31-1267 0 0,-3 12-1483 0 0,-2 6-1312 0 0,2 1 2410 0 0</inkml:trace>
+</inkml:ink>
+</file>
+
+<file path=ppt/ink/ink27.xml><?xml version="1.0" encoding="utf-8"?>
+<inkml:ink xmlns:inkml="http://www.w3.org/2003/InkML">
+  <inkml:definitions>
+    <inkml:context xml:id="ctx0">
+      <inkml:inkSource xml:id="inkSrc0">
+        <inkml:traceFormat>
+          <inkml:channel name="X" type="integer" min="-2.14748E9" max="2.14748E9" units="cm"/>
+          <inkml:channel name="Y" type="integer" min="-2.14748E9" max="2.14748E9" units="cm"/>
+          <inkml:channel name="F" type="integer" max="32767" units="dev"/>
+          <inkml:channel name="OA" type="integer" max="360" units="deg"/>
+          <inkml:channel name="OE" type="integer" max="90" units="deg"/>
+        </inkml:traceFormat>
+        <inkml:channelProperties>
+          <inkml:channelProperty channel="X" name="resolution" value="1000" units="1/cm"/>
+          <inkml:channelProperty channel="Y" name="resolution" value="1000" units="1/cm"/>
+          <inkml:channelProperty channel="F" name="resolution" value="0" units="1/dev"/>
+          <inkml:channelProperty channel="OA" name="resolution" value="1000" units="1/deg"/>
+          <inkml:channelProperty channel="OE" name="resolution" value="1000" units="1/deg"/>
+        </inkml:channelProperties>
+      </inkml:inkSource>
+      <inkml:timestamp xml:id="ts0" timeString="2026-02-12T19:33:55.157"/>
+    </inkml:context>
+    <inkml:brush xml:id="br0">
+      <inkml:brushProperty name="width" value="0.025" units="cm"/>
+      <inkml:brushProperty name="height" value="0.025" units="cm"/>
+    </inkml:brush>
+  </inkml:definitions>
+  <inkml:trace contextRef="#ctx0" brushRef="#br0">54 74 168 0 0,'-32'-44'4947'0'0,"11"15"1192"0"0,35 50-2096 0 0,7 17-2638 0 0,2 3-989 0 0,136 178-621 0 0,-155-215-3261 0 0,-6-8-188 0 0,-7-10-1135 0 0,3 7 3514 0 0</inkml:trace>
+</inkml:ink>
+</file>
+
+<file path=ppt/ink/ink28.xml><?xml version="1.0" encoding="utf-8"?>
+<inkml:ink xmlns:inkml="http://www.w3.org/2003/InkML">
+  <inkml:definitions>
+    <inkml:context xml:id="ctx0">
+      <inkml:inkSource xml:id="inkSrc0">
+        <inkml:traceFormat>
+          <inkml:channel name="X" type="integer" min="-2.14748E9" max="2.14748E9" units="cm"/>
+          <inkml:channel name="Y" type="integer" min="-2.14748E9" max="2.14748E9" units="cm"/>
+          <inkml:channel name="F" type="integer" max="32767" units="dev"/>
+          <inkml:channel name="OA" type="integer" max="360" units="deg"/>
+          <inkml:channel name="OE" type="integer" max="90" units="deg"/>
+        </inkml:traceFormat>
+        <inkml:channelProperties>
+          <inkml:channelProperty channel="X" name="resolution" value="1000" units="1/cm"/>
+          <inkml:channelProperty channel="Y" name="resolution" value="1000" units="1/cm"/>
+          <inkml:channelProperty channel="F" name="resolution" value="0" units="1/dev"/>
+          <inkml:channelProperty channel="OA" name="resolution" value="1000" units="1/deg"/>
+          <inkml:channelProperty channel="OE" name="resolution" value="1000" units="1/deg"/>
+        </inkml:channelProperties>
+      </inkml:inkSource>
+      <inkml:timestamp xml:id="ts0" timeString="2026-02-12T19:33:55.434"/>
+    </inkml:context>
+    <inkml:brush xml:id="br0">
+      <inkml:brushProperty name="width" value="0.025" units="cm"/>
+      <inkml:brushProperty name="height" value="0.025" units="cm"/>
+    </inkml:brush>
+  </inkml:definitions>
+  <inkml:trace contextRef="#ctx0" brushRef="#br0">7 145 8 0 0,'-1'0'206'0'0,"1"0"-1"0"0,-1-1 1 0 0,1 1-1 0 0,-1-1 1 0 0,1 1-1 0 0,0-1 1 0 0,-1 1-1 0 0,1-1 1 0 0,0 0-1 0 0,-1 1 1 0 0,1-1-1 0 0,0 1 1 0 0,0-1-1 0 0,-1 0 1 0 0,1 1-1 0 0,0-1 1 0 0,0 1-1 0 0,0-1 1 0 0,0 0-1 0 0,0 1 1 0 0,0-1-1 0 0,0 0 1 0 0,0 1-1 0 0,0-1 1 0 0,0 0-1 0 0,0 1 1 0 0,1-1-1 0 0,-1 1 1 0 0,0-1-1 0 0,0 0 1 0 0,1 1 0 0 0,-1-1-1 0 0,0 1 1 0 0,1-1-1 0 0,-1 1 1 0 0,0-1-1 0 0,1 1 1 0 0,0-2-1 0 0,20-24 2686 0 0,-17 20-2357 0 0,6-5 79 0 0,0-1 1 0 0,1 2-1 0 0,0-1 1 0 0,17-11-1 0 0,-24 19-510 0 0,0 1 0 0 0,0-1 0 0 0,0 1 0 0 0,1-1 0 0 0,-1 1 0 0 0,1 0 0 0 0,0 1 1 0 0,-1-1-1 0 0,1 1 0 0 0,0 0 0 0 0,0 0 0 0 0,0 1 0 0 0,0-1 0 0 0,0 1 0 0 0,0 0 0 0 0,0 0 0 0 0,5 2 0 0 0,-7-1-84 0 0,0 0 0 0 0,-1 0-1 0 0,1 0 1 0 0,0 1 0 0 0,-1-1-1 0 0,1 1 1 0 0,-1 0 0 0 0,0 0-1 0 0,1 0 1 0 0,-1 0 0 0 0,0 0 0 0 0,0 1-1 0 0,-1-1 1 0 0,1 0 0 0 0,0 1-1 0 0,-1 0 1 0 0,1-1 0 0 0,-1 1-1 0 0,0 0 1 0 0,0 0 0 0 0,0-1-1 0 0,0 1 1 0 0,0 5 0 0 0,2 3-22 0 0,-2 0 1 0 0,1 0-1 0 0,-2 0 1 0 0,1 1-1 0 0,-2 11 1 0 0,0-15 13 0 0,-1 1 1 0 0,1-1-1 0 0,-2 0 1 0 0,1 0 0 0 0,-7 14-1 0 0,8-19-55 0 0,0-1 0 0 0,-1 1-1 0 0,1 0 1 0 0,0-1 0 0 0,-1 1 0 0 0,0-1-1 0 0,0 0 1 0 0,1 1 0 0 0,-2-1-1 0 0,1 0 1 0 0,0 0 0 0 0,0-1 0 0 0,0 1-1 0 0,-1 0 1 0 0,1-1 0 0 0,-1 1 0 0 0,0-1-1 0 0,1 0 1 0 0,-1 0 0 0 0,-3 1-1 0 0,5-2-74 0 0,1 1 0 0 0,-1-1 1 0 0,1 0-1 0 0,-1 0 0 0 0,1 0 0 0 0,-1 0 0 0 0,1 0 0 0 0,-1 0 0 0 0,1 0 0 0 0,-1-1 0 0 0,1 1 0 0 0,-1 0 0 0 0,1 0 0 0 0,-1 0 0 0 0,1 0 0 0 0,0-1 0 0 0,-1 1 0 0 0,1 0 0 0 0,-1 0 0 0 0,1-1 0 0 0,0 1 0 0 0,-1 0 0 0 0,1-1 0 0 0,-1 1 0 0 0,1-1 0 0 0,0 1 0 0 0,0 0 1 0 0,-1-1-1 0 0,1 1 0 0 0,0-1 0 0 0,0 1 0 0 0,-1-1 0 0 0,1 0 0 0 0,-2-17-5691 0 0,2 14 4965 0 0,0-2-230 0 0</inkml:trace>
+</inkml:ink>
+</file>
+
+<file path=ppt/ink/ink29.xml><?xml version="1.0" encoding="utf-8"?>
+<inkml:ink xmlns:inkml="http://www.w3.org/2003/InkML">
+  <inkml:definitions>
+    <inkml:context xml:id="ctx0">
+      <inkml:inkSource xml:id="inkSrc0">
+        <inkml:traceFormat>
+          <inkml:channel name="X" type="integer" min="-2.14748E9" max="2.14748E9" units="cm"/>
+          <inkml:channel name="Y" type="integer" min="-2.14748E9" max="2.14748E9" units="cm"/>
+          <inkml:channel name="F" type="integer" max="32767" units="dev"/>
+          <inkml:channel name="OA" type="integer" max="360" units="deg"/>
+          <inkml:channel name="OE" type="integer" max="90" units="deg"/>
+        </inkml:traceFormat>
+        <inkml:channelProperties>
+          <inkml:channelProperty channel="X" name="resolution" value="1000" units="1/cm"/>
+          <inkml:channelProperty channel="Y" name="resolution" value="1000" units="1/cm"/>
+          <inkml:channelProperty channel="F" name="resolution" value="0" units="1/dev"/>
+          <inkml:channelProperty channel="OA" name="resolution" value="1000" units="1/deg"/>
+          <inkml:channelProperty channel="OE" name="resolution" value="1000" units="1/deg"/>
+        </inkml:channelProperties>
+      </inkml:inkSource>
+      <inkml:timestamp xml:id="ts0" timeString="2026-02-12T19:33:55.730"/>
+    </inkml:context>
+    <inkml:brush xml:id="br0">
+      <inkml:brushProperty name="width" value="0.025" units="cm"/>
+      <inkml:brushProperty name="height" value="0.025" units="cm"/>
+    </inkml:brush>
+  </inkml:definitions>
+  <inkml:trace contextRef="#ctx0" brushRef="#br0">0 106 8 0 0,'4'1'251'0'0,"-1"0"0"0"0,0 1 0 0 0,0-1-1 0 0,0 1 1 0 0,-1 0 0 0 0,1 0 0 0 0,0 0 0 0 0,-1 0 0 0 0,1 1-1 0 0,-1-1 1 0 0,1 0 0 0 0,1 4 0 0 0,25 38 4304 0 0,-22-34-3640 0 0,16 28 1375 0 0,-1 1 0 0 0,-1 1 0 0 0,17 51-1 0 0,-48-186-1728 0 0,2 57-754 0 0,0 7-410 0 0,3 0 1 0 0,0 0-1 0 0,2 0 0 0 0,1-42 1 0 0,2 69-93 0 0,1 0 0 0 0,-1 0 0 0 0,1 1 1 0 0,0-1-1 0 0,0 0 0 0 0,0 0 1 0 0,0 0-1 0 0,1 1 0 0 0,0-1 0 0 0,-1 1 1 0 0,1-1-1 0 0,0 1 0 0 0,1 0 0 0 0,4-6 1 0 0,0 4-233 0 0</inkml:trace>
 </inkml:ink>
 </file>
 
@@ -469,6 +841,316 @@
 </inkml:ink>
 </file>
 
+<file path=ppt/ink/ink30.xml><?xml version="1.0" encoding="utf-8"?>
+<inkml:ink xmlns:inkml="http://www.w3.org/2003/InkML">
+  <inkml:definitions>
+    <inkml:context xml:id="ctx0">
+      <inkml:inkSource xml:id="inkSrc0">
+        <inkml:traceFormat>
+          <inkml:channel name="X" type="integer" min="-2.14748E9" max="2.14748E9" units="cm"/>
+          <inkml:channel name="Y" type="integer" min="-2.14748E9" max="2.14748E9" units="cm"/>
+          <inkml:channel name="F" type="integer" max="32767" units="dev"/>
+          <inkml:channel name="OA" type="integer" max="360" units="deg"/>
+          <inkml:channel name="OE" type="integer" max="90" units="deg"/>
+        </inkml:traceFormat>
+        <inkml:channelProperties>
+          <inkml:channelProperty channel="X" name="resolution" value="1000" units="1/cm"/>
+          <inkml:channelProperty channel="Y" name="resolution" value="1000" units="1/cm"/>
+          <inkml:channelProperty channel="F" name="resolution" value="0" units="1/dev"/>
+          <inkml:channelProperty channel="OA" name="resolution" value="1000" units="1/deg"/>
+          <inkml:channelProperty channel="OE" name="resolution" value="1000" units="1/deg"/>
+        </inkml:channelProperties>
+      </inkml:inkSource>
+      <inkml:timestamp xml:id="ts0" timeString="2026-02-12T19:33:55.842"/>
+    </inkml:context>
+    <inkml:brush xml:id="br0">
+      <inkml:brushProperty name="width" value="0.025" units="cm"/>
+      <inkml:brushProperty name="height" value="0.025" units="cm"/>
+    </inkml:brush>
+  </inkml:definitions>
+  <inkml:trace contextRef="#ctx0" brushRef="#br0">0 1 8 0 0,'18'34'2060'0'0,"0"-1"0"0"0,3-1 0 0 0,25 33 0 0 0,-41-61-2247 0 0,-1-3-2752 0 0</inkml:trace>
+</inkml:ink>
+</file>
+
+<file path=ppt/ink/ink31.xml><?xml version="1.0" encoding="utf-8"?>
+<inkml:ink xmlns:inkml="http://www.w3.org/2003/InkML">
+  <inkml:definitions>
+    <inkml:context xml:id="ctx0">
+      <inkml:inkSource xml:id="inkSrc0">
+        <inkml:traceFormat>
+          <inkml:channel name="X" type="integer" min="-2.14748E9" max="2.14748E9" units="cm"/>
+          <inkml:channel name="Y" type="integer" min="-2.14748E9" max="2.14748E9" units="cm"/>
+          <inkml:channel name="F" type="integer" max="32767" units="dev"/>
+          <inkml:channel name="OA" type="integer" max="360" units="deg"/>
+          <inkml:channel name="OE" type="integer" max="90" units="deg"/>
+        </inkml:traceFormat>
+        <inkml:channelProperties>
+          <inkml:channelProperty channel="X" name="resolution" value="1000" units="1/cm"/>
+          <inkml:channelProperty channel="Y" name="resolution" value="1000" units="1/cm"/>
+          <inkml:channelProperty channel="F" name="resolution" value="0" units="1/dev"/>
+          <inkml:channelProperty channel="OA" name="resolution" value="1000" units="1/deg"/>
+          <inkml:channelProperty channel="OE" name="resolution" value="1000" units="1/deg"/>
+        </inkml:channelProperties>
+      </inkml:inkSource>
+      <inkml:timestamp xml:id="ts0" timeString="2026-02-12T19:33:56.004"/>
+    </inkml:context>
+    <inkml:brush xml:id="br0">
+      <inkml:brushProperty name="width" value="0.025" units="cm"/>
+      <inkml:brushProperty name="height" value="0.025" units="cm"/>
+    </inkml:brush>
+  </inkml:definitions>
+  <inkml:trace contextRef="#ctx0" brushRef="#br0">18 1 160 0 0,'-5'0'1376'0'0,"1"1"-535"0"0,0 3 1671 0 0,3 0-640 0 0,0 1-1087 0 0,-1 0-177 0 0,2 0 40 0 0,0-1-224 0 0,0 1-304 0 0,2-1-80 0 0,0 0-88 0 0,3 2-216 0 0,1-1-464 0 0,1 0 256 0 0,3 0-2169 0 0,1 2 1609 0 0,2-1-112 0 0</inkml:trace>
+</inkml:ink>
+</file>
+
+<file path=ppt/ink/ink32.xml><?xml version="1.0" encoding="utf-8"?>
+<inkml:ink xmlns:inkml="http://www.w3.org/2003/InkML">
+  <inkml:definitions>
+    <inkml:context xml:id="ctx0">
+      <inkml:inkSource xml:id="inkSrc0">
+        <inkml:traceFormat>
+          <inkml:channel name="X" type="integer" min="-2.14748E9" max="2.14748E9" units="cm"/>
+          <inkml:channel name="Y" type="integer" min="-2.14748E9" max="2.14748E9" units="cm"/>
+          <inkml:channel name="F" type="integer" max="32767" units="dev"/>
+          <inkml:channel name="OA" type="integer" max="360" units="deg"/>
+          <inkml:channel name="OE" type="integer" max="90" units="deg"/>
+        </inkml:traceFormat>
+        <inkml:channelProperties>
+          <inkml:channelProperty channel="X" name="resolution" value="1000" units="1/cm"/>
+          <inkml:channelProperty channel="Y" name="resolution" value="1000" units="1/cm"/>
+          <inkml:channelProperty channel="F" name="resolution" value="0" units="1/dev"/>
+          <inkml:channelProperty channel="OA" name="resolution" value="1000" units="1/deg"/>
+          <inkml:channelProperty channel="OE" name="resolution" value="1000" units="1/deg"/>
+        </inkml:channelProperties>
+      </inkml:inkSource>
+      <inkml:timestamp xml:id="ts0" timeString="2026-02-12T19:33:56.295"/>
+    </inkml:context>
+    <inkml:brush xml:id="br0">
+      <inkml:brushProperty name="width" value="0.025" units="cm"/>
+      <inkml:brushProperty name="height" value="0.025" units="cm"/>
+    </inkml:brush>
+  </inkml:definitions>
+  <inkml:trace contextRef="#ctx0" brushRef="#br0">0 39 664 0 0,'5'46'10578'0'0,"-2"-34"-9495"0"0,-1-1 0 0 0,9 18 0 0 0,-10-24-1011 0 0,1-1-1 0 0,-1 0 1 0 0,1 0-1 0 0,0 0 1 0 0,1 0-1 0 0,-1 0 1 0 0,1-1-1 0 0,0 1 1 0 0,0-1-1 0 0,0 1 1 0 0,0-1-1 0 0,0 0 0 0 0,1 0 1 0 0,0-1-1 0 0,-1 1 1 0 0,1-1-1 0 0,0 1 1 0 0,0-1-1 0 0,9 3 1 0 0,-11-5-24 0 0,0 1 1 0 0,0-1 0 0 0,1 0 0 0 0,-1 0 0 0 0,0 0-1 0 0,0 0 1 0 0,1 0 0 0 0,-1 0 0 0 0,0-1-1 0 0,0 1 1 0 0,0-1 0 0 0,1 0 0 0 0,-1 1-1 0 0,0-1 1 0 0,0 0 0 0 0,0 0 0 0 0,0 0 0 0 0,0-1-1 0 0,0 1 1 0 0,-1 0 0 0 0,3-2 0 0 0,-1 0 25 0 0,-1 0 1 0 0,1-1-1 0 0,-1 1 1 0 0,1 0-1 0 0,-1-1 1 0 0,0 0-1 0 0,-1 1 1 0 0,1-1-1 0 0,-1 0 1 0 0,1 0-1 0 0,0-5 1 0 0,-1 3 19 0 0,0 0 1 0 0,0-1 0 0 0,-1 1 0 0 0,1 0 0 0 0,-2 0 0 0 0,1-1 0 0 0,-2-8 0 0 0,1 12-48 0 0,1 0 1 0 0,-1-1 0 0 0,0 1 0 0 0,0 0-1 0 0,-1 0 1 0 0,1 0 0 0 0,-1 0-1 0 0,1 0 1 0 0,-1 0 0 0 0,0 0 0 0 0,0 0-1 0 0,0 1 1 0 0,-3-4 0 0 0,0 2-158 0 0,0 0-1 0 0,0 0 1 0 0,0 0 0 0 0,-1 0 0 0 0,1 1 0 0 0,-1 0 0 0 0,0 0-1 0 0,0 1 1 0 0,0-1 0 0 0,0 1 0 0 0,0 1 0 0 0,-12-3-1 0 0,18 4-54 0 0,0 0-1 0 0,0 0 0 0 0,1 0 1 0 0,-1 0-1 0 0,0 0 0 0 0,0 0 0 0 0,0 0 1 0 0,0 0-1 0 0,0 0 0 0 0,0 1 0 0 0,0-1 1 0 0,2 2-3648 0 0,-2-2 3648 0 0,0 0-1 0 0,0 0 0 0 0,0 0 1 0 0,0 0-1 0 0,-1 0 0 0 0,1 1 0 0 0,0-1 1 0 0,0 0-1 0 0,0 0 0 0 0,0 0 0 0 0,0 0 1 0 0,0 0-1 0 0,-1 1-1326 0 0,4-1-110 0 0</inkml:trace>
+</inkml:ink>
+</file>
+
+<file path=ppt/ink/ink33.xml><?xml version="1.0" encoding="utf-8"?>
+<inkml:ink xmlns:inkml="http://www.w3.org/2003/InkML">
+  <inkml:definitions>
+    <inkml:context xml:id="ctx0">
+      <inkml:inkSource xml:id="inkSrc0">
+        <inkml:traceFormat>
+          <inkml:channel name="X" type="integer" min="-2.14748E9" max="2.14748E9" units="cm"/>
+          <inkml:channel name="Y" type="integer" min="-2.14748E9" max="2.14748E9" units="cm"/>
+          <inkml:channel name="F" type="integer" max="32767" units="dev"/>
+          <inkml:channel name="OA" type="integer" max="360" units="deg"/>
+          <inkml:channel name="OE" type="integer" max="90" units="deg"/>
+        </inkml:traceFormat>
+        <inkml:channelProperties>
+          <inkml:channelProperty channel="X" name="resolution" value="1000" units="1/cm"/>
+          <inkml:channelProperty channel="Y" name="resolution" value="1000" units="1/cm"/>
+          <inkml:channelProperty channel="F" name="resolution" value="0" units="1/dev"/>
+          <inkml:channelProperty channel="OA" name="resolution" value="1000" units="1/deg"/>
+          <inkml:channelProperty channel="OE" name="resolution" value="1000" units="1/deg"/>
+        </inkml:channelProperties>
+      </inkml:inkSource>
+      <inkml:timestamp xml:id="ts0" timeString="2026-02-12T19:33:56.738"/>
+    </inkml:context>
+    <inkml:brush xml:id="br0">
+      <inkml:brushProperty name="width" value="0.025" units="cm"/>
+      <inkml:brushProperty name="height" value="0.025" units="cm"/>
+    </inkml:brush>
+  </inkml:definitions>
+  <inkml:trace contextRef="#ctx0" brushRef="#br0">0 219 8 0 0,'8'5'1050'0'0,"-1"0"0"0"0,-1 0 0 0 0,1 1 0 0 0,-1 0 0 0 0,0 0 0 0 0,0 0 0 0 0,-1 1 0 0 0,1 0-1 0 0,-2 0 1 0 0,1 0 0 0 0,4 10 0 0 0,-6-10-612 0 0,0 0 0 0 0,0-1-1 0 0,-1 1 1 0 0,0 0 0 0 0,0 0-1 0 0,-1 0 1 0 0,0 1 0 0 0,1 8-1 0 0,-4-82-659 0 0,0 33-559 0 0,2 0-1 0 0,1 0 0 0 0,10-59 0 0 0,19-26 1372 0 0,-31 124-379 0 0,0 0 1 0 0,0 1-1 0 0,1-1 1 0 0,-1 0-1 0 0,1 0 0 0 0,1 0 1 0 0,-1 0-1 0 0,3 8 1 0 0,-3-10-158 0 0,1 1 1 0 0,0-1-1 0 0,1 0 1 0 0,-1 0-1 0 0,1 0 1 0 0,0 0-1 0 0,0 0 1 0 0,0 0-1 0 0,1-1 1 0 0,-1 1-1 0 0,1-1 1 0 0,0 1-1 0 0,0-1 1 0 0,3 3 0 0 0,25 16 437 0 0,-21-16-222 0 0,-1 0 0 0 0,0 1 0 0 0,0 0 0 0 0,0 1 0 0 0,11 13 0 0 0,-18-18-237 0 0,0 0 1 0 0,0 0 0 0 0,0 0 0 0 0,-1 0 0 0 0,1 1 0 0 0,-1-1 0 0 0,0 0 0 0 0,0 1 0 0 0,0-1-1 0 0,0 1 1 0 0,-1-1 0 0 0,1 1 0 0 0,-1-1 0 0 0,0 1 0 0 0,0-1 0 0 0,0 1 0 0 0,-1-1-1 0 0,1 1 1 0 0,-1-1 0 0 0,0 1 0 0 0,0-1 0 0 0,-3 6 0 0 0,4-8-43 0 0,0 0 1 0 0,0 0 0 0 0,-1 0-1 0 0,1 0 1 0 0,0-1-1 0 0,-1 1 1 0 0,1 0-1 0 0,-1-1 1 0 0,1 1 0 0 0,-1 0-1 0 0,1-1 1 0 0,-1 1-1 0 0,1 0 1 0 0,-1-1 0 0 0,0 1-1 0 0,0 0 1 0 0,1-1-42 0 0,-1 0 1 0 0,1 0-1 0 0,0 0 0 0 0,0 0 1 0 0,-1 0-1 0 0,1 0 0 0 0,0 0 1 0 0,-1 0-1 0 0,1-1 0 0 0,0 1 1 0 0,0 0-1 0 0,-1 0 1 0 0,1 0-1 0 0,0 0 0 0 0,0 0 1 0 0,-1-1-1 0 0,1 1 0 0 0,0 0 1 0 0,0 0-1 0 0,-1 0 1 0 0,1-1-1 0 0,0 1 0 0 0,0 0 1 0 0,0 0-1 0 0,0 0 0 0 0,-1-1 1 0 0,1 1-1 0 0,0 0 0 0 0,0-1 1 0 0,-8-27-7745 0 0,7 20 4350 0 0</inkml:trace>
+</inkml:ink>
+</file>
+
+<file path=ppt/ink/ink34.xml><?xml version="1.0" encoding="utf-8"?>
+<inkml:ink xmlns:inkml="http://www.w3.org/2003/InkML">
+  <inkml:definitions>
+    <inkml:context xml:id="ctx0">
+      <inkml:inkSource xml:id="inkSrc0">
+        <inkml:traceFormat>
+          <inkml:channel name="X" type="integer" min="-2.14748E9" max="2.14748E9" units="cm"/>
+          <inkml:channel name="Y" type="integer" min="-2.14748E9" max="2.14748E9" units="cm"/>
+          <inkml:channel name="F" type="integer" max="32767" units="dev"/>
+          <inkml:channel name="OA" type="integer" max="360" units="deg"/>
+          <inkml:channel name="OE" type="integer" max="90" units="deg"/>
+        </inkml:traceFormat>
+        <inkml:channelProperties>
+          <inkml:channelProperty channel="X" name="resolution" value="1000" units="1/cm"/>
+          <inkml:channelProperty channel="Y" name="resolution" value="1000" units="1/cm"/>
+          <inkml:channelProperty channel="F" name="resolution" value="0" units="1/dev"/>
+          <inkml:channelProperty channel="OA" name="resolution" value="1000" units="1/deg"/>
+          <inkml:channelProperty channel="OE" name="resolution" value="1000" units="1/deg"/>
+        </inkml:channelProperties>
+      </inkml:inkSource>
+      <inkml:timestamp xml:id="ts0" timeString="2026-02-12T19:33:56.924"/>
+    </inkml:context>
+    <inkml:brush xml:id="br0">
+      <inkml:brushProperty name="width" value="0.025" units="cm"/>
+      <inkml:brushProperty name="height" value="0.025" units="cm"/>
+    </inkml:brush>
+  </inkml:definitions>
+  <inkml:trace contextRef="#ctx0" brushRef="#br0">27 1 2128 0 0,'0'0'218'0'0,"0"0"-1"0"0,0 0 0 0 0,0-1 1 0 0,0 1-1 0 0,1 0 0 0 0,-1 0 1 0 0,0 0-1 0 0,0 0 0 0 0,0 0 0 0 0,0 0 1 0 0,0 0-1 0 0,1 1 0 0 0,-1-1 1 0 0,0 0-1 0 0,2 1 2825 0 0,-2-1-2825 0 0,0 0 1 0 0,0 0-1 0 0,0 0 0 0 0,0 0 1 0 0,0 1-1 0 0,0-1 0 0 0,0 0 0 0 0,0 0 1 0 0,0 0-1 0 0,0 0 0 0 0,0 1 1 0 0,0-1-1 0 0,0 0 0 0 0,0 0 1 0 0,0 0-1 0 0,0 0 0 0 0,0 0 0 0 0,0 1 1 0 0,-2 12 3713 0 0,-8 11-1304 0 0,6-16-2490 0 0,1-4 63 0 0,1 0 1 0 0,0 0-1 0 0,0 0 1 0 0,0 0-1 0 0,-1 7 1 0 0,3-10-397 0 0,0 0 1 0 0,0 0-1 0 0,0 0 1 0 0,0 0 0 0 0,0 0-1 0 0,0 0 1 0 0,0 0-1 0 0,0 0 1 0 0,0 0-1 0 0,0 0 1 0 0,1 0 0 0 0,-1 0-1 0 0,0 0 1 0 0,1 0-1 0 0,-1 0 1 0 0,0-1 0 0 0,1 1-1 0 0,0 0 1 0 0,-1 0-1 0 0,1 0 1 0 0,-1-1 0 0 0,1 1-1 0 0,0 0 1 0 0,0 0-1 0 0,-1-1 1 0 0,1 1 0 0 0,0-1-1 0 0,0 1 1 0 0,0-1-1 0 0,1 1 1 0 0,4 2-3524 0 0,1 1 1153 0 0</inkml:trace>
+</inkml:ink>
+</file>
+
+<file path=ppt/ink/ink35.xml><?xml version="1.0" encoding="utf-8"?>
+<inkml:ink xmlns:inkml="http://www.w3.org/2003/InkML">
+  <inkml:definitions>
+    <inkml:context xml:id="ctx0">
+      <inkml:inkSource xml:id="inkSrc0">
+        <inkml:traceFormat>
+          <inkml:channel name="X" type="integer" min="-2.14748E9" max="2.14748E9" units="cm"/>
+          <inkml:channel name="Y" type="integer" min="-2.14748E9" max="2.14748E9" units="cm"/>
+          <inkml:channel name="F" type="integer" max="32767" units="dev"/>
+          <inkml:channel name="OA" type="integer" max="360" units="deg"/>
+          <inkml:channel name="OE" type="integer" max="90" units="deg"/>
+        </inkml:traceFormat>
+        <inkml:channelProperties>
+          <inkml:channelProperty channel="X" name="resolution" value="1000" units="1/cm"/>
+          <inkml:channelProperty channel="Y" name="resolution" value="1000" units="1/cm"/>
+          <inkml:channelProperty channel="F" name="resolution" value="0" units="1/dev"/>
+          <inkml:channelProperty channel="OA" name="resolution" value="1000" units="1/deg"/>
+          <inkml:channelProperty channel="OE" name="resolution" value="1000" units="1/deg"/>
+        </inkml:channelProperties>
+      </inkml:inkSource>
+      <inkml:timestamp xml:id="ts0" timeString="2026-02-12T19:33:57.074"/>
+    </inkml:context>
+    <inkml:brush xml:id="br0">
+      <inkml:brushProperty name="width" value="0.025" units="cm"/>
+      <inkml:brushProperty name="height" value="0.025" units="cm"/>
+    </inkml:brush>
+  </inkml:definitions>
+  <inkml:trace contextRef="#ctx0" brushRef="#br0">15 0 1304 0 0,'1'14'2641'0'0,"-1"-3"2568"0"0,0 0-3721 0 0,-2-3-295 0 0,2-1-217 0 0,-1 0-384 0 0,-1-1-40 0 0,0-1-248 0 0,1-3-304 0 0,-2 0-400 0 0,1-2-872 0 0,1-1 456 0 0,0-2-1737 0 0</inkml:trace>
+</inkml:ink>
+</file>
+
+<file path=ppt/ink/ink36.xml><?xml version="1.0" encoding="utf-8"?>
+<inkml:ink xmlns:inkml="http://www.w3.org/2003/InkML">
+  <inkml:definitions>
+    <inkml:context xml:id="ctx0">
+      <inkml:inkSource xml:id="inkSrc0">
+        <inkml:traceFormat>
+          <inkml:channel name="X" type="integer" min="-2.14748E9" max="2.14748E9" units="cm"/>
+          <inkml:channel name="Y" type="integer" min="-2.14748E9" max="2.14748E9" units="cm"/>
+          <inkml:channel name="F" type="integer" max="32767" units="dev"/>
+          <inkml:channel name="OA" type="integer" max="360" units="deg"/>
+          <inkml:channel name="OE" type="integer" max="90" units="deg"/>
+        </inkml:traceFormat>
+        <inkml:channelProperties>
+          <inkml:channelProperty channel="X" name="resolution" value="1000" units="1/cm"/>
+          <inkml:channelProperty channel="Y" name="resolution" value="1000" units="1/cm"/>
+          <inkml:channelProperty channel="F" name="resolution" value="0" units="1/dev"/>
+          <inkml:channelProperty channel="OA" name="resolution" value="1000" units="1/deg"/>
+          <inkml:channelProperty channel="OE" name="resolution" value="1000" units="1/deg"/>
+        </inkml:channelProperties>
+      </inkml:inkSource>
+      <inkml:timestamp xml:id="ts0" timeString="2026-02-12T19:33:59.707"/>
+    </inkml:context>
+    <inkml:brush xml:id="br0">
+      <inkml:brushProperty name="width" value="0.025" units="cm"/>
+      <inkml:brushProperty name="height" value="0.025" units="cm"/>
+    </inkml:brush>
+  </inkml:definitions>
+  <inkml:trace contextRef="#ctx0" brushRef="#br0">60 55 512 0 0,'-24'-8'704'0'0,"22"6"-247"0"0,-1 1 0 0 0,1-1 0 0 0,-1 1 0 0 0,1-1 0 0 0,0 0 0 0 0,-1 0-1 0 0,1 0 1 0 0,0-1 0 0 0,0 1 0 0 0,1 0 0 0 0,-1-1 0 0 0,0 1 0 0 0,1-1-1 0 0,0 0 1 0 0,-1 1 0 0 0,1-1 0 0 0,0 0 0 0 0,0-3 0 0 0,1 6-365 0 0,0 0 1 0 0,1-1-1 0 0,-1 1 1 0 0,0 0-1 0 0,1 0 0 0 0,-1 0 1 0 0,1 0-1 0 0,-1 0 1 0 0,0 0-1 0 0,1 0 1 0 0,-1 0-1 0 0,1 0 1 0 0,-1 0-1 0 0,0 1 1 0 0,1-1-1 0 0,-1 0 0 0 0,0 0 1 0 0,1 0-1 0 0,-1 0 1 0 0,1 1-1 0 0,-1-1 1 0 0,0 0-1 0 0,1 0 1 0 0,-1 1-1 0 0,0-1 0 0 0,0 0 1 0 0,1 0-1 0 0,-1 1 1 0 0,0-1-1 0 0,0 0 1 0 0,1 1-1 0 0,13 10 563 0 0,9 12 98 0 0,-2 0 1 0 0,27 38 0 0 0,-30-36-591 0 0,1-1 1 0 0,40 38-1 0 0,-51-54-1619 0 0,-13-9-4237 0 0,-12-5 131 0 0,10 4 3572 0 0</inkml:trace>
+</inkml:ink>
+</file>
+
+<file path=ppt/ink/ink37.xml><?xml version="1.0" encoding="utf-8"?>
+<inkml:ink xmlns:inkml="http://www.w3.org/2003/InkML">
+  <inkml:definitions>
+    <inkml:context xml:id="ctx0">
+      <inkml:inkSource xml:id="inkSrc0">
+        <inkml:traceFormat>
+          <inkml:channel name="X" type="integer" min="-2.14748E9" max="2.14748E9" units="cm"/>
+          <inkml:channel name="Y" type="integer" min="-2.14748E9" max="2.14748E9" units="cm"/>
+          <inkml:channel name="F" type="integer" max="32767" units="dev"/>
+          <inkml:channel name="OA" type="integer" max="360" units="deg"/>
+          <inkml:channel name="OE" type="integer" max="90" units="deg"/>
+        </inkml:traceFormat>
+        <inkml:channelProperties>
+          <inkml:channelProperty channel="X" name="resolution" value="1000" units="1/cm"/>
+          <inkml:channelProperty channel="Y" name="resolution" value="1000" units="1/cm"/>
+          <inkml:channelProperty channel="F" name="resolution" value="0" units="1/dev"/>
+          <inkml:channelProperty channel="OA" name="resolution" value="1000" units="1/deg"/>
+          <inkml:channelProperty channel="OE" name="resolution" value="1000" units="1/deg"/>
+        </inkml:channelProperties>
+      </inkml:inkSource>
+      <inkml:timestamp xml:id="ts0" timeString="2026-02-12T19:34:00.394"/>
+    </inkml:context>
+    <inkml:brush xml:id="br0">
+      <inkml:brushProperty name="width" value="0.025" units="cm"/>
+      <inkml:brushProperty name="height" value="0.025" units="cm"/>
+    </inkml:brush>
+  </inkml:definitions>
+  <inkml:trace contextRef="#ctx0" brushRef="#br0">12 598 8 0 0,'-1'1'115'0'0,"0"0"-1"0"0,0 0 1 0 0,0 0-1 0 0,0 0 1 0 0,0 0 0 0 0,0 0-1 0 0,1 0 1 0 0,-1 0-1 0 0,0 0 1 0 0,1 1 0 0 0,-1-1-1 0 0,1 0 1 0 0,-1 0-1 0 0,1 1 1 0 0,0-1 0 0 0,-1 0-1 0 0,1 1 1 0 0,0-1-1 0 0,0 0 1 0 0,0 1 0 0 0,0-1-1 0 0,0 0 1 0 0,1 1-1 0 0,-1-1 1 0 0,0 0 0 0 0,0 1-1 0 0,1-1 1 0 0,-1 0-1 0 0,1 0 1 0 0,-1 1 0 0 0,1-1-1 0 0,0 0 1 0 0,1 2 0 0 0,-1-1 114 0 0,0 0 0 0 0,0-1 0 0 0,0 1 0 0 0,1 0 0 0 0,-1-1 0 0 0,1 1 1 0 0,-1-1-1 0 0,1 0 0 0 0,-1 1 0 0 0,1-1 0 0 0,0 0 0 0 0,-1 0 1 0 0,1 0-1 0 0,0 0 0 0 0,0 0 0 0 0,0-1 0 0 0,0 1 0 0 0,0 0 1 0 0,0-1-1 0 0,0 0 0 0 0,0 1 0 0 0,3-1 0 0 0,1-1 25 0 0,0-1 1 0 0,0 0-1 0 0,0 0 0 0 0,-1 0 0 0 0,1-1 0 0 0,-1 1 0 0 0,0-1 0 0 0,1-1 0 0 0,-1 1 1 0 0,0-1-1 0 0,-1 0 0 0 0,1 0 0 0 0,-1 0 0 0 0,0-1 0 0 0,0 1 0 0 0,0-1 1 0 0,4-7-1 0 0,7-11 322 0 0,-1-1 1 0 0,15-35 0 0 0,-27 53-528 0 0,11-21 77 0 0,-2-1 0 0 0,-1-1 0 0 0,-2 0-1 0 0,0 0 1 0 0,-2-1 0 0 0,2-30 0 0 0,-6 36-56 0 0,-2 0 0 0 0,0 0 0 0 0,-2 0 0 0 0,0 1 0 0 0,-2-1 0 0 0,-1 1 0 0 0,0 0 0 0 0,-10-25 0 0 0,13 42-85 0 0,-3-6 432 0 0,7 19-14 0 0,16 46-96 0 0,48 95 0 0 0,41 42-175 0 0,-102-182-53 0 0,-4-5-64 0 0,1 1 1 0 0,0-1 0 0 0,0 1-1 0 0,0-1 1 0 0,0 0-1 0 0,0 0 1 0 0,1 0 0 0 0,0 0-1 0 0,-1 0 1 0 0,6 3-1 0 0,-8-6-11 0 0,1 0-1 0 0,-1-1 1 0 0,0 1-1 0 0,1 0 0 0 0,-1-1 1 0 0,0 1-1 0 0,0 0 1 0 0,1-1-1 0 0,-1 1 0 0 0,0 0 1 0 0,0-1-1 0 0,1 1 1 0 0,-1 0-1 0 0,0-1 1 0 0,0 1-1 0 0,0-1 0 0 0,0 1 1 0 0,0 0-1 0 0,0-1 1 0 0,1 1-1 0 0,-1-1 0 0 0,0 1 1 0 0,0 0-1 0 0,0-1 1 0 0,0 1-1 0 0,0-1 0 0 0,-1 1 1 0 0,1-1-1 0 0,0 1 1 0 0,0 0-1 0 0,0-1 0 0 0,0 1 1 0 0,-1-1-1 0 0,-1-17 65 0 0,-27-76 40 0 0,19 66-71 0 0,1 0 0 0 0,-6-32 0 0 0,15 60-35 0 0,0 0-1 0 0,0 0 1 0 0,0-1-1 0 0,0 1 1 0 0,0 0-1 0 0,-1-1 1 0 0,1 1-1 0 0,0 0 1 0 0,0 0-1 0 0,0-1 1 0 0,0 1-1 0 0,0 0 1 0 0,0-1-1 0 0,0 1 1 0 0,0 0-1 0 0,0 0 1 0 0,0-1 0 0 0,0 1-1 0 0,0 0 1 0 0,0-1-1 0 0,0 1 1 0 0,0 0-1 0 0,0 0 1 0 0,1-1-1 0 0,-1 1 1 0 0,0 0-1 0 0,0-1 1 0 0,0 1-1 0 0,0 0 1 0 0,0 0-1 0 0,1 0 1 0 0,-1-1-1 0 0,0 1 1 0 0,0 0-1 0 0,1 0 1 0 0,-1 0-1 0 0,0-1 1 0 0,0 1 0 0 0,1 0-1 0 0,-1 0 1 0 0,12 9-13 0 0,16 27-82 0 0,-25-32 82 0 0,1 1 34 0 0,3 6-1 0 0,1-1-1 0 0,0-1 1 0 0,14 13-1 0 0,-21-20-17 0 0,1-1 0 0 0,0 1 1 0 0,0-1-1 0 0,0 1 0 0 0,0-1 0 0 0,0 0 0 0 0,0 0 0 0 0,1 1 0 0 0,-1-1 0 0 0,0-1 0 0 0,0 1 0 0 0,1 0 0 0 0,-1-1 0 0 0,1 1 0 0 0,-1-1 0 0 0,0 0 0 0 0,1 1 0 0 0,-1-1 0 0 0,1 0 1 0 0,-1-1-1 0 0,1 1 0 0 0,-1 0 0 0 0,0-1 0 0 0,5-1 0 0 0,-4 1 5 0 0,-1-1 1 0 0,0 0-1 0 0,1 1 0 0 0,-1-1 1 0 0,0 0-1 0 0,0 0 1 0 0,0 0-1 0 0,0-1 0 0 0,0 1 1 0 0,0-1-1 0 0,-1 1 0 0 0,1-1 1 0 0,-1 1-1 0 0,0-1 1 0 0,1 0-1 0 0,-1 1 0 0 0,-1-1 1 0 0,1 0-1 0 0,0 0 1 0 0,-1 0-1 0 0,1 0 0 0 0,-1 0 1 0 0,0 0-1 0 0,0 0 1 0 0,0 0-1 0 0,0 1 0 0 0,-1-5 1 0 0,-1-3 25 0 0,1-1 1 0 0,-2 1 0 0 0,1 1 0 0 0,-1-1 0 0 0,-1 0-1 0 0,-6-14 1 0 0,4 14-23 0 0,1 1 0 0 0,-1-1 0 0 0,-1 2 1 0 0,0-1-1 0 0,0 1 0 0 0,-1 0 0 0 0,0 0 0 0 0,0 1 0 0 0,-12-8 0 0 0,20 15-14 0 0,0-1 0 0 0,0 1 0 0 0,0 0 1 0 0,0 0-1 0 0,0 0 0 0 0,0 0 0 0 0,0 0 0 0 0,0 0 0 0 0,0 0 0 0 0,-1 0 1 0 0,1 0-1 0 0,0 0 0 0 0,0 0 0 0 0,0 0 0 0 0,0 0 0 0 0,0 0 0 0 0,0 0 0 0 0,0 0 1 0 0,-1 0-1 0 0,1 0 0 0 0,0 0 0 0 0,0 0 0 0 0,0 0 0 0 0,0 0 0 0 0,0 0 1 0 0,0 0-1 0 0,-1 0 0 0 0,1 0 0 0 0,0 0 0 0 0,0 0 0 0 0,0 0 0 0 0,0 0 1 0 0,0 0-1 0 0,0 0 0 0 0,0 0 0 0 0,0 0 0 0 0,0 0 0 0 0,-1 1 0 0 0,1-1 1 0 0,0 0-1 0 0,0 0 0 0 0,0 0 0 0 0,0 0 0 0 0,0 0 0 0 0,0 0 0 0 0,0 0 1 0 0,0 0-1 0 0,0 1 0 0 0,0-1 0 0 0,0 0 0 0 0,0 0 0 0 0,0 0 0 0 0,0 0 1 0 0,0 0-1 0 0,0 0 0 0 0,0 0 0 0 0,0 1 0 0 0,1 11 47 0 0,7 12 23 0 0,-1-5-68 0 0,2-1-1 0 0,0 0 0 0 0,1-1 0 0 0,13 17 0 0 0,-17-25 0 0 0,1-1 0 0 0,0 0 0 0 0,0 0 1 0 0,1 0-1 0 0,0-1 0 0 0,0-1 0 0 0,1 1 0 0 0,0-1 0 0 0,12 6 0 0 0,-19-11-41 0 0,0 0 0 0 0,0 0 0 0 0,0 0 0 0 0,0 0 0 0 0,0-1 1 0 0,0 1-1 0 0,1-1 0 0 0,-1 1 0 0 0,0-1 0 0 0,0 0 0 0 0,0 0 0 0 0,1 0 1 0 0,-1 0-1 0 0,0 0 0 0 0,0-1 0 0 0,0 1 0 0 0,1-1 0 0 0,-1 1 1 0 0,0-1-1 0 0,0 0 0 0 0,0 0 0 0 0,0 0 0 0 0,0 0 0 0 0,0 0 0 0 0,0 0 1 0 0,-1 0-1 0 0,1-1 0 0 0,0 1 0 0 0,0-1 0 0 0,-1 1 0 0 0,1-1 0 0 0,-1 0 1 0 0,2-3-1 0 0,2-3-1049 0 0,-1 0 0 0 0,0 0 0 0 0,0-1 0 0 0,-1 0 0 0 0,0 0 1 0 0,3-16-1 0 0,-3 9-1108 0 0</inkml:trace>
+</inkml:ink>
+</file>
+
+<file path=ppt/ink/ink38.xml><?xml version="1.0" encoding="utf-8"?>
+<inkml:ink xmlns:inkml="http://www.w3.org/2003/InkML">
+  <inkml:definitions>
+    <inkml:context xml:id="ctx0">
+      <inkml:inkSource xml:id="inkSrc0">
+        <inkml:traceFormat>
+          <inkml:channel name="X" type="integer" min="-2.14748E9" max="2.14748E9" units="cm"/>
+          <inkml:channel name="Y" type="integer" min="-2.14748E9" max="2.14748E9" units="cm"/>
+          <inkml:channel name="F" type="integer" max="32767" units="dev"/>
+          <inkml:channel name="OA" type="integer" max="360" units="deg"/>
+          <inkml:channel name="OE" type="integer" max="90" units="deg"/>
+        </inkml:traceFormat>
+        <inkml:channelProperties>
+          <inkml:channelProperty channel="X" name="resolution" value="1000" units="1/cm"/>
+          <inkml:channelProperty channel="Y" name="resolution" value="1000" units="1/cm"/>
+          <inkml:channelProperty channel="F" name="resolution" value="0" units="1/dev"/>
+          <inkml:channelProperty channel="OA" name="resolution" value="1000" units="1/deg"/>
+          <inkml:channelProperty channel="OE" name="resolution" value="1000" units="1/deg"/>
+        </inkml:channelProperties>
+      </inkml:inkSource>
+      <inkml:timestamp xml:id="ts0" timeString="2026-02-12T19:34:00.879"/>
+    </inkml:context>
+    <inkml:brush xml:id="br0">
+      <inkml:brushProperty name="width" value="0.025" units="cm"/>
+      <inkml:brushProperty name="height" value="0.025" units="cm"/>
+    </inkml:brush>
+  </inkml:definitions>
+  <inkml:trace contextRef="#ctx0" brushRef="#br0">109 290 1336 0 0,'-2'21'12682'0'0,"0"-33"-11399"0"0,-5-42-76 0 0,-10-68-33 0 0,14 106-1055 0 0,-1 1 1 0 0,-1-1 0 0 0,0 1-1 0 0,-1 1 1 0 0,-12-23 0 0 0,17 36-120 0 0,1 1 0 0 0,0-1 0 0 0,0 1 0 0 0,0-1 0 0 0,-1 1 0 0 0,1-1 0 0 0,0 1 0 0 0,-1-1 0 0 0,1 1 0 0 0,0 0 0 0 0,-1-1 0 0 0,1 1 0 0 0,-1-1 0 0 0,1 1 0 0 0,-1 0 0 0 0,1-1 0 0 0,-1 1 0 0 0,1 0 0 0 0,-1 0 0 0 0,1-1 0 0 0,-1 1 1 0 0,1 0-1 0 0,-1 0 0 0 0,1 0 0 0 0,-1 0 0 0 0,1-1 0 0 0,-1 1 0 0 0,0 0 0 0 0,1 0 0 0 0,-1 0 0 0 0,1 0 0 0 0,-2 1 0 0 0,1-1-1 0 0,0 1 0 0 0,0 0 0 0 0,0 0 1 0 0,0 0-1 0 0,0-1 0 0 0,0 1 0 0 0,1 0 0 0 0,-1 0 1 0 0,0 0-1 0 0,0 1 0 0 0,1-1 0 0 0,-1 0 0 0 0,0 2 1 0 0,-2 3-4 0 0,1-1 1 0 0,0 1-1 0 0,1 0 1 0 0,-1 0 0 0 0,0 10-1 0 0,3-2 30 0 0,0 0 0 0 0,1-1 0 0 0,1 1 0 0 0,0-1 0 0 0,1 0 0 0 0,0 0-1 0 0,9 18 1 0 0,-4-13 19 0 0,0 0-1 0 0,1-2 0 0 0,1 1 0 0 0,20 24 0 0 0,-26-36-12 0 0,-1 0 0 0 0,1-1 0 0 0,0 0 0 0 0,0 0-1 0 0,0 0 1 0 0,1 0 0 0 0,-1-1 0 0 0,1 0 0 0 0,0 0 0 0 0,11 4-1 0 0,-15-7-26 0 0,0 1 0 0 0,1-1 0 0 0,-1 0-1 0 0,0 1 1 0 0,0-1 0 0 0,0 0-1 0 0,1 0 1 0 0,-1 0 0 0 0,0-1 0 0 0,0 1-1 0 0,0-1 1 0 0,0 1 0 0 0,0-1-1 0 0,1 1 1 0 0,-1-1 0 0 0,0 0 0 0 0,-1 0-1 0 0,1 0 1 0 0,0 0 0 0 0,0-1 0 0 0,0 1-1 0 0,0 0 1 0 0,-1-1 0 0 0,1 1-1 0 0,-1-1 1 0 0,1 0 0 0 0,-1 1 0 0 0,0-1-1 0 0,0 0 1 0 0,1 0 0 0 0,-1 0 0 0 0,0 0-1 0 0,-1 0 1 0 0,1 0 0 0 0,1-3-1 0 0,1-5-184 0 0,-1 1 0 0 0,0-1 0 0 0,0 0-1 0 0,-1 0 1 0 0,0 0 0 0 0,-1 0-1 0 0,-1-17 1 0 0,-14-73-7274 0 0,11 76 3597 0 0,0 4 1014 0 0</inkml:trace>
+</inkml:ink>
+</file>
+
+<file path=ppt/ink/ink39.xml><?xml version="1.0" encoding="utf-8"?>
+<inkml:ink xmlns:inkml="http://www.w3.org/2003/InkML">
+  <inkml:definitions>
+    <inkml:context xml:id="ctx0">
+      <inkml:inkSource xml:id="inkSrc0">
+        <inkml:traceFormat>
+          <inkml:channel name="X" type="integer" min="-2.14748E9" max="2.14748E9" units="cm"/>
+          <inkml:channel name="Y" type="integer" min="-2.14748E9" max="2.14748E9" units="cm"/>
+          <inkml:channel name="F" type="integer" max="32767" units="dev"/>
+          <inkml:channel name="OA" type="integer" max="360" units="deg"/>
+          <inkml:channel name="OE" type="integer" max="90" units="deg"/>
+        </inkml:traceFormat>
+        <inkml:channelProperties>
+          <inkml:channelProperty channel="X" name="resolution" value="1000" units="1/cm"/>
+          <inkml:channelProperty channel="Y" name="resolution" value="1000" units="1/cm"/>
+          <inkml:channelProperty channel="F" name="resolution" value="0" units="1/dev"/>
+          <inkml:channelProperty channel="OA" name="resolution" value="1000" units="1/deg"/>
+          <inkml:channelProperty channel="OE" name="resolution" value="1000" units="1/deg"/>
+        </inkml:channelProperties>
+      </inkml:inkSource>
+      <inkml:timestamp xml:id="ts0" timeString="2026-02-12T19:34:01.125"/>
+    </inkml:context>
+    <inkml:brush xml:id="br0">
+      <inkml:brushProperty name="width" value="0.025" units="cm"/>
+      <inkml:brushProperty name="height" value="0.025" units="cm"/>
+    </inkml:brush>
+  </inkml:definitions>
+  <inkml:trace contextRef="#ctx0" brushRef="#br0">0 0 8 0 0,'6'13'1610'0'0,"-5"-12"-733"0"0,0 0-1 0 0,0 0 1 0 0,-1 0-1 0 0,1 0 1 0 0,0-1-1 0 0,0 1 1 0 0,0 0-1 0 0,0-1 1 0 0,0 1-1 0 0,0 0 1 0 0,0-1-1 0 0,0 1 1 0 0,0-1-1 0 0,1 1 1 0 0,1-1-1 0 0,12 6 783 0 0,-5 1-1507 0 0,0 1-1 0 0,0-1 1 0 0,-1 2-1 0 0,0-1 0 0 0,-1 1 1 0 0,14 17-1 0 0,-6-6-84 0 0,6 7 11 0 0,16 19 105 0 0,-34-42-169 0 0,-1-1 0 0 0,1 1-1 0 0,0-1 1 0 0,0 0-1 0 0,0-1 1 0 0,1 1 0 0 0,-1-1-1 0 0,0 0 1 0 0,7 3-1 0 0,-11-5-22 0 0,0 0 0 0 0,1 0 0 0 0,-1 0 0 0 0,1 0 0 0 0,-1 0 0 0 0,0 0 0 0 0,1 0 0 0 0,-1 0 0 0 0,1 0 0 0 0,-1 0 0 0 0,0 0 0 0 0,1 0 0 0 0,-1 0 0 0 0,0 0 0 0 0,1 0 0 0 0,-1 0 0 0 0,1-1 0 0 0,-1 1 0 0 0,0 0 0 0 0,1 0 0 0 0,-1 0 0 0 0,0-1 0 0 0,1 1 0 0 0,-1 0 0 0 0,0 0 0 0 0,1-1 0 0 0,-1 1 0 0 0,0 0 0 0 0,0 0 0 0 0,1-1 0 0 0,3-15-683 0 0,-4-19-1384 0 0,-1 31 1729 0 0,-6-64-9141 0 0,5 54 6810 0 0</inkml:trace>
+</inkml:ink>
+</file>
+
 <file path=ppt/ink/ink4.xml><?xml version="1.0" encoding="utf-8"?>
 <inkml:ink xmlns:inkml="http://www.w3.org/2003/InkML">
   <inkml:definitions>
@@ -497,6 +1179,316 @@
     </inkml:brush>
   </inkml:definitions>
   <inkml:trace contextRef="#ctx0" brushRef="#br0">142 13 8 0 0,'-17'4'3107'0'0,"10"-1"-2493"0"0,0 1-1 0 0,0-1 1 0 0,0 2-1 0 0,1-1 1 0 0,-1 1-1 0 0,1 0 1 0 0,0 0-1 0 0,-9 11 1 0 0,7-6 215 0 0,0 0 1 0 0,0 1 0 0 0,1-1 0 0 0,-11 21-1 0 0,17-29-740 0 0,0 0-1 0 0,0 1 0 0 0,0-1 0 0 0,0 0 1 0 0,1 1-1 0 0,-1-1 0 0 0,0 1 0 0 0,1-1 0 0 0,0 1 1 0 0,0-1-1 0 0,-1 1 0 0 0,2-1 0 0 0,-1 1 1 0 0,0-1-1 0 0,0 1 0 0 0,1-1 0 0 0,-1 1 0 0 0,1-1 1 0 0,0 0-1 0 0,1 4 0 0 0,-1-5-58 0 0,1 1 0 0 0,-1-1 1 0 0,0 1-1 0 0,1-1 0 0 0,0 0 0 0 0,-1 0 0 0 0,1 1 0 0 0,0-1 0 0 0,-1 0 1 0 0,1-1-1 0 0,0 1 0 0 0,0 0 0 0 0,0 0 0 0 0,0-1 0 0 0,0 1 0 0 0,0-1 1 0 0,0 0-1 0 0,0 1 0 0 0,0-1 0 0 0,0 0 0 0 0,0 0 0 0 0,0 0 1 0 0,0-1-1 0 0,0 1 0 0 0,3-1 0 0 0,6-1-7 0 0,0-1 1 0 0,0-1-1 0 0,0 1 0 0 0,0-2 1 0 0,0 1-1 0 0,-1-2 0 0 0,0 1 1 0 0,18-14-1 0 0,4-6-56 0 0,32-33 0 0 0,-57 52 26 0 0,60-63 62 0 0,-72 74 15 0 0,0 0 0 0 0,1 1-1 0 0,0-1 1 0 0,0 1 0 0 0,1 0 0 0 0,-1 0-1 0 0,1 0 1 0 0,1 0 0 0 0,-1 0 0 0 0,1 1-1 0 0,-3 11 1 0 0,5-15-73 0 0,-1 1 1 0 0,1-1-1 0 0,0 0 0 0 0,0 1 1 0 0,0-1-1 0 0,0 0 0 0 0,1 1 0 0 0,-1-1 1 0 0,1 0-1 0 0,0 0 0 0 0,0 0 1 0 0,0 0-1 0 0,1 0 0 0 0,-1 0 1 0 0,1 0-1 0 0,-1 0 0 0 0,1 0 0 0 0,0 0 1 0 0,0-1-1 0 0,0 1 0 0 0,0-1 1 0 0,1 0-1 0 0,-1 1 0 0 0,1-1 1 0 0,-1 0-1 0 0,1 0 0 0 0,0-1 1 0 0,3 3-1 0 0,-1-2-520 0 0,1 1 0 0 0,-1-1-1 0 0,0-1 1 0 0,0 1 0 0 0,1-1 0 0 0,-1 0 0 0 0,1 0 0 0 0,-1 0 0 0 0,1-1 0 0 0,-1 1 0 0 0,8-2-1 0 0,0-2-1601 0 0</inkml:trace>
+</inkml:ink>
+</file>
+
+<file path=ppt/ink/ink40.xml><?xml version="1.0" encoding="utf-8"?>
+<inkml:ink xmlns:inkml="http://www.w3.org/2003/InkML">
+  <inkml:definitions>
+    <inkml:context xml:id="ctx0">
+      <inkml:inkSource xml:id="inkSrc0">
+        <inkml:traceFormat>
+          <inkml:channel name="X" type="integer" min="-2.14748E9" max="2.14748E9" units="cm"/>
+          <inkml:channel name="Y" type="integer" min="-2.14748E9" max="2.14748E9" units="cm"/>
+          <inkml:channel name="F" type="integer" max="32767" units="dev"/>
+          <inkml:channel name="OA" type="integer" max="360" units="deg"/>
+          <inkml:channel name="OE" type="integer" max="90" units="deg"/>
+        </inkml:traceFormat>
+        <inkml:channelProperties>
+          <inkml:channelProperty channel="X" name="resolution" value="1000" units="1/cm"/>
+          <inkml:channelProperty channel="Y" name="resolution" value="1000" units="1/cm"/>
+          <inkml:channelProperty channel="F" name="resolution" value="0" units="1/dev"/>
+          <inkml:channelProperty channel="OA" name="resolution" value="1000" units="1/deg"/>
+          <inkml:channelProperty channel="OE" name="resolution" value="1000" units="1/deg"/>
+        </inkml:channelProperties>
+      </inkml:inkSource>
+      <inkml:timestamp xml:id="ts0" timeString="2026-02-12T19:34:01.321"/>
+    </inkml:context>
+    <inkml:brush xml:id="br0">
+      <inkml:brushProperty name="width" value="0.025" units="cm"/>
+      <inkml:brushProperty name="height" value="0.025" units="cm"/>
+    </inkml:brush>
+  </inkml:definitions>
+  <inkml:trace contextRef="#ctx0" brushRef="#br0">17 3 8 0 0,'0'0'73'0'0,"0"0"1"0"0,0 0-1 0 0,0 0 0 0 0,0-1 1 0 0,0 1-1 0 0,0 0 1 0 0,-1 0-1 0 0,1 0 0 0 0,0 0 1 0 0,0 0-1 0 0,0-1 0 0 0,0 1 1 0 0,0 0-1 0 0,0 0 1 0 0,-1 0-1 0 0,1 0 0 0 0,0 0 1 0 0,0 0-1 0 0,0 0 0 0 0,0 0 1 0 0,0 0-1 0 0,-1 0 0 0 0,1 0 1 0 0,0-1-1 0 0,0 1 1 0 0,0 0-1 0 0,-1 0 0 0 0,1 0 1 0 0,0 0-1 0 0,0 0 0 0 0,0 0 1 0 0,0 0-1 0 0,-1 0 0 0 0,1 1 1 0 0,0-1-1 0 0,0 0 1 0 0,0 0-1 0 0,0 0 0 0 0,-1 0 1 0 0,1 0-1 0 0,0 0 0 0 0,0 0 1 0 0,0 0-1 0 0,0 0 1 0 0,0 0-1 0 0,-1 1 0 0 0,1-1 1 0 0,0 0-1 0 0,0 0 0 0 0,0 0 1 0 0,0 0-1 0 0,-5 15 3791 0 0,2 25 1235 0 0,3-35-4874 0 0,-1 137 5013 0 0,15 71-4092 0 0,-13-192-994 0 0,-1-18-220 0 0,5 29 132 0 0,-5-31-131 0 0,0 0-1 0 0,0 0 1 0 0,0 0-1 0 0,1 1 0 0 0,-1-1 1 0 0,0 0-1 0 0,1 0 1 0 0,-1 0-1 0 0,1 0 0 0 0,-1 0 1 0 0,1 0-1 0 0,0 0 1 0 0,-1 0-1 0 0,1 0 0 0 0,0-1 1 0 0,0 1-1 0 0,-1 0 1 0 0,1 0-1 0 0,0-1 1 0 0,0 1-1 0 0,0 0 0 0 0,0-1 1 0 0,1 1-1 0 0,-1-1-127 0 0,-1 0 1 0 0,1 0-1 0 0,-1 0 0 0 0,1-1 1 0 0,0 1-1 0 0,-1 0 0 0 0,1-1 1 0 0,-1 1-1 0 0,1 0 0 0 0,-1-1 0 0 0,0 1 1 0 0,1-1-1 0 0,-1 1 0 0 0,1-1 1 0 0,-1 1-1 0 0,0-1 0 0 0,1 1 0 0 0,-1-1 1 0 0,0 1-1 0 0,0-1 0 0 0,1 1 1 0 0,-1-1-1 0 0,0 0 0 0 0,0 1 0 0 0,0-1 1 0 0,0 1-1 0 0,0-1 0 0 0,1 0 1 0 0,-1-1-531 0 0,3-7-1655 0 0</inkml:trace>
+</inkml:ink>
+</file>
+
+<file path=ppt/ink/ink41.xml><?xml version="1.0" encoding="utf-8"?>
+<inkml:ink xmlns:inkml="http://www.w3.org/2003/InkML">
+  <inkml:definitions>
+    <inkml:context xml:id="ctx0">
+      <inkml:inkSource xml:id="inkSrc0">
+        <inkml:traceFormat>
+          <inkml:channel name="X" type="integer" min="-2.14748E9" max="2.14748E9" units="cm"/>
+          <inkml:channel name="Y" type="integer" min="-2.14748E9" max="2.14748E9" units="cm"/>
+          <inkml:channel name="F" type="integer" max="32767" units="dev"/>
+          <inkml:channel name="OA" type="integer" max="360" units="deg"/>
+          <inkml:channel name="OE" type="integer" max="90" units="deg"/>
+        </inkml:traceFormat>
+        <inkml:channelProperties>
+          <inkml:channelProperty channel="X" name="resolution" value="1000" units="1/cm"/>
+          <inkml:channelProperty channel="Y" name="resolution" value="1000" units="1/cm"/>
+          <inkml:channelProperty channel="F" name="resolution" value="0" units="1/dev"/>
+          <inkml:channelProperty channel="OA" name="resolution" value="1000" units="1/deg"/>
+          <inkml:channelProperty channel="OE" name="resolution" value="1000" units="1/deg"/>
+        </inkml:channelProperties>
+      </inkml:inkSource>
+      <inkml:timestamp xml:id="ts0" timeString="2026-02-12T19:34:01.706"/>
+    </inkml:context>
+    <inkml:brush xml:id="br0">
+      <inkml:brushProperty name="width" value="0.025" units="cm"/>
+      <inkml:brushProperty name="height" value="0.025" units="cm"/>
+    </inkml:brush>
+  </inkml:definitions>
+  <inkml:trace contextRef="#ctx0" brushRef="#br0">0 215 504 0 0,'0'-1'255'0'0,"0"0"0"0"0,0-1 0 0 0,0 1 0 0 0,0 0 0 0 0,1-1 0 0 0,-1 1 0 0 0,0 0 0 0 0,0 0 0 0 0,1-1 0 0 0,-1 1 0 0 0,1 0-1 0 0,-1 0 1 0 0,1 0 0 0 0,0 0 0 0 0,-1 0 0 0 0,1 0 0 0 0,0 0 0 0 0,1-1 0 0 0,-2 1-59 0 0,1 1 0 0 0,-1 0 0 0 0,1 0 0 0 0,0 0 1 0 0,-1 0-1 0 0,1 0 0 0 0,-1 0 0 0 0,1 0 0 0 0,0 0 0 0 0,-1 0 0 0 0,1 0 0 0 0,-1 1 0 0 0,1-1 0 0 0,-1 0 0 0 0,1 0 0 0 0,-1 1 1 0 0,1-1-1 0 0,0 0 0 0 0,-1 0 0 0 0,1 1 0 0 0,-1-1 0 0 0,0 1 0 0 0,1-1 0 0 0,-1 0 0 0 0,1 1 0 0 0,-1 0 0 0 0,7 6 1383 0 0,0 1-1 0 0,-1 1 0 0 0,7 11 1 0 0,-8-12-1863 0 0,171 255 3886 0 0,-169-250-4708 0 0,-18-22-564 0 0,-20-24-1131 0 0,30 31 2694 0 0,-20-21-480 0 0,2-1 0 0 0,1-1 0 0 0,1-1 0 0 0,1-1 0 0 0,-19-42 0 0 0,26 45 873 0 0,0 1 0 0 0,1-1 0 0 0,2 0 1 0 0,0-1-1 0 0,2 0 0 0 0,0 1 0 0 0,0-33 1 0 0,4 54-145 0 0,0 0 0 0 0,1-1 0 0 0,-1 1 0 0 0,1-1 1 0 0,-1 1-1 0 0,1 0 0 0 0,0-1 0 0 0,0 1 1 0 0,0 0-1 0 0,1 0 0 0 0,-1 0 0 0 0,1 0 1 0 0,0 0-1 0 0,2-4 0 0 0,-3 6-62 0 0,0 1-1 0 0,0-1 1 0 0,0 0-1 0 0,0 0 1 0 0,0 1 0 0 0,0-1-1 0 0,0 1 1 0 0,0-1-1 0 0,0 1 1 0 0,0-1 0 0 0,0 1-1 0 0,0-1 1 0 0,0 1-1 0 0,0 0 1 0 0,0 0 0 0 0,1 0-1 0 0,1-1 1 0 0,-1 2 2 0 0,0-1 0 0 0,0 1 0 0 0,0-1 0 0 0,0 1 0 0 0,0-1 0 0 0,0 1 1 0 0,0 0-1 0 0,-1 0 0 0 0,1 0 0 0 0,0 0 0 0 0,0 0 0 0 0,-1 1 0 0 0,3 1 0 0 0,0 1-1 0 0,1 1 0 0 0,-1 1 0 0 0,0-1 0 0 0,0 0 0 0 0,-1 1 0 0 0,1 0 0 0 0,-1 0 0 0 0,-1 0 0 0 0,1 0 0 0 0,-1 0 0 0 0,0 1 0 0 0,0-1 0 0 0,-1 1 0 0 0,1 10 0 0 0,1 13-147 0 0,-3 58 0 0 0,-1-63-45 0 0,-1 23-1527 0 0,0-13-3678 0 0,2-22 1971 0 0</inkml:trace>
+</inkml:ink>
+</file>
+
+<file path=ppt/ink/ink42.xml><?xml version="1.0" encoding="utf-8"?>
+<inkml:ink xmlns:inkml="http://www.w3.org/2003/InkML">
+  <inkml:definitions>
+    <inkml:context xml:id="ctx0">
+      <inkml:inkSource xml:id="inkSrc0">
+        <inkml:traceFormat>
+          <inkml:channel name="X" type="integer" min="-2.14748E9" max="2.14748E9" units="cm"/>
+          <inkml:channel name="Y" type="integer" min="-2.14748E9" max="2.14748E9" units="cm"/>
+          <inkml:channel name="F" type="integer" max="32767" units="dev"/>
+          <inkml:channel name="OA" type="integer" max="360" units="deg"/>
+          <inkml:channel name="OE" type="integer" max="90" units="deg"/>
+        </inkml:traceFormat>
+        <inkml:channelProperties>
+          <inkml:channelProperty channel="X" name="resolution" value="1000" units="1/cm"/>
+          <inkml:channelProperty channel="Y" name="resolution" value="1000" units="1/cm"/>
+          <inkml:channelProperty channel="F" name="resolution" value="0" units="1/dev"/>
+          <inkml:channelProperty channel="OA" name="resolution" value="1000" units="1/deg"/>
+          <inkml:channelProperty channel="OE" name="resolution" value="1000" units="1/deg"/>
+        </inkml:channelProperties>
+      </inkml:inkSource>
+      <inkml:timestamp xml:id="ts0" timeString="2026-02-12T19:34:02.036"/>
+    </inkml:context>
+    <inkml:brush xml:id="br0">
+      <inkml:brushProperty name="width" value="0.025" units="cm"/>
+      <inkml:brushProperty name="height" value="0.025" units="cm"/>
+    </inkml:brush>
+  </inkml:definitions>
+  <inkml:trace contextRef="#ctx0" brushRef="#br0">7 17 8 0 0,'-6'-17'4843'0'0,"9"19"1124"0"0,16 25 1708 0 0,-13-18-8899 0 0,47 69 2552 0 0,47 95 1 0 0,-98-169-2083 0 0,-2-6-1235 0 0,-2-5-2293 0 0,-1 1 1487 0 0</inkml:trace>
+</inkml:ink>
+</file>
+
+<file path=ppt/ink/ink43.xml><?xml version="1.0" encoding="utf-8"?>
+<inkml:ink xmlns:inkml="http://www.w3.org/2003/InkML">
+  <inkml:definitions>
+    <inkml:context xml:id="ctx0">
+      <inkml:inkSource xml:id="inkSrc0">
+        <inkml:traceFormat>
+          <inkml:channel name="X" type="integer" min="-2.14748E9" max="2.14748E9" units="cm"/>
+          <inkml:channel name="Y" type="integer" min="-2.14748E9" max="2.14748E9" units="cm"/>
+          <inkml:channel name="F" type="integer" max="32767" units="dev"/>
+          <inkml:channel name="OA" type="integer" max="360" units="deg"/>
+          <inkml:channel name="OE" type="integer" max="90" units="deg"/>
+        </inkml:traceFormat>
+        <inkml:channelProperties>
+          <inkml:channelProperty channel="X" name="resolution" value="1000" units="1/cm"/>
+          <inkml:channelProperty channel="Y" name="resolution" value="1000" units="1/cm"/>
+          <inkml:channelProperty channel="F" name="resolution" value="0" units="1/dev"/>
+          <inkml:channelProperty channel="OA" name="resolution" value="1000" units="1/deg"/>
+          <inkml:channelProperty channel="OE" name="resolution" value="1000" units="1/deg"/>
+        </inkml:channelProperties>
+      </inkml:inkSource>
+      <inkml:timestamp xml:id="ts0" timeString="2026-02-12T19:34:02.337"/>
+    </inkml:context>
+    <inkml:brush xml:id="br0">
+      <inkml:brushProperty name="width" value="0.025" units="cm"/>
+      <inkml:brushProperty name="height" value="0.025" units="cm"/>
+    </inkml:brush>
+  </inkml:definitions>
+  <inkml:trace contextRef="#ctx0" brushRef="#br0">6 129 1136 0 0,'0'-1'303'0'0,"0"1"0"0"0,-1 0 0 0 0,1-1 0 0 0,-1 1-1 0 0,1 0 1 0 0,0-1 0 0 0,-1 1 0 0 0,1-1 0 0 0,0 1 0 0 0,-1-1 0 0 0,1 1-1 0 0,0 0 1 0 0,0-1 0 0 0,-1 1 0 0 0,1-1 0 0 0,0 1 0 0 0,0-1-1 0 0,0 1 1 0 0,0-1 0 0 0,0 0 0 0 0,-1 1 0 0 0,1-1 0 0 0,0 0 0 0 0,4-17 2334 0 0,10-14-882 0 0,-8 24-1267 0 0,0 0-1 0 0,1 0 0 0 0,0 0 1 0 0,13-10-1 0 0,-19 16-427 0 0,1 1 0 0 0,0-1 0 0 0,-1 1 0 0 0,1-1 0 0 0,0 1 0 0 0,0 0 0 0 0,0 0 0 0 0,1 0 0 0 0,-1 0 1 0 0,0 0-1 0 0,0 1 0 0 0,0-1 0 0 0,1 1 0 0 0,-1-1 0 0 0,0 1 0 0 0,0 0 0 0 0,1 0 0 0 0,-1 0 0 0 0,0 0 0 0 0,1 0 0 0 0,-1 0 0 0 0,0 1 0 0 0,1-1 0 0 0,-1 1 0 0 0,0-1 1 0 0,4 3-1 0 0,-4-2-30 0 0,0 1 1 0 0,0 0-1 0 0,0 0 1 0 0,0 1-1 0 0,0-1 1 0 0,0 0-1 0 0,-1 0 1 0 0,1 1-1 0 0,-1-1 1 0 0,1 1-1 0 0,-1 0 1 0 0,0-1-1 0 0,1 6 1 0 0,9 39 226 0 0,-10-39-211 0 0,2 8-31 0 0,0-1 0 0 0,-2 1 0 0 0,0-1 0 0 0,-1 1 0 0 0,0 0 0 0 0,-1-1 0 0 0,-1 1 0 0 0,0-1 0 0 0,-1 1 0 0 0,-8 23-1 0 0,10-38-110 0 0,1 0-1 0 0,-1 0 0 0 0,1 0 1 0 0,-1 0-1 0 0,0 0 0 0 0,1 0 0 0 0,-1 0 1 0 0,0 0-1 0 0,0 0 0 0 0,0 0 0 0 0,0 0 1 0 0,0 0-1 0 0,-1 1 0 0 0,1-2-82 0 0,1 0 0 0 0,-1 0 1 0 0,1 0-1 0 0,-1 0 0 0 0,1 0 0 0 0,-1 0 0 0 0,1 0 1 0 0,0 0-1 0 0,-1 0 0 0 0,1 0 0 0 0,-1 0 0 0 0,1 0 0 0 0,-1 0 1 0 0,1 0-1 0 0,-1-1 0 0 0,1 1 0 0 0,0 0 0 0 0,-1 0 1 0 0,1 0-1 0 0,-1-1 0 0 0,1 1 0 0 0,0 0 0 0 0,-1-1 0 0 0,1 1 1 0 0,0 0-1 0 0,-1-1 0 0 0,1 1 0 0 0,0 0 0 0 0,0-1 1 0 0,-1 1-1 0 0,1 0 0 0 0,0-1 0 0 0,0 1 0 0 0,0-1 0 0 0,-1 1 1 0 0,1-1-1 0 0,0 1 0 0 0,0 0 0 0 0,0-1 0 0 0,-2-6-1382 0 0</inkml:trace>
+</inkml:ink>
+</file>
+
+<file path=ppt/ink/ink44.xml><?xml version="1.0" encoding="utf-8"?>
+<inkml:ink xmlns:inkml="http://www.w3.org/2003/InkML">
+  <inkml:definitions>
+    <inkml:context xml:id="ctx0">
+      <inkml:inkSource xml:id="inkSrc0">
+        <inkml:traceFormat>
+          <inkml:channel name="X" type="integer" min="-2.14748E9" max="2.14748E9" units="cm"/>
+          <inkml:channel name="Y" type="integer" min="-2.14748E9" max="2.14748E9" units="cm"/>
+          <inkml:channel name="F" type="integer" max="32767" units="dev"/>
+          <inkml:channel name="OA" type="integer" max="360" units="deg"/>
+          <inkml:channel name="OE" type="integer" max="90" units="deg"/>
+        </inkml:traceFormat>
+        <inkml:channelProperties>
+          <inkml:channelProperty channel="X" name="resolution" value="1000" units="1/cm"/>
+          <inkml:channelProperty channel="Y" name="resolution" value="1000" units="1/cm"/>
+          <inkml:channelProperty channel="F" name="resolution" value="0" units="1/dev"/>
+          <inkml:channelProperty channel="OA" name="resolution" value="1000" units="1/deg"/>
+          <inkml:channelProperty channel="OE" name="resolution" value="1000" units="1/deg"/>
+        </inkml:channelProperties>
+      </inkml:inkSource>
+      <inkml:timestamp xml:id="ts0" timeString="2026-02-12T19:34:02.661"/>
+    </inkml:context>
+    <inkml:brush xml:id="br0">
+      <inkml:brushProperty name="width" value="0.025" units="cm"/>
+      <inkml:brushProperty name="height" value="0.025" units="cm"/>
+    </inkml:brush>
+  </inkml:definitions>
+  <inkml:trace contextRef="#ctx0" brushRef="#br0">0 155 480 0 0,'1'-1'268'0'0,"-1"0"0"0"0,1 0 1 0 0,0 1-1 0 0,0-1 0 0 0,0 0 0 0 0,0 0 0 0 0,-1 0 0 0 0,1 1 1 0 0,0-1-1 0 0,0 0 0 0 0,1 1 0 0 0,-1-1 0 0 0,0 1 0 0 0,0-1 0 0 0,0 1 1 0 0,0 0-1 0 0,0-1 0 0 0,1 1 0 0 0,-1 0 0 0 0,0 0 0 0 0,0 0 1 0 0,2 0-1 0 0,-1 0 155 0 0,1 0 0 0 0,0 1 1 0 0,-1 0-1 0 0,1-1 0 0 0,-1 1 1 0 0,1 0-1 0 0,-1 0 0 0 0,0 1 0 0 0,5 2 1 0 0,0 0 143 0 0,-1 2 0 0 0,1-1 0 0 0,-1 1 0 0 0,0 0 0 0 0,7 10 0 0 0,0 4-140 0 0,-1 1 0 0 0,0 0 0 0 0,-2 1 1 0 0,0 0-1 0 0,-2 0 0 0 0,9 36 0 0 0,-20-68-60 0 0,-29-121 727 0 0,26 103-1256 0 0,1 0 1 0 0,2-1-1 0 0,0-33 1 0 0,3 55-52 0 0,1 1 1 0 0,0-1-1 0 0,1 1 1 0 0,-1-1-1 0 0,1 1 1 0 0,3-7-1 0 0,-4 10-228 0 0,0 0-1 0 0,1-1 1 0 0,0 2-1 0 0,-1-1 0 0 0,1 0 1 0 0,0 0-1 0 0,0 0 1 0 0,1 1-1 0 0,-1-1 1 0 0,0 1-1 0 0,1 0 0 0 0,0 0 1 0 0,4-4-1 0 0,-6 6 230 0 0,0 0 0 0 0,0 0 0 0 0,-1-1 0 0 0,1 1 0 0 0,0 0 0 0 0,0 0 0 0 0,0 0-1 0 0,-1 0 1 0 0,1 0 0 0 0,0 0 0 0 0,0 0 0 0 0,0 0 0 0 0,0 0 0 0 0,-1 0 0 0 0,1 0 0 0 0,0 0 0 0 0,0 1-1 0 0,-1-1 1 0 0,1 0 0 0 0,0 1 0 0 0,0-1 0 0 0,-1 0 0 0 0,1 1 0 0 0,0-1 0 0 0,0 2 0 0 0,3 1-1467 0 0</inkml:trace>
+</inkml:ink>
+</file>
+
+<file path=ppt/ink/ink45.xml><?xml version="1.0" encoding="utf-8"?>
+<inkml:ink xmlns:inkml="http://www.w3.org/2003/InkML">
+  <inkml:definitions>
+    <inkml:context xml:id="ctx0">
+      <inkml:inkSource xml:id="inkSrc0">
+        <inkml:traceFormat>
+          <inkml:channel name="X" type="integer" min="-2.14748E9" max="2.14748E9" units="cm"/>
+          <inkml:channel name="Y" type="integer" min="-2.14748E9" max="2.14748E9" units="cm"/>
+          <inkml:channel name="F" type="integer" max="32767" units="dev"/>
+          <inkml:channel name="OA" type="integer" max="360" units="deg"/>
+          <inkml:channel name="OE" type="integer" max="90" units="deg"/>
+        </inkml:traceFormat>
+        <inkml:channelProperties>
+          <inkml:channelProperty channel="X" name="resolution" value="1000" units="1/cm"/>
+          <inkml:channelProperty channel="Y" name="resolution" value="1000" units="1/cm"/>
+          <inkml:channelProperty channel="F" name="resolution" value="0" units="1/dev"/>
+          <inkml:channelProperty channel="OA" name="resolution" value="1000" units="1/deg"/>
+          <inkml:channelProperty channel="OE" name="resolution" value="1000" units="1/deg"/>
+        </inkml:channelProperties>
+      </inkml:inkSource>
+      <inkml:timestamp xml:id="ts0" timeString="2026-02-12T19:34:02.930"/>
+    </inkml:context>
+    <inkml:brush xml:id="br0">
+      <inkml:brushProperty name="width" value="0.025" units="cm"/>
+      <inkml:brushProperty name="height" value="0.025" units="cm"/>
+    </inkml:brush>
+  </inkml:definitions>
+  <inkml:trace contextRef="#ctx0" brushRef="#br0">1 0 2008 0 0,'0'1'7669'0'0,"0"3"-3483"0"0,3 18-1048 0 0,3 5-1402 0 0,20 53 0 0 0,-23-72-1717 0 0,1 0 0 0 0,0 0-1 0 0,0-1 1 0 0,1 1 0 0 0,-1-1 0 0 0,2 0-1 0 0,-1 0 1 0 0,1-1 0 0 0,0 1-1 0 0,12 8 1 0 0,-18-14-55 0 0,1-1 0 0 0,-1 1 0 0 0,1-1 1 0 0,-1 1-1 0 0,1-1 0 0 0,-1 1 0 0 0,1-1 0 0 0,0 0 0 0 0,-1 1 0 0 0,1-1 0 0 0,0 0 1 0 0,-1 0-1 0 0,1 1 0 0 0,0-1 0 0 0,-1 0 0 0 0,1 0 0 0 0,0 0 0 0 0,0 0 0 0 0,-1 0 1 0 0,1 0-1 0 0,0 0 0 0 0,-1 0 0 0 0,1 0 0 0 0,0 0 0 0 0,0 0 0 0 0,-1-1 0 0 0,1 1 1 0 0,0 0-1 0 0,-1 0 0 0 0,1-1 0 0 0,0 1 0 0 0,-1 0 0 0 0,1-1 0 0 0,-1 1 0 0 0,1-1 1 0 0,-1 1-1 0 0,1-1 0 0 0,-1 1 0 0 0,1-1 0 0 0,-1 1 0 0 0,1-1 0 0 0,-1 0 0 0 0,1 1 1 0 0,-1-1-1 0 0,0 1 0 0 0,1-1 0 0 0,-1 0 0 0 0,0 1 0 0 0,0-1 0 0 0,1-1 0 0 0,0-2-826 0 0,0 0 0 0 0,-1 0-1 0 0,1-1 1 0 0,-1 1 0 0 0,0 0-1 0 0,0 0 1 0 0,-1-7 0 0 0,0 2-1607 0 0</inkml:trace>
+</inkml:ink>
+</file>
+
+<file path=ppt/ink/ink46.xml><?xml version="1.0" encoding="utf-8"?>
+<inkml:ink xmlns:inkml="http://www.w3.org/2003/InkML">
+  <inkml:definitions>
+    <inkml:context xml:id="ctx0">
+      <inkml:inkSource xml:id="inkSrc0">
+        <inkml:traceFormat>
+          <inkml:channel name="X" type="integer" min="-2.14748E9" max="2.14748E9" units="cm"/>
+          <inkml:channel name="Y" type="integer" min="-2.14748E9" max="2.14748E9" units="cm"/>
+          <inkml:channel name="F" type="integer" max="32767" units="dev"/>
+          <inkml:channel name="OA" type="integer" max="360" units="deg"/>
+          <inkml:channel name="OE" type="integer" max="90" units="deg"/>
+        </inkml:traceFormat>
+        <inkml:channelProperties>
+          <inkml:channelProperty channel="X" name="resolution" value="1000" units="1/cm"/>
+          <inkml:channelProperty channel="Y" name="resolution" value="1000" units="1/cm"/>
+          <inkml:channelProperty channel="F" name="resolution" value="0" units="1/dev"/>
+          <inkml:channelProperty channel="OA" name="resolution" value="1000" units="1/deg"/>
+          <inkml:channelProperty channel="OE" name="resolution" value="1000" units="1/deg"/>
+        </inkml:channelProperties>
+      </inkml:inkSource>
+      <inkml:timestamp xml:id="ts0" timeString="2026-02-12T19:34:03.059"/>
+    </inkml:context>
+    <inkml:brush xml:id="br0">
+      <inkml:brushProperty name="width" value="0.025" units="cm"/>
+      <inkml:brushProperty name="height" value="0.025" units="cm"/>
+    </inkml:brush>
+  </inkml:definitions>
+  <inkml:trace contextRef="#ctx0" brushRef="#br0">40 14 504 0 0,'-12'-7'512'0'0,"4"3"1865"0"0,1 3-1641 0 0,1-1 544 0 0,5 2 240 0 0,-2 0-303 0 0,1 1-257 0 0,2 2-648 0 0,0 0 96 0 0,1 0-312 0 0,1 0 48 0 0,0 0-128 0 0,2-1-88 0 0,0 0-640 0 0,3 1-688 0 0,1 0 327 0 0,3 0-1095 0 0</inkml:trace>
+</inkml:ink>
+</file>
+
+<file path=ppt/ink/ink47.xml><?xml version="1.0" encoding="utf-8"?>
+<inkml:ink xmlns:inkml="http://www.w3.org/2003/InkML">
+  <inkml:definitions>
+    <inkml:context xml:id="ctx0">
+      <inkml:inkSource xml:id="inkSrc0">
+        <inkml:traceFormat>
+          <inkml:channel name="X" type="integer" min="-2.14748E9" max="2.14748E9" units="cm"/>
+          <inkml:channel name="Y" type="integer" min="-2.14748E9" max="2.14748E9" units="cm"/>
+          <inkml:channel name="F" type="integer" max="32767" units="dev"/>
+          <inkml:channel name="OA" type="integer" max="360" units="deg"/>
+          <inkml:channel name="OE" type="integer" max="90" units="deg"/>
+        </inkml:traceFormat>
+        <inkml:channelProperties>
+          <inkml:channelProperty channel="X" name="resolution" value="1000" units="1/cm"/>
+          <inkml:channelProperty channel="Y" name="resolution" value="1000" units="1/cm"/>
+          <inkml:channelProperty channel="F" name="resolution" value="0" units="1/dev"/>
+          <inkml:channelProperty channel="OA" name="resolution" value="1000" units="1/deg"/>
+          <inkml:channelProperty channel="OE" name="resolution" value="1000" units="1/deg"/>
+        </inkml:channelProperties>
+      </inkml:inkSource>
+      <inkml:timestamp xml:id="ts0" timeString="2026-02-12T19:34:03.340"/>
+    </inkml:context>
+    <inkml:brush xml:id="br0">
+      <inkml:brushProperty name="width" value="0.025" units="cm"/>
+      <inkml:brushProperty name="height" value="0.025" units="cm"/>
+    </inkml:brush>
+  </inkml:definitions>
+  <inkml:trace contextRef="#ctx0" brushRef="#br0">0 0 1224 0 0,'0'18'4799'0'0,"1"41"4503"0"0,5 0-6428 0 0,-4-51-2778 0 0,-1 0 0 0 0,1-1 0 0 0,1 0 1 0 0,-1 1-1 0 0,1-1 0 0 0,1 0 0 0 0,-1 0 0 0 0,1 0 1 0 0,0-1-1 0 0,1 0 0 0 0,-1 1 0 0 0,1-2 0 0 0,7 8 1 0 0,-9-11-25 0 0,0 0 1 0 0,-1-1-1 0 0,1 1 1 0 0,0-1-1 0 0,0 1 1 0 0,0-1 0 0 0,0 0-1 0 0,1 0 1 0 0,-1 0-1 0 0,0-1 1 0 0,0 1 0 0 0,1-1-1 0 0,-1 0 1 0 0,0 0-1 0 0,0 0 1 0 0,1 0 0 0 0,-1 0-1 0 0,0-1 1 0 0,1 0-1 0 0,3-1 1 0 0,-5 2-29 0 0,0-1 0 0 0,0 1-1 0 0,0-1 1 0 0,0 0 0 0 0,-1 0 0 0 0,1 0-1 0 0,0 0 1 0 0,-1 0 0 0 0,1 0 0 0 0,0 0 0 0 0,-1 0-1 0 0,1-1 1 0 0,-1 1 0 0 0,0-1 0 0 0,0 1-1 0 0,1-1 1 0 0,-1 1 0 0 0,0-1 0 0 0,0 0 0 0 0,0 1-1 0 0,-1-1 1 0 0,1 0 0 0 0,0 0 0 0 0,-1 0-1 0 0,1 0 1 0 0,-1 0 0 0 0,1 0 0 0 0,-1 0 0 0 0,0 1-1 0 0,0-1 1 0 0,0 0 0 0 0,0 0 0 0 0,0 0-1 0 0,-1-4 1 0 0,-1 2-36 0 0,0 0 0 0 0,0 1 0 0 0,0-1-1 0 0,0 0 1 0 0,-1 1 0 0 0,0 0 0 0 0,1 0 0 0 0,-1 0-1 0 0,0 0 1 0 0,0 0 0 0 0,-1 0 0 0 0,1 1 0 0 0,-5-3 0 0 0,3 1-434 0 0,-1 0 0 0 0,1-1 0 0 0,0 0 1 0 0,-4-5-1 0 0,-6-15-4830 0 0,9 6-1194 0 0,5 9 2534 0 0</inkml:trace>
+</inkml:ink>
+</file>
+
+<file path=ppt/ink/ink48.xml><?xml version="1.0" encoding="utf-8"?>
+<inkml:ink xmlns:inkml="http://www.w3.org/2003/InkML">
+  <inkml:definitions>
+    <inkml:context xml:id="ctx0">
+      <inkml:inkSource xml:id="inkSrc0">
+        <inkml:traceFormat>
+          <inkml:channel name="X" type="integer" min="-2.14748E9" max="2.14748E9" units="cm"/>
+          <inkml:channel name="Y" type="integer" min="-2.14748E9" max="2.14748E9" units="cm"/>
+          <inkml:channel name="F" type="integer" max="32767" units="dev"/>
+          <inkml:channel name="OA" type="integer" max="360" units="deg"/>
+          <inkml:channel name="OE" type="integer" max="90" units="deg"/>
+        </inkml:traceFormat>
+        <inkml:channelProperties>
+          <inkml:channelProperty channel="X" name="resolution" value="1000" units="1/cm"/>
+          <inkml:channelProperty channel="Y" name="resolution" value="1000" units="1/cm"/>
+          <inkml:channelProperty channel="F" name="resolution" value="0" units="1/dev"/>
+          <inkml:channelProperty channel="OA" name="resolution" value="1000" units="1/deg"/>
+          <inkml:channelProperty channel="OE" name="resolution" value="1000" units="1/deg"/>
+        </inkml:channelProperties>
+      </inkml:inkSource>
+      <inkml:timestamp xml:id="ts0" timeString="2026-02-12T19:34:03.589"/>
+    </inkml:context>
+    <inkml:brush xml:id="br0">
+      <inkml:brushProperty name="width" value="0.025" units="cm"/>
+      <inkml:brushProperty name="height" value="0.025" units="cm"/>
+    </inkml:brush>
+  </inkml:definitions>
+  <inkml:trace contextRef="#ctx0" brushRef="#br0">0 149 8 0 0,'15'13'2283'0'0,"-2"0"0"0"0,0 1 0 0 0,0 1 0 0 0,-1 0 0 0 0,12 21 0 0 0,-18-27-1591 0 0,-1 1 1 0 0,0 0-1 0 0,0 1 1 0 0,-1-1-1 0 0,-1 1 1 0 0,0 0-1 0 0,0 0 1 0 0,-1 0-1 0 0,-1 0 1 0 0,1 14-1 0 0,-2-24-659 0 0,1 0 0 0 0,-1 0-1 0 0,0 0 1 0 0,0-1 0 0 0,0 1-1 0 0,0 0 1 0 0,0 0 0 0 0,0 0-1 0 0,0-1 1 0 0,-1 1 0 0 0,1 0-1 0 0,0 0 1 0 0,0 0 0 0 0,-1-1-1 0 0,1 1 1 0 0,0 0 0 0 0,-1 0-1 0 0,1-1 1 0 0,-1 1 0 0 0,1 0-1 0 0,-1-1 1 0 0,1 1 0 0 0,-1 0-1 0 0,0-1 1 0 0,1 1 0 0 0,-1-1-1 0 0,1 1 1 0 0,-2 0 0 0 0,1-1-15 0 0,0-1 0 0 0,0 1 0 0 0,0 0 0 0 0,1 0 1 0 0,-1-1-1 0 0,0 1 0 0 0,0 0 0 0 0,0-1 0 0 0,1 1 0 0 0,-1-1 1 0 0,0 1-1 0 0,1-1 0 0 0,-1 1 0 0 0,0-1 0 0 0,1 0 0 0 0,-1 1 1 0 0,1-1-1 0 0,-1 0 0 0 0,1 1 0 0 0,-1-1 0 0 0,1 0 1 0 0,0 0-1 0 0,-1 0 0 0 0,1 1 0 0 0,0-1 0 0 0,-1 0 0 0 0,1-1 1 0 0,-6-16-31 0 0,1 0 0 0 0,0 0 1 0 0,-3-37-1 0 0,2-59-690 0 0,6 96-218 0 0,1 0 0 0 0,1-1 0 0 0,3-17 1 0 0,12-23-6395 0 0,-12 42 5574 0 0</inkml:trace>
+</inkml:ink>
+</file>
+
+<file path=ppt/ink/ink49.xml><?xml version="1.0" encoding="utf-8"?>
+<inkml:ink xmlns:inkml="http://www.w3.org/2003/InkML">
+  <inkml:definitions>
+    <inkml:context xml:id="ctx0">
+      <inkml:inkSource xml:id="inkSrc0">
+        <inkml:traceFormat>
+          <inkml:channel name="X" type="integer" min="-2.14748E9" max="2.14748E9" units="cm"/>
+          <inkml:channel name="Y" type="integer" min="-2.14748E9" max="2.14748E9" units="cm"/>
+          <inkml:channel name="F" type="integer" max="32767" units="dev"/>
+          <inkml:channel name="OA" type="integer" max="360" units="deg"/>
+          <inkml:channel name="OE" type="integer" max="90" units="deg"/>
+        </inkml:traceFormat>
+        <inkml:channelProperties>
+          <inkml:channelProperty channel="X" name="resolution" value="1000" units="1/cm"/>
+          <inkml:channelProperty channel="Y" name="resolution" value="1000" units="1/cm"/>
+          <inkml:channelProperty channel="F" name="resolution" value="0" units="1/dev"/>
+          <inkml:channelProperty channel="OA" name="resolution" value="1000" units="1/deg"/>
+          <inkml:channelProperty channel="OE" name="resolution" value="1000" units="1/deg"/>
+        </inkml:channelProperties>
+      </inkml:inkSource>
+      <inkml:timestamp xml:id="ts0" timeString="2026-02-12T19:34:04.270"/>
+    </inkml:context>
+    <inkml:brush xml:id="br0">
+      <inkml:brushProperty name="width" value="0.025" units="cm"/>
+      <inkml:brushProperty name="height" value="0.025" units="cm"/>
+    </inkml:brush>
+  </inkml:definitions>
+  <inkml:trace contextRef="#ctx0" brushRef="#br0">356 395 312 0 0,'15'27'4541'0'0,"-14"-26"-4311"0"0,-1-1-1 0 0,1 1 1 0 0,-1 0 0 0 0,1-1-1 0 0,-1 1 1 0 0,0 0 0 0 0,1 0 0 0 0,-1-1-1 0 0,0 1 1 0 0,0 0 0 0 0,0 0-1 0 0,0-1 1 0 0,1 1 0 0 0,-1 0-1 0 0,0 0 1 0 0,0 0 0 0 0,-1-1-1 0 0,1 1 1 0 0,0 0 0 0 0,0 0-1 0 0,0 0 1 0 0,0-1 0 0 0,-1 1 0 0 0,1 0-1 0 0,0 0 1 0 0,-1-1 0 0 0,1 1-1 0 0,0 0 1 0 0,-1-1 0 0 0,1 1-1 0 0,-1 0 1 0 0,1-1 0 0 0,-1 1-1 0 0,-1 0 1 0 0,0-1-33 0 0,0 0 0 0 0,0 0-1 0 0,0-1 1 0 0,-1 1 0 0 0,1-1-1 0 0,0 1 1 0 0,0-1 0 0 0,0 0 0 0 0,0 0-1 0 0,0 0 1 0 0,0 0 0 0 0,1 0-1 0 0,-1 0 1 0 0,0 0 0 0 0,-3-4 0 0 0,-5-2 102 0 0,-22-11-219 0 0,1-2-1 0 0,0-1 1 0 0,2-2-1 0 0,-39-37 1 0 0,54 45-64 0 0,0 0 1 0 0,1-1 0 0 0,1-1-1 0 0,0 0 1 0 0,2 0-1 0 0,0-1 1 0 0,0 0-1 0 0,2-1 1 0 0,-10-32-1 0 0,17 48 34 0 0,-7-37 257 0 0,7 38-283 0 0,1 0 1 0 0,0 0-1 0 0,0 1 1 0 0,0-1 0 0 0,0 0-1 0 0,0 0 1 0 0,0 0-1 0 0,1 0 1 0 0,-1 0-1 0 0,1 0 1 0 0,-1 0 0 0 0,1 1-1 0 0,-1-1 1 0 0,1 0-1 0 0,0 0 1 0 0,0 1 0 0 0,2-3-1 0 0,-3 3-16 0 0,0 1 1 0 0,1 0-1 0 0,-1 0 0 0 0,0 0 0 0 0,0 0 1 0 0,0-1-1 0 0,1 1 0 0 0,-1 0 0 0 0,0 0 1 0 0,0 0-1 0 0,1 0 0 0 0,-1 0 0 0 0,0 0 0 0 0,0 0 1 0 0,1 0-1 0 0,-1 0 0 0 0,0-1 0 0 0,0 1 1 0 0,1 0-1 0 0,-1 0 0 0 0,0 0 0 0 0,1 1 1 0 0,-1-1-1 0 0,0 0 0 0 0,0 0 0 0 0,1 0 1 0 0,-1 0-1 0 0,0 0 0 0 0,0 0 0 0 0,1 0 1 0 0,-1 0-1 0 0,0 0 0 0 0,0 1 0 0 0,0-1 1 0 0,1 0-1 0 0,7 11 147 0 0,2 13-123 0 0,25 137-276 0 0,-26-106 196 0 0,3 0 0 0 0,31 85 0 0 0,-42-138 63 0 0,-1 0 0 0 0,1-1-1 0 0,-1 1 1 0 0,1-1 0 0 0,0 1-1 0 0,0-1 1 0 0,0 1 0 0 0,0-1 0 0 0,0 1-1 0 0,0-1 1 0 0,0 0 0 0 0,0 0-1 0 0,0 1 1 0 0,1-1 0 0 0,-1 0 0 0 0,1 0-1 0 0,-1 0 1 0 0,0 0 0 0 0,1-1-1 0 0,0 1 1 0 0,-1 0 0 0 0,3 0-1 0 0,-3-1 19 0 0,1 0 0 0 0,0 0 0 0 0,0 0-1 0 0,0-1 1 0 0,0 1 0 0 0,0 0-1 0 0,0-1 1 0 0,0 0 0 0 0,-1 1-1 0 0,1-1 1 0 0,0 0 0 0 0,0 0-1 0 0,-1 0 1 0 0,1 0 0 0 0,-1 0-1 0 0,3-2 1 0 0,4-4 90 0 0,-1 0 0 0 0,0-1 0 0 0,0 0 0 0 0,-1 0 0 0 0,11-19 0 0 0,-11 15-83 0 0,0-1-1 0 0,0 0 0 0 0,-1-1 1 0 0,-1 1-1 0 0,0-1 0 0 0,3-26 0 0 0,-4 11-679 0 0,-2-1-1 0 0,-3-36 0 0 0,2 60-40 0 0,-1-4-4024 0 0</inkml:trace>
 </inkml:ink>
 </file>
 
@@ -531,6 +1523,316 @@
 </inkml:ink>
 </file>
 
+<file path=ppt/ink/ink50.xml><?xml version="1.0" encoding="utf-8"?>
+<inkml:ink xmlns:inkml="http://www.w3.org/2003/InkML">
+  <inkml:definitions>
+    <inkml:context xml:id="ctx0">
+      <inkml:inkSource xml:id="inkSrc0">
+        <inkml:traceFormat>
+          <inkml:channel name="X" type="integer" min="-2.14748E9" max="2.14748E9" units="cm"/>
+          <inkml:channel name="Y" type="integer" min="-2.14748E9" max="2.14748E9" units="cm"/>
+          <inkml:channel name="F" type="integer" max="32767" units="dev"/>
+          <inkml:channel name="OA" type="integer" max="360" units="deg"/>
+          <inkml:channel name="OE" type="integer" max="90" units="deg"/>
+        </inkml:traceFormat>
+        <inkml:channelProperties>
+          <inkml:channelProperty channel="X" name="resolution" value="1000" units="1/cm"/>
+          <inkml:channelProperty channel="Y" name="resolution" value="1000" units="1/cm"/>
+          <inkml:channelProperty channel="F" name="resolution" value="0" units="1/dev"/>
+          <inkml:channelProperty channel="OA" name="resolution" value="1000" units="1/deg"/>
+          <inkml:channelProperty channel="OE" name="resolution" value="1000" units="1/deg"/>
+        </inkml:channelProperties>
+      </inkml:inkSource>
+      <inkml:timestamp xml:id="ts0" timeString="2026-02-12T19:34:04.653"/>
+    </inkml:context>
+    <inkml:brush xml:id="br0">
+      <inkml:brushProperty name="width" value="0.025" units="cm"/>
+      <inkml:brushProperty name="height" value="0.025" units="cm"/>
+    </inkml:brush>
+  </inkml:definitions>
+  <inkml:trace contextRef="#ctx0" brushRef="#br0">31 44 1048 0 0,'-30'-43'11361'0'0,"40"62"-7493"0"0,-2-2-3411 0 0,215 305 2226 0 0,-204-305-3973 0 0,-16-18-2405 0 0,-10-11-1568 0 0,3 7 2681 0 0,-1 1 868 0 0</inkml:trace>
+</inkml:ink>
+</file>
+
+<file path=ppt/ink/ink51.xml><?xml version="1.0" encoding="utf-8"?>
+<inkml:ink xmlns:inkml="http://www.w3.org/2003/InkML">
+  <inkml:definitions>
+    <inkml:context xml:id="ctx0">
+      <inkml:inkSource xml:id="inkSrc0">
+        <inkml:traceFormat>
+          <inkml:channel name="X" type="integer" min="-2.14748E9" max="2.14748E9" units="cm"/>
+          <inkml:channel name="Y" type="integer" min="-2.14748E9" max="2.14748E9" units="cm"/>
+          <inkml:channel name="F" type="integer" max="32767" units="dev"/>
+          <inkml:channel name="OA" type="integer" max="360" units="deg"/>
+          <inkml:channel name="OE" type="integer" max="90" units="deg"/>
+        </inkml:traceFormat>
+        <inkml:channelProperties>
+          <inkml:channelProperty channel="X" name="resolution" value="1000" units="1/cm"/>
+          <inkml:channelProperty channel="Y" name="resolution" value="1000" units="1/cm"/>
+          <inkml:channelProperty channel="F" name="resolution" value="0" units="1/dev"/>
+          <inkml:channelProperty channel="OA" name="resolution" value="1000" units="1/deg"/>
+          <inkml:channelProperty channel="OE" name="resolution" value="1000" units="1/deg"/>
+        </inkml:channelProperties>
+      </inkml:inkSource>
+      <inkml:timestamp xml:id="ts0" timeString="2026-02-12T19:34:05.380"/>
+    </inkml:context>
+    <inkml:brush xml:id="br0">
+      <inkml:brushProperty name="width" value="0.025" units="cm"/>
+      <inkml:brushProperty name="height" value="0.025" units="cm"/>
+    </inkml:brush>
+  </inkml:definitions>
+  <inkml:trace contextRef="#ctx0" brushRef="#br0">8 544 8 0 0,'-1'1'291'0'0,"0"0"-1"0"0,0 0 1 0 0,1 0 0 0 0,-1 0-1 0 0,1 0 1 0 0,-1 0 0 0 0,1 0 0 0 0,-1 0-1 0 0,1 0 1 0 0,0 0 0 0 0,-1 0-1 0 0,1 0 1 0 0,0 0 0 0 0,0 1-1 0 0,0-1 1 0 0,0 0 0 0 0,0 0 0 0 0,0 0-1 0 0,0 0 1 0 0,0 0 0 0 0,0 0-1 0 0,0 0 1 0 0,1 1 0 0 0,-1-1-1 0 0,1 1 1 0 0,0-1-136 0 0,-1-1 0 0 0,1 1-1 0 0,0-1 1 0 0,0 1 0 0 0,0-1-1 0 0,0 1 1 0 0,0-1 0 0 0,-1 0 0 0 0,1 1-1 0 0,0-1 1 0 0,0 0 0 0 0,0 0 0 0 0,0 0-1 0 0,0 0 1 0 0,0 1 0 0 0,0-1-1 0 0,0-1 1 0 0,0 1 0 0 0,0 0 0 0 0,0 0-1 0 0,0 0 1 0 0,0 0 0 0 0,0-1 0 0 0,0 1-1 0 0,0 0 1 0 0,-1-1 0 0 0,1 1 0 0 0,2-2-1 0 0,2-1 101 0 0,0 0-1 0 0,0-1 1 0 0,0 1-1 0 0,0-1 1 0 0,-1 0 0 0 0,0-1-1 0 0,1 1 1 0 0,-1-1-1 0 0,-1 0 1 0 0,1 0-1 0 0,2-6 1 0 0,5-7 349 0 0,14-36-1 0 0,-7 3-355 0 0,-1-1-1 0 0,-3-1 0 0 0,9-64 0 0 0,-22 100-109 0 0,0-1 0 0 0,-2-28 0 0 0,0 31 57 0 0,0 0 1 0 0,1 0-1 0 0,4-27 1 0 0,-4 42-191 0 0,0 0 0 0 0,0 0 1 0 0,0 0-1 0 0,0-1 0 0 0,0 1 0 0 0,0 0 0 0 0,0 0 1 0 0,0 0-1 0 0,0 0 0 0 0,0-1 0 0 0,0 1 1 0 0,0 0-1 0 0,0 0 0 0 0,0 0 0 0 0,0 0 0 0 0,0-1 1 0 0,1 1-1 0 0,-1 0 0 0 0,0 0 0 0 0,0 0 1 0 0,0 0-1 0 0,0 0 0 0 0,0-1 0 0 0,0 1 0 0 0,0 0 1 0 0,1 0-1 0 0,-1 0 0 0 0,0 0 0 0 0,0 0 1 0 0,0 0-1 0 0,0 0 0 0 0,1 0 0 0 0,-1 0 0 0 0,0 0 1 0 0,0 0-1 0 0,0-1 0 0 0,0 1 0 0 0,1 0 0 0 0,-1 0 1 0 0,0 0-1 0 0,0 0 0 0 0,7 7 184 0 0,4 13-14 0 0,-11-19-177 0 0,24 46 44 0 0,68 153 25 0 0,-71-150 82 0 0,-3 1-1 0 0,12 57 1 0 0,-25-91-103 0 0,-5-25-67 0 0,-5-29 91 0 0,-8-15 121 0 0,-34-84 1 0 0,23 71-83 0 0,21 51-80 0 0,10 20 9 0 0,11 22-109 0 0,-10-14 55 0 0,1 0 0 0 0,0-1 1 0 0,0 0-1 0 0,12 12 0 0 0,-18-22 20 0 0,0 0 1 0 0,0 0-1 0 0,1 0 0 0 0,-1 0 1 0 0,0-1-1 0 0,1 1 0 0 0,0-1 0 0 0,0 0 1 0 0,0 0-1 0 0,0 0 0 0 0,0-1 0 0 0,0 1 1 0 0,0-1-1 0 0,0 0 0 0 0,1-1 1 0 0,-1 1-1 0 0,0 0 0 0 0,1-1 0 0 0,7-1 1 0 0,-10 1 2 0 0,1-1 0 0 0,-1 0 1 0 0,0 0-1 0 0,0 0 1 0 0,0 0-1 0 0,0 0 0 0 0,0 0 1 0 0,-1 0-1 0 0,1-1 1 0 0,0 1-1 0 0,0-1 0 0 0,-1 0 1 0 0,1 1-1 0 0,-1-1 1 0 0,0 0-1 0 0,1 0 0 0 0,-1 0 1 0 0,0 0-1 0 0,0 0 1 0 0,0 0-1 0 0,1-3 0 0 0,1-3 20 0 0,-1 0 0 0 0,1-1-1 0 0,-1 1 1 0 0,1-11 0 0 0,-3 11 6 0 0,1 0 0 0 0,-1 0 0 0 0,0-1 0 0 0,0 1 0 0 0,-1 0 1 0 0,0 0-1 0 0,-1 0 0 0 0,0 0 0 0 0,0 0 0 0 0,-1 0 0 0 0,0 0 1 0 0,0 1-1 0 0,-1-1 0 0 0,0 1 0 0 0,0 0 0 0 0,0 0 0 0 0,-1 0 0 0 0,0 1 1 0 0,-1 0-1 0 0,1 0 0 0 0,-1 0 0 0 0,0 0 0 0 0,-1 1 0 0 0,1 0 0 0 0,-1 1 1 0 0,0-1-1 0 0,-9-3 0 0 0,16 8-32 0 0,0 0-1 0 0,0 0 1 0 0,0 0 0 0 0,-1 0 0 0 0,1 0 0 0 0,0 0-1 0 0,0 0 1 0 0,0 0 0 0 0,-1 0 0 0 0,1 0-1 0 0,0 0 1 0 0,0 0 0 0 0,0 0 0 0 0,-1 0-1 0 0,1 0 1 0 0,0 0 0 0 0,0 0 0 0 0,0 0 0 0 0,0 0-1 0 0,-1 0 1 0 0,1 0 0 0 0,0 0 0 0 0,0 0-1 0 0,0 0 1 0 0,-1 0 0 0 0,1 0 0 0 0,0 0-1 0 0,0 1 1 0 0,0-1 0 0 0,0 0 0 0 0,-1 0-1 0 0,1 0 1 0 0,0 0 0 0 0,0 0 0 0 0,0 1 0 0 0,0-1-1 0 0,0 0 1 0 0,0 0 0 0 0,0 0 0 0 0,0 0-1 0 0,-1 1 1 0 0,1-1 0 0 0,0 0 0 0 0,0 0-1 0 0,0 0 1 0 0,0 1 0 0 0,0-1 0 0 0,2 16 49 0 0,7 14 12 0 0,-3-17-64 0 0,1 0 0 0 0,0-1 0 0 0,1 0 0 0 0,13 17 0 0 0,-15-23-14 0 0,0 1 0 0 0,0-1 0 0 0,0-1 0 0 0,1 1 0 0 0,0-1 0 0 0,0 0 0 0 0,0 0 0 0 0,14 5 0 0 0,-20-9-42 0 0,0-1 0 0 0,1 1 1 0 0,-1-1-1 0 0,0 1 0 0 0,1-1 0 0 0,-1 0 1 0 0,1 1-1 0 0,-1-1 0 0 0,0 0 1 0 0,1 0-1 0 0,-1 0 0 0 0,1 0 1 0 0,-1 0-1 0 0,1-1 0 0 0,-1 1 1 0 0,0 0-1 0 0,1-1 0 0 0,-1 1 1 0 0,0-1-1 0 0,1 1 0 0 0,-1-1 1 0 0,0 0-1 0 0,0 1 0 0 0,1-1 1 0 0,0-1-1 0 0,10-13-3633 0 0,-5-4-3344 0 0,-4 8 2329 0 0</inkml:trace>
+</inkml:ink>
+</file>
+
+<file path=ppt/ink/ink52.xml><?xml version="1.0" encoding="utf-8"?>
+<inkml:ink xmlns:inkml="http://www.w3.org/2003/InkML">
+  <inkml:definitions>
+    <inkml:context xml:id="ctx0">
+      <inkml:inkSource xml:id="inkSrc0">
+        <inkml:traceFormat>
+          <inkml:channel name="X" type="integer" min="-2.14748E9" max="2.14748E9" units="cm"/>
+          <inkml:channel name="Y" type="integer" min="-2.14748E9" max="2.14748E9" units="cm"/>
+          <inkml:channel name="F" type="integer" max="32767" units="dev"/>
+          <inkml:channel name="OA" type="integer" max="360" units="deg"/>
+          <inkml:channel name="OE" type="integer" max="90" units="deg"/>
+        </inkml:traceFormat>
+        <inkml:channelProperties>
+          <inkml:channelProperty channel="X" name="resolution" value="1000" units="1/cm"/>
+          <inkml:channelProperty channel="Y" name="resolution" value="1000" units="1/cm"/>
+          <inkml:channelProperty channel="F" name="resolution" value="0" units="1/dev"/>
+          <inkml:channelProperty channel="OA" name="resolution" value="1000" units="1/deg"/>
+          <inkml:channelProperty channel="OE" name="resolution" value="1000" units="1/deg"/>
+        </inkml:channelProperties>
+      </inkml:inkSource>
+      <inkml:timestamp xml:id="ts0" timeString="2026-02-12T19:34:14.137"/>
+    </inkml:context>
+    <inkml:brush xml:id="br0">
+      <inkml:brushProperty name="width" value="0.025" units="cm"/>
+      <inkml:brushProperty name="height" value="0.025" units="cm"/>
+    </inkml:brush>
+  </inkml:definitions>
+  <inkml:trace contextRef="#ctx0" brushRef="#br0">47 259 512 0 0,'-46'-64'5579'0'0,"104"127"-1229"0"0,69 100-2631 0 0,-45-43-719 0 0,-102-158-510 0 0,-18-44-1 0 0,21 40-246 0 0,-14-41 67 0 0,29 75-264 0 0,0-1 1 0 0,0 0 0 0 0,1 0 0 0 0,0 0 0 0 0,0 0-1 0 0,1 0 1 0 0,2-14 0 0 0,-2 22-40 0 0,0-1 0 0 0,0 1 0 0 0,0-1 0 0 0,0 1 1 0 0,1 0-1 0 0,-1-1 0 0 0,1 1 0 0 0,-1-1 0 0 0,1 1 0 0 0,-1 0 0 0 0,1-1 1 0 0,0 1-1 0 0,0 0 0 0 0,0 0 0 0 0,-1 0 0 0 0,1-1 0 0 0,0 1 0 0 0,1 0 1 0 0,-1 0-1 0 0,0 0 0 0 0,0 1 0 0 0,0-1 0 0 0,0 0 0 0 0,1 0 0 0 0,-1 1 1 0 0,0-1-1 0 0,1 0 0 0 0,-1 1 0 0 0,1 0 0 0 0,-1-1 0 0 0,3 1 0 0 0,-2 0 8 0 0,1 0 0 0 0,-1 0 0 0 0,1 0 0 0 0,-1 1 0 0 0,1-1 0 0 0,-1 1-1 0 0,1 0 1 0 0,-1 0 0 0 0,0 0 0 0 0,0 0 0 0 0,1 0 0 0 0,-1 0 0 0 0,0 1 0 0 0,0-1-1 0 0,0 1 1 0 0,0-1 0 0 0,2 4 0 0 0,6 6-3 0 0,0 1-1 0 0,-1 0 1 0 0,-1 1-1 0 0,0 0 1 0 0,0 0-1 0 0,-2 1 1 0 0,0 0 0 0 0,0 0-1 0 0,-1 1 1 0 0,-1-1-1 0 0,0 1 1 0 0,-1 0 0 0 0,-1 0-1 0 0,0 0 1 0 0,-1 0-1 0 0,-1 1 1 0 0,0-1-1 0 0,-4 20 1 0 0,4-34-16 0 0,0 1-1 0 0,0-1 1 0 0,-1 0 0 0 0,1 0 0 0 0,-1 1-1 0 0,1-1 1 0 0,-1 0 0 0 0,1 0 0 0 0,-1 0-1 0 0,0 0 1 0 0,1 0 0 0 0,-1 0-1 0 0,0 0 1 0 0,0 0 0 0 0,0 0 0 0 0,0 0-1 0 0,0 0 1 0 0,0 0 0 0 0,0 0-1 0 0,0-1 1 0 0,0 1 0 0 0,-1-1 0 0 0,1 1-1 0 0,0-1 1 0 0,0 1 0 0 0,0-1 0 0 0,-2 1-1 0 0,2-1 1 0 0,0 0 0 0 0,0 0 0 0 0,0 0 1 0 0,0-1-1 0 0,0 1 0 0 0,1 0 0 0 0,-1 0 0 0 0,0-1 0 0 0,0 1 0 0 0,0 0 0 0 0,1-1 0 0 0,-1 1 0 0 0,0-1 1 0 0,0 1-1 0 0,1-1 0 0 0,-1 1 0 0 0,0-1 0 0 0,1 1 0 0 0,-1-1 0 0 0,1 0 0 0 0,-1 1 0 0 0,0-1 0 0 0,1 0 0 0 0,0 0 1 0 0,-1 1-1 0 0,1-1 0 0 0,-1 0 0 0 0,1 0 0 0 0,0 0 0 0 0,0 0 0 0 0,-1 1 0 0 0,1-1 0 0 0,0 0 0 0 0,0 0 1 0 0,0 0-1 0 0,0 0 0 0 0,0 0 0 0 0,0 0 0 0 0,1-1 0 0 0,-1-1 5 0 0,1 1 1 0 0,0-1-1 0 0,0 0 1 0 0,0 1-1 0 0,1-1 1 0 0,-1 1-1 0 0,1 0 0 0 0,-1-1 1 0 0,1 1-1 0 0,0 0 1 0 0,0 0-1 0 0,0 0 1 0 0,0 0-1 0 0,0 0 0 0 0,1 0 1 0 0,3-2-1 0 0,17-17 39 0 0,-13 5-11 0 0,-1 0 0 0 0,-1 0 0 0 0,0 0 0 0 0,-1-1-1 0 0,-1 0 1 0 0,-1-1 0 0 0,0 1 0 0 0,-1-1 0 0 0,-1 0 0 0 0,-1 0 0 0 0,-1 0 0 0 0,0 0 0 0 0,-1-1 0 0 0,-1 1-1 0 0,-1 0 1 0 0,0 0 0 0 0,-6-19 0 0 0,6 29 0 0 0,-1 0-1 0 0,-1 0 0 0 0,1 0 1 0 0,-9-13-1 0 0,11 19-3 0 0,-1-1-1 0 0,0 0 1 0 0,0 1-1 0 0,0-1 1 0 0,0 1-1 0 0,0-1 1 0 0,-1 1-1 0 0,1 0 1 0 0,-1 0 0 0 0,1 0-1 0 0,-1 0 1 0 0,0 1-1 0 0,0-1 1 0 0,0 1-1 0 0,-4-2 1 0 0,7 3-17 0 0,-1 0 0 0 0,1 0 0 0 0,-1 0-1 0 0,1 1 1 0 0,-1-1 0 0 0,1 0 0 0 0,-1 0 0 0 0,1 1 0 0 0,0-1 0 0 0,-1 0 0 0 0,1 0 0 0 0,-1 1-1 0 0,1-1 1 0 0,0 0 0 0 0,-1 1 0 0 0,1-1 0 0 0,0 1 0 0 0,0-1 0 0 0,-1 1 0 0 0,1-1-1 0 0,0 0 1 0 0,0 1 0 0 0,0-1 0 0 0,-1 1 0 0 0,1-1 0 0 0,0 1 0 0 0,0-1 0 0 0,0 1 0 0 0,0-1-1 0 0,0 1 1 0 0,0-1 0 0 0,0 1 0 0 0,0-1 0 0 0,0 1 0 0 0,0-1 0 0 0,0 1 0 0 0,0-1-1 0 0,1 1 1 0 0,1 23 62 0 0,-2-23-58 0 0,5 23 11 0 0,2 0 1 0 0,0-1-1 0 0,1 0 0 0 0,1-1 0 0 0,1 1 0 0 0,1-2 0 0 0,1 1 0 0 0,23 29 0 0 0,-30-44-36 0 0,0-1 0 0 0,0-1 0 0 0,1 1 0 0 0,0-1 1 0 0,1 0-1 0 0,-1 0 0 0 0,14 8 0 0 0,-18-13-10 0 0,-1 1 0 0 0,1 0 0 0 0,-1-1 0 0 0,1 1 0 0 0,-1-1 0 0 0,1 1 1 0 0,0-1-1 0 0,-1 0 0 0 0,1 0 0 0 0,0 0 0 0 0,-1 0 0 0 0,1 0 0 0 0,-1 0 1 0 0,1 0-1 0 0,0-1 0 0 0,-1 1 0 0 0,1 0 0 0 0,1-1 0 0 0,-1-1-57 0 0,-1 1 1 0 0,1 0-1 0 0,-1 0 0 0 0,1-1 0 0 0,-1 1 0 0 0,1-1 0 0 0,-1 1 0 0 0,0-1 0 0 0,0 0 0 0 0,0 1 0 0 0,0-1 0 0 0,0 0 0 0 0,0 0 1 0 0,0 0-1 0 0,-1 1 0 0 0,1-1 0 0 0,-1 0 0 0 0,1-4 0 0 0,1-10-1095 0 0,0 0 1 0 0,-1 0-1 0 0,-1 1 1 0 0,-1-1 0 0 0,0 0-1 0 0,-1 0 1 0 0,-1 0-1 0 0,0 1 1 0 0,-1-1-1 0 0,-1 1 1 0 0,-10-25-1 0 0,9 26 775 0 0</inkml:trace>
+</inkml:ink>
+</file>
+
+<file path=ppt/ink/ink53.xml><?xml version="1.0" encoding="utf-8"?>
+<inkml:ink xmlns:inkml="http://www.w3.org/2003/InkML">
+  <inkml:definitions>
+    <inkml:context xml:id="ctx0">
+      <inkml:inkSource xml:id="inkSrc0">
+        <inkml:traceFormat>
+          <inkml:channel name="X" type="integer" min="-2.14748E9" max="2.14748E9" units="cm"/>
+          <inkml:channel name="Y" type="integer" min="-2.14748E9" max="2.14748E9" units="cm"/>
+          <inkml:channel name="F" type="integer" max="32767" units="dev"/>
+          <inkml:channel name="OA" type="integer" max="360" units="deg"/>
+          <inkml:channel name="OE" type="integer" max="90" units="deg"/>
+        </inkml:traceFormat>
+        <inkml:channelProperties>
+          <inkml:channelProperty channel="X" name="resolution" value="1000" units="1/cm"/>
+          <inkml:channelProperty channel="Y" name="resolution" value="1000" units="1/cm"/>
+          <inkml:channelProperty channel="F" name="resolution" value="0" units="1/dev"/>
+          <inkml:channelProperty channel="OA" name="resolution" value="1000" units="1/deg"/>
+          <inkml:channelProperty channel="OE" name="resolution" value="1000" units="1/deg"/>
+        </inkml:channelProperties>
+      </inkml:inkSource>
+      <inkml:timestamp xml:id="ts0" timeString="2026-02-12T19:34:14.327"/>
+    </inkml:context>
+    <inkml:brush xml:id="br0">
+      <inkml:brushProperty name="width" value="0.025" units="cm"/>
+      <inkml:brushProperty name="height" value="0.025" units="cm"/>
+    </inkml:brush>
+  </inkml:definitions>
+  <inkml:trace contextRef="#ctx0" brushRef="#br0">98 136 208 0 0,'-98'-136'6948'0'0,"143"200"-1462"0"0,114 129-5021 0 0,-147-181-8 0 0,-4-3-4127 0 0,-21-15-2613 0 0,7 3 4456 0 0</inkml:trace>
+</inkml:ink>
+</file>
+
+<file path=ppt/ink/ink54.xml><?xml version="1.0" encoding="utf-8"?>
+<inkml:ink xmlns:inkml="http://www.w3.org/2003/InkML">
+  <inkml:definitions>
+    <inkml:context xml:id="ctx0">
+      <inkml:inkSource xml:id="inkSrc0">
+        <inkml:traceFormat>
+          <inkml:channel name="X" type="integer" min="-2.14748E9" max="2.14748E9" units="cm"/>
+          <inkml:channel name="Y" type="integer" min="-2.14748E9" max="2.14748E9" units="cm"/>
+          <inkml:channel name="F" type="integer" max="32767" units="dev"/>
+          <inkml:channel name="OA" type="integer" max="360" units="deg"/>
+          <inkml:channel name="OE" type="integer" max="90" units="deg"/>
+        </inkml:traceFormat>
+        <inkml:channelProperties>
+          <inkml:channelProperty channel="X" name="resolution" value="1000" units="1/cm"/>
+          <inkml:channelProperty channel="Y" name="resolution" value="1000" units="1/cm"/>
+          <inkml:channelProperty channel="F" name="resolution" value="0" units="1/dev"/>
+          <inkml:channelProperty channel="OA" name="resolution" value="1000" units="1/deg"/>
+          <inkml:channelProperty channel="OE" name="resolution" value="1000" units="1/deg"/>
+        </inkml:channelProperties>
+      </inkml:inkSource>
+      <inkml:timestamp xml:id="ts0" timeString="2026-02-12T19:34:14.777"/>
+    </inkml:context>
+    <inkml:brush xml:id="br0">
+      <inkml:brushProperty name="width" value="0.025" units="cm"/>
+      <inkml:brushProperty name="height" value="0.025" units="cm"/>
+    </inkml:brush>
+  </inkml:definitions>
+  <inkml:trace contextRef="#ctx0" brushRef="#br0">49 375 8 0 0,'-1'-1'-174'0'0,"-5"-1"700"0"0,0-1 1 0 0,0 0 0 0 0,1 0 0 0 0,-11-7 0 0 0,15 9-408 0 0,1 1-1 0 0,-1-1 1 0 0,0 1-1 0 0,1-1 1 0 0,-1 0 0 0 0,1 1-1 0 0,-1-1 1 0 0,1 0-1 0 0,-1 1 1 0 0,1-1 0 0 0,-1 0-1 0 0,1 1 1 0 0,0-1-1 0 0,-1 0 1 0 0,1 0-1 0 0,0 0 1 0 0,0 1 0 0 0,0-1-1 0 0,-1 0 1 0 0,1 0-1 0 0,0 0 1 0 0,0 0 0 0 0,0 1-1 0 0,0-1 1 0 0,0 0-1 0 0,1 0 1 0 0,-1 0 0 0 0,0 0-1 0 0,0 1 1 0 0,1-1-1 0 0,-1 0 1 0 0,0 0 0 0 0,1 1-1 0 0,-1-1 1 0 0,0 0-1 0 0,1 0 1 0 0,-1 1 0 0 0,1-1-1 0 0,0 1 1 0 0,-1-1-1 0 0,1 0 1 0 0,-1 1 0 0 0,1-1-1 0 0,0 1 1 0 0,-1-1-1 0 0,1 1 1 0 0,0 0 0 0 0,0-1-1 0 0,19-14 359 0 0,-2 0 1 0 0,0-1-1 0 0,-1-1 0 0 0,0-1 1 0 0,20-29-1 0 0,-32 39-433 0 0,1 0-1 0 0,-1 0 0 0 0,-1 0 1 0 0,0-1-1 0 0,0 0 1 0 0,0 0-1 0 0,-1 0 0 0 0,-1 0 1 0 0,0-1-1 0 0,0 1 1 0 0,0-1-1 0 0,-1 1 1 0 0,-1-1-1 0 0,0 1 0 0 0,0-1 1 0 0,-3-16-1 0 0,-5 6 717 0 0,5 20-193 0 0,4 12-199 0 0,7 34 10 0 0,2 0 1 0 0,2-1-1 0 0,2 0 0 0 0,28 58 0 0 0,-42-102-368 0 0,0 0 1 0 0,1 0-1 0 0,-1 0 0 0 0,0 0 0 0 0,1 0 0 0 0,-1 0 0 0 0,1 0 0 0 0,-1 0 0 0 0,1 0 1 0 0,0-1-1 0 0,-1 1 0 0 0,1 0 0 0 0,0 0 0 0 0,0-1 0 0 0,-1 1 0 0 0,1 0 0 0 0,0-1 1 0 0,0 1-1 0 0,0-1 0 0 0,0 1 0 0 0,0-1 0 0 0,0 1 0 0 0,1-1 0 0 0,-1 0-4 0 0,0-1-1 0 0,-1 1 0 0 0,1-1 0 0 0,-1 1 0 0 0,1-1 0 0 0,0 1 1 0 0,-1-1-1 0 0,1 1 0 0 0,-1-1 0 0 0,1 0 0 0 0,-1 1 1 0 0,1-1-1 0 0,-1 0 0 0 0,0 0 0 0 0,1 1 0 0 0,-1-1 0 0 0,0 0 1 0 0,0 0-1 0 0,1 0 0 0 0,-1 1 0 0 0,0-1 0 0 0,0 0 1 0 0,0 0-1 0 0,0 0 0 0 0,0 0 0 0 0,0 1 0 0 0,0-1 1 0 0,-1-2-1 0 0,-1-24 150 0 0,-1 0 0 0 0,-1 1 0 0 0,-2-1 1 0 0,-13-41-1 0 0,-6-27 994 0 0,25 95-1141 0 0,0 0 0 0 0,0 0-1 0 0,0 0 1 0 0,0 0-1 0 0,0 0 1 0 0,0 0-1 0 0,0 0 1 0 0,0 0 0 0 0,1 0-1 0 0,-1 0 1 0 0,0 0-1 0 0,0 0 1 0 0,0 0-1 0 0,0 0 1 0 0,0 0-1 0 0,0 0 1 0 0,0 0 0 0 0,0 0-1 0 0,0 0 1 0 0,0 0-1 0 0,0-1 1 0 0,0 1-1 0 0,0 0 1 0 0,0 0 0 0 0,1 0-1 0 0,-1 0 1 0 0,0 0-1 0 0,0 0 1 0 0,0 0-1 0 0,0 0 1 0 0,0 0-1 0 0,0 0 1 0 0,0 0 0 0 0,0 0-1 0 0,0 0 1 0 0,0 0-1 0 0,0-1 1 0 0,0 1-1 0 0,0 0 1 0 0,0 0 0 0 0,0 0-1 0 0,0 0 1 0 0,0 0-1 0 0,0 0 1 0 0,0 0-1 0 0,0 0 1 0 0,0 0-1 0 0,0 0 1 0 0,0 0 0 0 0,0-1-1 0 0,0 1 1 0 0,0 0-1 0 0,0 0 1 0 0,0 0-1 0 0,0 0 1 0 0,0 0 0 0 0,-1 0-1 0 0,1 0 1 0 0,0 0-1 0 0,7 8 154 0 0,7 15-124 0 0,-13-22-14 0 0,10 19 57 0 0,2-2-1 0 0,20 25 1 0 0,-28-37-224 0 0,0 0 0 0 0,0-1 0 0 0,1 0 1 0 0,0 0-1 0 0,0-1 0 0 0,0 1 0 0 0,0-1 0 0 0,1-1 1 0 0,0 1-1 0 0,0-1 0 0 0,8 3 0 0 0,5-4-2324 0 0,-6-5-2559 0 0,-9 0 1805 0 0</inkml:trace>
+</inkml:ink>
+</file>
+
+<file path=ppt/ink/ink55.xml><?xml version="1.0" encoding="utf-8"?>
+<inkml:ink xmlns:inkml="http://www.w3.org/2003/InkML">
+  <inkml:definitions>
+    <inkml:context xml:id="ctx0">
+      <inkml:inkSource xml:id="inkSrc0">
+        <inkml:traceFormat>
+          <inkml:channel name="X" type="integer" min="-2.14748E9" max="2.14748E9" units="cm"/>
+          <inkml:channel name="Y" type="integer" min="-2.14748E9" max="2.14748E9" units="cm"/>
+          <inkml:channel name="F" type="integer" max="32767" units="dev"/>
+          <inkml:channel name="OA" type="integer" max="360" units="deg"/>
+          <inkml:channel name="OE" type="integer" max="90" units="deg"/>
+        </inkml:traceFormat>
+        <inkml:channelProperties>
+          <inkml:channelProperty channel="X" name="resolution" value="1000" units="1/cm"/>
+          <inkml:channelProperty channel="Y" name="resolution" value="1000" units="1/cm"/>
+          <inkml:channelProperty channel="F" name="resolution" value="0" units="1/dev"/>
+          <inkml:channelProperty channel="OA" name="resolution" value="1000" units="1/deg"/>
+          <inkml:channelProperty channel="OE" name="resolution" value="1000" units="1/deg"/>
+        </inkml:channelProperties>
+      </inkml:inkSource>
+      <inkml:timestamp xml:id="ts0" timeString="2026-02-12T19:34:15.858"/>
+    </inkml:context>
+    <inkml:brush xml:id="br0">
+      <inkml:brushProperty name="width" value="0.025" units="cm"/>
+      <inkml:brushProperty name="height" value="0.025" units="cm"/>
+    </inkml:brush>
+  </inkml:definitions>
+  <inkml:trace contextRef="#ctx0" brushRef="#br0">14 2 8 0 0,'0'0'151'0'0,"0"-1"-1"0"0,0 1 1 0 0,-1 0-1 0 0,1 0 1 0 0,0 0-1 0 0,0 0 1 0 0,-1 0-1 0 0,1 0 1 0 0,0 0-1 0 0,-1 0 1 0 0,1-1-1 0 0,0 1 1 0 0,0 0-1 0 0,-1 0 1 0 0,1 0-1 0 0,0 0 1 0 0,-1 0-1 0 0,1 1 1 0 0,0-1-1 0 0,-1 0 1 0 0,1 0-1 0 0,0 0 1 0 0,0 0-1 0 0,-1 0 1 0 0,1 0-1 0 0,0 0 1 0 0,-1 1-1 0 0,1-1 1 0 0,0 0-1 0 0,0 0 1 0 0,-1 0-1 0 0,1 1 1 0 0,0-1-1 0 0,0 0 1 0 0,0 0-1 0 0,-1 1 1 0 0,-2 14 2193 0 0,6 16-736 0 0,8 13-482 0 0,2-1 1 0 0,20 44 0 0 0,-22-62-794 0 0,1-2 0 0 0,2 0 0 0 0,0 0 0 0 0,33 40 0 0 0,-44-59-314 0 0,1-1 0 0 0,0 1-1 0 0,0-1 1 0 0,0 0 0 0 0,0 0 0 0 0,0 0 0 0 0,1-1 0 0 0,-1 1 0 0 0,1-1 0 0 0,0 0 0 0 0,7 2 0 0 0,-11-4-126 0 0,1 0 0 0 0,-1 1 0 0 0,1-1 0 0 0,-1 0 0 0 0,1 0 1 0 0,0 0-1 0 0,-1 0 0 0 0,1 0 0 0 0,-1 0 0 0 0,1-1 0 0 0,-1 1 0 0 0,1-1 1 0 0,-1 1-1 0 0,1-1 0 0 0,-1 1 0 0 0,0-1 0 0 0,1 0 0 0 0,-1 1 0 0 0,0-1 1 0 0,1 0-1 0 0,-1 0 0 0 0,0 0 0 0 0,0 0 0 0 0,0 0 0 0 0,0-1 0 0 0,0 1 1 0 0,0 0-1 0 0,0 0 0 0 0,0-1 0 0 0,0 1 0 0 0,-1 0 0 0 0,1-1 1 0 0,-1 1-1 0 0,1-1 0 0 0,-1 1 0 0 0,1-1 0 0 0,-1 1 0 0 0,0-1 0 0 0,1 1 1 0 0,-1-1-1 0 0,0-1 0 0 0,1-9-1743 0 0,0-2-20 0 0</inkml:trace>
+</inkml:ink>
+</file>
+
+<file path=ppt/ink/ink56.xml><?xml version="1.0" encoding="utf-8"?>
+<inkml:ink xmlns:inkml="http://www.w3.org/2003/InkML">
+  <inkml:definitions>
+    <inkml:context xml:id="ctx0">
+      <inkml:inkSource xml:id="inkSrc0">
+        <inkml:traceFormat>
+          <inkml:channel name="X" type="integer" min="-2.14748E9" max="2.14748E9" units="cm"/>
+          <inkml:channel name="Y" type="integer" min="-2.14748E9" max="2.14748E9" units="cm"/>
+          <inkml:channel name="F" type="integer" max="32767" units="dev"/>
+          <inkml:channel name="OA" type="integer" max="360" units="deg"/>
+          <inkml:channel name="OE" type="integer" max="90" units="deg"/>
+        </inkml:traceFormat>
+        <inkml:channelProperties>
+          <inkml:channelProperty channel="X" name="resolution" value="1000" units="1/cm"/>
+          <inkml:channelProperty channel="Y" name="resolution" value="1000" units="1/cm"/>
+          <inkml:channelProperty channel="F" name="resolution" value="0" units="1/dev"/>
+          <inkml:channelProperty channel="OA" name="resolution" value="1000" units="1/deg"/>
+          <inkml:channelProperty channel="OE" name="resolution" value="1000" units="1/deg"/>
+        </inkml:channelProperties>
+      </inkml:inkSource>
+      <inkml:timestamp xml:id="ts0" timeString="2026-02-12T19:34:16.299"/>
+    </inkml:context>
+    <inkml:brush xml:id="br0">
+      <inkml:brushProperty name="width" value="0.025" units="cm"/>
+      <inkml:brushProperty name="height" value="0.025" units="cm"/>
+    </inkml:brush>
+  </inkml:definitions>
+  <inkml:trace contextRef="#ctx0" brushRef="#br0">14 117 8 0 0,'0'-1'142'0'0,"0"1"0"0"0,0-1 1 0 0,0 1-1 0 0,0-1 0 0 0,0 1 0 0 0,-1-1 0 0 0,1 1 1 0 0,0-1-1 0 0,0 1 0 0 0,-1-1 0 0 0,1 1 0 0 0,0-1 1 0 0,0 1-1 0 0,-1-1 0 0 0,1 1 0 0 0,-1-1 1 0 0,1 1-1 0 0,0 0 0 0 0,-1-1 0 0 0,1 1 0 0 0,-1 0 1 0 0,1-1-1 0 0,-1 1 0 0 0,1 0 0 0 0,-1 0 0 0 0,1 0 1 0 0,-1-1-1 0 0,1 1 0 0 0,-2 0 0 0 0,-1 16 3640 0 0,7 27-736 0 0,0-27-2513 0 0,1 0-1 0 0,0 0 1 0 0,10 19 0 0 0,-13-31-521 0 0,0 0 1 0 0,1 1 0 0 0,-1-1 0 0 0,1 0 0 0 0,0 0 0 0 0,0-1 0 0 0,0 1 0 0 0,0 0 0 0 0,1-1-1 0 0,0 0 1 0 0,-1 0 0 0 0,1 0 0 0 0,0 0 0 0 0,0-1 0 0 0,9 4 0 0 0,-12-5-23 0 0,0-1 0 0 0,0 1 0 0 0,1-1 0 0 0,-1 0 1 0 0,0 0-1 0 0,1 1 0 0 0,-1-1 0 0 0,0 0 0 0 0,1 0 0 0 0,-1 0 0 0 0,0 0 1 0 0,1 0-1 0 0,-1-1 0 0 0,0 1 0 0 0,0 0 0 0 0,1-1 0 0 0,-1 1 0 0 0,0-1 0 0 0,0 1 1 0 0,1-1-1 0 0,-1 1 0 0 0,0-1 0 0 0,0 0 0 0 0,0 0 0 0 0,0 0 0 0 0,1 0 1 0 0,0-2-183 0 0,-1 1 1 0 0,1-1-1 0 0,-1 1 1 0 0,0-1-1 0 0,1 0 1 0 0,-1 1-1 0 0,0-1 1 0 0,-1 0-1 0 0,1 0 1 0 0,0 0 0 0 0,-1-3-1 0 0,1-8-1393 0 0,0 0-1 0 0,-1 0 0 0 0,-5-25 1 0 0,3 20 122 0 0,-2-9 723 0 0,-9-32 1 0 0,11 53 1324 0 0,0 0 1 0 0,-1 0-1 0 0,0 0 1 0 0,0 0-1 0 0,0 0 1 0 0,-1 1-1 0 0,0-1 1 0 0,0 1-1 0 0,-8-8 1 0 0,12 14-540 0 0,0 0 1 0 0,0 0-1 0 0,0 0 1 0 0,0 0-1 0 0,0 0 1 0 0,0 0-1 0 0,0 0 1 0 0,0 0-1 0 0,0 1 1 0 0,0-1-1 0 0,0 0 1 0 0,0 0 0 0 0,0 0-1 0 0,0 0 1 0 0,0 0-1 0 0,0 0 1 0 0,0 0-1 0 0,0 0 1 0 0,0 0-1 0 0,0 0 1 0 0,0 0-1 0 0,0 0 1 0 0,0 0-1 0 0,-1 1 1 0 0,1-1-1 0 0,0 0 1 0 0,0 0 0 0 0,0 0-1 0 0,0 0 1 0 0,0 0-1 0 0,0 0 1 0 0,0 0-1 0 0,0 0 1 0 0,0 0-1 0 0,0 0 1 0 0,0 0-1 0 0,0 0 1 0 0,0 0-1 0 0,0 0 1 0 0,-1 0 0 0 0,1 0-1 0 0,0 0 1 0 0,0 0-1 0 0,0 0 1 0 0,0 0-1 0 0,0 0 1 0 0,0 0-1 0 0,0 0 1 0 0,0 0-1 0 0,0 0 1 0 0,0 0-1 0 0,0 0 1 0 0,0 0-1 0 0,0 0 1 0 0,-1 0 0 0 0,1 0-1 0 0,0 0 1 0 0,0 0-1 0 0,0 0 1 0 0,0 0-1 0 0,0 0 1 0 0,0 0-1 0 0,0 0 1 0 0,2 12 1110 0 0,5 17-744 0 0,-6-26-171 0 0,78 221 2004 0 0,-53-157-1942 0 0,-18-47-350 0 0,28 66 217 0 0,-32-78-245 0 0,0 0-1 0 0,1-1 1 0 0,0 0-1 0 0,0 1 1 0 0,0-2 0 0 0,1 1-1 0 0,0-1 1 0 0,8 7 0 0 0,-14-13-84 0 0,1 1 0 0 0,-1-1-1 0 0,1 1 1 0 0,-1-1 0 0 0,0 0 0 0 0,1 1 0 0 0,-1-1 0 0 0,1 0 0 0 0,-1 0 0 0 0,1 1 0 0 0,-1-1 0 0 0,1 0-1 0 0,-1 0 1 0 0,1 0 0 0 0,-1 1 0 0 0,1-1 0 0 0,0 0 0 0 0,-1 0 0 0 0,1 0 0 0 0,-1 0 0 0 0,1 0 0 0 0,-1 0-1 0 0,1 0 1 0 0,-1 0 0 0 0,1 0 0 0 0,0-1 0 0 0,-1 1 0 0 0,1 0 0 0 0,-1 0 0 0 0,1 0 0 0 0,-1-1 0 0 0,1 1 0 0 0,-1 0-1 0 0,1-1 1 0 0,-1 1 0 0 0,0 0 0 0 0,1-1 0 0 0,-1 1 0 0 0,1 0 0 0 0,-1-1 0 0 0,0 1 0 0 0,1-1 0 0 0,-1 1-1 0 0,0-1 1 0 0,1 1 0 0 0,-1-1 0 0 0,0 1 0 0 0,0-1 0 0 0,0 1 0 0 0,1-1 0 0 0,-1 1 0 0 0,0-2 0 0 0,0-7-1152 0 0</inkml:trace>
+</inkml:ink>
+</file>
+
+<file path=ppt/ink/ink57.xml><?xml version="1.0" encoding="utf-8"?>
+<inkml:ink xmlns:inkml="http://www.w3.org/2003/InkML">
+  <inkml:definitions>
+    <inkml:context xml:id="ctx0">
+      <inkml:inkSource xml:id="inkSrc0">
+        <inkml:traceFormat>
+          <inkml:channel name="X" type="integer" min="-2.14748E9" max="2.14748E9" units="cm"/>
+          <inkml:channel name="Y" type="integer" min="-2.14748E9" max="2.14748E9" units="cm"/>
+          <inkml:channel name="F" type="integer" max="32767" units="dev"/>
+          <inkml:channel name="OA" type="integer" max="360" units="deg"/>
+          <inkml:channel name="OE" type="integer" max="90" units="deg"/>
+        </inkml:traceFormat>
+        <inkml:channelProperties>
+          <inkml:channelProperty channel="X" name="resolution" value="1000" units="1/cm"/>
+          <inkml:channelProperty channel="Y" name="resolution" value="1000" units="1/cm"/>
+          <inkml:channelProperty channel="F" name="resolution" value="0" units="1/dev"/>
+          <inkml:channelProperty channel="OA" name="resolution" value="1000" units="1/deg"/>
+          <inkml:channelProperty channel="OE" name="resolution" value="1000" units="1/deg"/>
+        </inkml:channelProperties>
+      </inkml:inkSource>
+      <inkml:timestamp xml:id="ts0" timeString="2026-02-12T19:34:16.569"/>
+    </inkml:context>
+    <inkml:brush xml:id="br0">
+      <inkml:brushProperty name="width" value="0.025" units="cm"/>
+      <inkml:brushProperty name="height" value="0.025" units="cm"/>
+    </inkml:brush>
+  </inkml:definitions>
+  <inkml:trace contextRef="#ctx0" brushRef="#br0">3 4 8 0 0,'-2'-4'2299'0'0,"1"6"-519"0"0,3 12 647 0 0,4 19 65 0 0,-1-10-1493 0 0,2-1-1 0 0,10 26 1 0 0,-14-41-851 0 0,0-1 0 0 0,0 1 0 0 0,1 0 0 0 0,0-1 0 0 0,0 0 0 0 0,1 0 0 0 0,0 0 0 0 0,0-1 0 0 0,0 1 0 0 0,11 7 0 0 0,-15-12-94 0 0,1 0 1 0 0,-1 0-1 0 0,0 0 1 0 0,1 0-1 0 0,-1 0 1 0 0,1 0-1 0 0,-1-1 1 0 0,1 1-1 0 0,-1 0 1 0 0,1-1-1 0 0,-1 0 1 0 0,1 1-1 0 0,-1-1 1 0 0,1 0-1 0 0,0 0 1 0 0,-1 0-1 0 0,1 0 1 0 0,-1 0-1 0 0,1 0 1 0 0,0 0-1 0 0,-1 0 1 0 0,1-1-1 0 0,-1 1 0 0 0,1-1 1 0 0,0 1-1 0 0,-1-1 1 0 0,0 1-1 0 0,1-1 1 0 0,-1 0-1 0 0,1 0 1 0 0,-1 0-1 0 0,0 0 1 0 0,1 0-1 0 0,-1 0 1 0 0,0 0-1 0 0,0 0 1 0 0,0-1-1 0 0,0 1 1 0 0,0 0-1 0 0,0-1 1 0 0,0 1-1 0 0,0-2 1 0 0,1 0 19 0 0,-1 0-1 0 0,0 0 1 0 0,0 0-1 0 0,0-1 1 0 0,-1 1-1 0 0,1 0 1 0 0,-1 0 0 0 0,1-1-1 0 0,-1 1 1 0 0,0 0-1 0 0,0-1 1 0 0,-1 1 0 0 0,1 0-1 0 0,-1 0 1 0 0,1-1-1 0 0,-1 1 1 0 0,0 0 0 0 0,0 0-1 0 0,-1 0 1 0 0,-1-4-1 0 0,-8-6-148 0 0,0 0-1 0 0,0 1 0 0 0,-1 0 0 0 0,-27-19 1 0 0,27 21-970 0 0,17 17-7979 0 0,-1-1 5346 0 0</inkml:trace>
+</inkml:ink>
+</file>
+
+<file path=ppt/ink/ink58.xml><?xml version="1.0" encoding="utf-8"?>
+<inkml:ink xmlns:inkml="http://www.w3.org/2003/InkML">
+  <inkml:definitions>
+    <inkml:context xml:id="ctx0">
+      <inkml:inkSource xml:id="inkSrc0">
+        <inkml:traceFormat>
+          <inkml:channel name="X" type="integer" min="-2.14748E9" max="2.14748E9" units="cm"/>
+          <inkml:channel name="Y" type="integer" min="-2.14748E9" max="2.14748E9" units="cm"/>
+          <inkml:channel name="F" type="integer" max="32767" units="dev"/>
+          <inkml:channel name="OA" type="integer" max="360" units="deg"/>
+          <inkml:channel name="OE" type="integer" max="90" units="deg"/>
+        </inkml:traceFormat>
+        <inkml:channelProperties>
+          <inkml:channelProperty channel="X" name="resolution" value="1000" units="1/cm"/>
+          <inkml:channelProperty channel="Y" name="resolution" value="1000" units="1/cm"/>
+          <inkml:channelProperty channel="F" name="resolution" value="0" units="1/dev"/>
+          <inkml:channelProperty channel="OA" name="resolution" value="1000" units="1/deg"/>
+          <inkml:channelProperty channel="OE" name="resolution" value="1000" units="1/deg"/>
+        </inkml:channelProperties>
+      </inkml:inkSource>
+      <inkml:timestamp xml:id="ts0" timeString="2026-02-12T19:34:16.767"/>
+    </inkml:context>
+    <inkml:brush xml:id="br0">
+      <inkml:brushProperty name="width" value="0.025" units="cm"/>
+      <inkml:brushProperty name="height" value="0.025" units="cm"/>
+    </inkml:brush>
+  </inkml:definitions>
+  <inkml:trace contextRef="#ctx0" brushRef="#br0">1 1 1376 0 0,'7'22'5114'0'0,"8"40"0"0"0,-1 26-969 0 0,-1 1-2952 0 0,-8-75-1191 0 0,-5-13-27 0 0,0-1 1 0 0,0 0-1 0 0,0 0 1 0 0,1 0-1 0 0,-1 0 1 0 0,0 0-1 0 0,0 0 1 0 0,0 0-1 0 0,0 1 1 0 0,0-1-1 0 0,0 0 1 0 0,0 0-1 0 0,1 0 1 0 0,-1 0-1 0 0,0 0 1 0 0,0 0-1 0 0,0 0 1 0 0,0 0-1 0 0,0 0 1 0 0,0 0-1 0 0,1 0 1 0 0,-1 0-1 0 0,0 0 1 0 0,0 0-1 0 0,0 0 1 0 0,0 0-1 0 0,0 0 1 0 0,1 0-1 0 0,-1 0 1 0 0,0 0-1 0 0,0 0 0 0 0,0 0 1 0 0,0 0-1 0 0,0 0 1 0 0,0 0-1 0 0,1 0 1 0 0,-1 0-1 0 0,0-1 1 0 0,0 1-1 0 0,0 0 1 0 0,0 0-1 0 0,0 0 1 0 0,0 0-1 0 0,1 0 1 0 0,0-2-278 0 0,-1 0 1 0 0,1 0-1 0 0,0 1 1 0 0,0-1-1 0 0,-1 0 1 0 0,1 0-1 0 0,-1 0 1 0 0,1 0-1 0 0,-1 0 1 0 0,0 0-1 0 0,0-2 1 0 0,1-23-4535 0 0,0 13 2154 0 0</inkml:trace>
+</inkml:ink>
+</file>
+
+<file path=ppt/ink/ink59.xml><?xml version="1.0" encoding="utf-8"?>
+<inkml:ink xmlns:inkml="http://www.w3.org/2003/InkML">
+  <inkml:definitions>
+    <inkml:context xml:id="ctx0">
+      <inkml:inkSource xml:id="inkSrc0">
+        <inkml:traceFormat>
+          <inkml:channel name="X" type="integer" min="-2.14748E9" max="2.14748E9" units="cm"/>
+          <inkml:channel name="Y" type="integer" min="-2.14748E9" max="2.14748E9" units="cm"/>
+          <inkml:channel name="F" type="integer" max="32767" units="dev"/>
+          <inkml:channel name="OA" type="integer" max="360" units="deg"/>
+          <inkml:channel name="OE" type="integer" max="90" units="deg"/>
+        </inkml:traceFormat>
+        <inkml:channelProperties>
+          <inkml:channelProperty channel="X" name="resolution" value="1000" units="1/cm"/>
+          <inkml:channelProperty channel="Y" name="resolution" value="1000" units="1/cm"/>
+          <inkml:channelProperty channel="F" name="resolution" value="0" units="1/dev"/>
+          <inkml:channelProperty channel="OA" name="resolution" value="1000" units="1/deg"/>
+          <inkml:channelProperty channel="OE" name="resolution" value="1000" units="1/deg"/>
+        </inkml:channelProperties>
+      </inkml:inkSource>
+      <inkml:timestamp xml:id="ts0" timeString="2026-02-12T19:34:17.031"/>
+    </inkml:context>
+    <inkml:brush xml:id="br0">
+      <inkml:brushProperty name="width" value="0.025" units="cm"/>
+      <inkml:brushProperty name="height" value="0.025" units="cm"/>
+    </inkml:brush>
+  </inkml:definitions>
+  <inkml:trace contextRef="#ctx0" brushRef="#br0">9 71 8 0 0,'-3'-14'120'0'0,"-2"-20"46"0"0,6 13 2870 0 0,-1 21-2971 0 0,0 0 0 0 0,0 0 0 0 0,0 0 1 0 0,0 0-1 0 0,0 0 0 0 0,0 0 0 0 0,0 0 0 0 0,0 0 0 0 0,0 0 0 0 0,1 0 0 0 0,-1 0 1 0 0,0 0-1 0 0,0 0 0 0 0,0 0 0 0 0,0 0 0 0 0,0 0 0 0 0,0 0 0 0 0,0 0 0 0 0,0 0 0 0 0,0 0 1 0 0,0 0-1 0 0,0 0 0 0 0,0 0 0 0 0,0 0 0 0 0,0 0 0 0 0,0 0 0 0 0,0 0 0 0 0,1 0 1 0 0,-1 0-1 0 0,0 0 0 0 0,0 0 0 0 0,0 0 0 0 0,0 0 0 0 0,0 0 0 0 0,0 0 0 0 0,0 0 1 0 0,0 0-1 0 0,0 0 0 0 0,0 0 0 0 0,0 0 0 0 0,0 0 0 0 0,0 0 0 0 0,0 0 0 0 0,0 0 1 0 0,0 0-1 0 0,0 0 0 0 0,0 0 0 0 0,0-1 0 0 0,0 1 0 0 0,0 0 0 0 0,1 0 0 0 0,-1 0 0 0 0,0 0 1 0 0,0 0-1 0 0,0 0 0 0 0,0 0 0 0 0,0 0 0 0 0,0 0 0 0 0,0 0 0 0 0,0 0 0 0 0,0 0 1 0 0,0 0-1 0 0,0 0 0 0 0,3 8 1557 0 0,1 11-276 0 0,-3-12-951 0 0,2 20 456 0 0,2 0-1 0 0,1 0 1 0 0,1 0-1 0 0,18 45 1 0 0,-24-69-827 0 0,0-1-1 0 0,1 1 1 0 0,-1-1 0 0 0,1 0 0 0 0,-1 1 0 0 0,1-1-1 0 0,0 0 1 0 0,0 0 0 0 0,0 0 0 0 0,0 0-1 0 0,0-1 1 0 0,1 1 0 0 0,-1 0 0 0 0,0-1 0 0 0,1 0-1 0 0,-1 1 1 0 0,1-1 0 0 0,-1 0 0 0 0,1 0-1 0 0,0-1 1 0 0,0 1 0 0 0,-1 0 0 0 0,1-1-1 0 0,0 0 1 0 0,0 0 0 0 0,-1 0 0 0 0,1 0 0 0 0,0 0-1 0 0,0 0 1 0 0,0-1 0 0 0,-1 1 0 0 0,5-2-1 0 0,-5 1-156 0 0,1 0 0 0 0,-1-1-1 0 0,1 1 1 0 0,-1-1-1 0 0,0 1 1 0 0,0-1-1 0 0,0 0 1 0 0,0 0 0 0 0,0 0-1 0 0,0 0 1 0 0,0 0-1 0 0,0 0 1 0 0,-1 0-1 0 0,1-1 1 0 0,-1 1-1 0 0,0-1 1 0 0,0 1 0 0 0,0-1-1 0 0,0 0 1 0 0,0 1-1 0 0,1-6 1 0 0,0-6-1929 0 0,-1-2-117 0 0</inkml:trace>
+</inkml:ink>
+</file>
+
 <file path=ppt/ink/ink6.xml><?xml version="1.0" encoding="utf-8"?>
 <inkml:ink xmlns:inkml="http://www.w3.org/2003/InkML">
   <inkml:definitions>
@@ -559,6 +1861,316 @@
     </inkml:brush>
   </inkml:definitions>
   <inkml:trace contextRef="#ctx0" brushRef="#br0">50 78 408 0 0,'1'-19'3330'0'0,"-2"34"2218"0"0,-1 2-4801 0 0,0 0-1 0 0,0 0 1 0 0,-2 0 0 0 0,0-1-1 0 0,-7 18 1 0 0,4-14 78 0 0,1 1 1 0 0,-5 33-1 0 0,10-42-271 0 0,6-26-221 0 0,3-10-268 0 0,10-9-69 0 0,44-60 0 0 0,-52 80-11 0 0,1 1 0 0 0,0 0 0 0 0,0 1 1 0 0,1 0-1 0 0,0 1 0 0 0,1 1 0 0 0,19-11 1 0 0,-31 18 13 0 0,1 1 1 0 0,-1 1 0 0 0,1-1 0 0 0,-1 0 0 0 0,1 0-1 0 0,0 0 1 0 0,-1 1 0 0 0,1-1 0 0 0,0 1 0 0 0,-1 0 0 0 0,1-1-1 0 0,0 1 1 0 0,0 0 0 0 0,0 0 0 0 0,-1 0 0 0 0,1 0-1 0 0,0 0 1 0 0,0 0 0 0 0,-1 1 0 0 0,1-1 0 0 0,0 1-1 0 0,0-1 1 0 0,2 2 0 0 0,-3 0 2 0 0,1-1 1 0 0,-1 1-1 0 0,0-1 0 0 0,0 1 0 0 0,0 0 1 0 0,0-1-1 0 0,0 1 0 0 0,0 0 0 0 0,-1 0 1 0 0,1 0-1 0 0,0 0 0 0 0,-1 0 0 0 0,0 0 1 0 0,1 0-1 0 0,-1 0 0 0 0,0 0 0 0 0,0 0 1 0 0,0 0-1 0 0,0 0 0 0 0,-1 3 0 0 0,-18 94 857 0 0,17-54-215 0 0,24-76-350 0 0,-12 11-325 0 0,0 1 0 0 0,2 0 0 0 0,1 0 0 0 0,0 1 0 0 0,16-17 0 0 0,-27 33 40 0 0,32-33-22 0 0,-32 33 10 0 0,0 0 1 0 0,0 0-1 0 0,1 0 0 0 0,-1 0 0 0 0,1 1 1 0 0,-1-1-1 0 0,1 1 0 0 0,-1 0 0 0 0,1 0 1 0 0,0 0-1 0 0,0 0 0 0 0,-1 0 0 0 0,7 0 1 0 0,-9 1 3 0 0,1 0 0 0 0,-1 0 0 0 0,1 1-1 0 0,-1-1 1 0 0,0 0 0 0 0,1 0 0 0 0,-1 0 0 0 0,1 1 0 0 0,-1-1 0 0 0,1 0 0 0 0,-1 0 0 0 0,0 1 0 0 0,1-1 0 0 0,-1 0 0 0 0,0 1 0 0 0,1-1 0 0 0,-1 1 0 0 0,0-1 0 0 0,1 0 0 0 0,-1 1 0 0 0,0-1 0 0 0,0 1 0 0 0,1-1 0 0 0,-1 1-1 0 0,0-1 1 0 0,0 1 0 0 0,0-1 0 0 0,0 0 0 0 0,0 1 0 0 0,0-1 0 0 0,0 1 0 0 0,0-1 0 0 0,0 1 0 0 0,0-1 0 0 0,0 1 0 0 0,0-1 0 0 0,0 1 0 0 0,0 0 0 0 0,-5 23 108 0 0,4-20-114 0 0,-8 33 117 0 0,3-18-93 0 0,2 1 1 0 0,0-1-1 0 0,-2 37 0 0 0,6-55-86 0 0,0-1 0 0 0,0 1-1 0 0,0-1 1 0 0,-1 1 0 0 0,1-1-1 0 0,0 1 1 0 0,0-1 0 0 0,0 1-1 0 0,0-1 1 0 0,0 1-1 0 0,0-1 1 0 0,1 1 0 0 0,-1-1-1 0 0,0 0 1 0 0,0 1 0 0 0,0-1-1 0 0,0 1 1 0 0,1-1 0 0 0,-1 1-1 0 0,0-1 1 0 0,0 1 0 0 0,1-1-1 0 0,-1 0 1 0 0,0 1 0 0 0,0-1-1 0 0,1 0 1 0 0,-1 1-1 0 0,1-1 1 0 0,-1 0 0 0 0,0 1-1 0 0,1-1 1 0 0,-1 0 0 0 0,1 0-1 0 0,-1 1 1 0 0,1-1 0 0 0,-1 0-1 0 0,0 0 1 0 0,1 0 0 0 0,-1 0-1 0 0,1 0 1 0 0,-1 0-1 0 0,1 0 1 0 0,-1 0 0 0 0,1 0-1 0 0,-1 0 1 0 0,1 0 0 0 0,-1 0-1 0 0,1 0 1 0 0,-1 0 0 0 0,1 0-1 0 0,-1 0 1 0 0,1 0 0 0 0,-1 0-1 0 0,1-1 1 0 0,-1 1-1 0 0,3-2-767 0 0,0 1 0 0 0,0-1-1 0 0,-1 1 1 0 0,1-1-1 0 0,-1 0 1 0 0,1 0-1 0 0,2-3 1 0 0,2-3-1598 0 0</inkml:trace>
+</inkml:ink>
+</file>
+
+<file path=ppt/ink/ink60.xml><?xml version="1.0" encoding="utf-8"?>
+<inkml:ink xmlns:inkml="http://www.w3.org/2003/InkML">
+  <inkml:definitions>
+    <inkml:context xml:id="ctx0">
+      <inkml:inkSource xml:id="inkSrc0">
+        <inkml:traceFormat>
+          <inkml:channel name="X" type="integer" min="-2.14748E9" max="2.14748E9" units="cm"/>
+          <inkml:channel name="Y" type="integer" min="-2.14748E9" max="2.14748E9" units="cm"/>
+          <inkml:channel name="F" type="integer" max="32767" units="dev"/>
+          <inkml:channel name="OA" type="integer" max="360" units="deg"/>
+          <inkml:channel name="OE" type="integer" max="90" units="deg"/>
+        </inkml:traceFormat>
+        <inkml:channelProperties>
+          <inkml:channelProperty channel="X" name="resolution" value="1000" units="1/cm"/>
+          <inkml:channelProperty channel="Y" name="resolution" value="1000" units="1/cm"/>
+          <inkml:channelProperty channel="F" name="resolution" value="0" units="1/dev"/>
+          <inkml:channelProperty channel="OA" name="resolution" value="1000" units="1/deg"/>
+          <inkml:channelProperty channel="OE" name="resolution" value="1000" units="1/deg"/>
+        </inkml:channelProperties>
+      </inkml:inkSource>
+      <inkml:timestamp xml:id="ts0" timeString="2026-02-12T19:34:17.230"/>
+    </inkml:context>
+    <inkml:brush xml:id="br0">
+      <inkml:brushProperty name="width" value="0.025" units="cm"/>
+      <inkml:brushProperty name="height" value="0.025" units="cm"/>
+    </inkml:brush>
+  </inkml:definitions>
+  <inkml:trace contextRef="#ctx0" brushRef="#br0">0 1 296 0 0,'4'55'8963'0'0,"-2"0"-4592"0"0,51 260-46 0 0,-50-295-4273 0 0,11 61 30 0 0,-11-72-146 0 0,-1-1-1 0 0,1 0 1 0 0,0 0 0 0 0,1 0-1 0 0,0 0 1 0 0,0 0 0 0 0,6 8-1 0 0,-10-16-23 0 0,1 0 0 0 0,-1 1-1 0 0,0-1 1 0 0,1 1-1 0 0,-1-1 1 0 0,0 0-1 0 0,1 1 1 0 0,-1-1 0 0 0,0 1-1 0 0,1-1 1 0 0,-1 0-1 0 0,1 0 1 0 0,-1 1-1 0 0,0-1 1 0 0,1 0-1 0 0,-1 0 1 0 0,1 1 0 0 0,-1-1-1 0 0,1 0 1 0 0,-1 0-1 0 0,1 0 1 0 0,-1 0-1 0 0,1 0 1 0 0,-1 0 0 0 0,1 0-1 0 0,-1 0 1 0 0,1 0-1 0 0,-1 0 1 0 0,1 0-1 0 0,-1 0 1 0 0,1 0 0 0 0,-1 0-1 0 0,2-1 1 0 0,-1 0-421 0 0,0 1 0 0 0,0-1 0 0 0,-1 0 1 0 0,1 0-1 0 0,0 0 0 0 0,0 0 0 0 0,0 0 1 0 0,-1 0-1 0 0,1 0 0 0 0,0 0 0 0 0,-1 0 0 0 0,1-2 1 0 0,4-6-1885 0 0</inkml:trace>
+</inkml:ink>
+</file>
+
+<file path=ppt/ink/ink61.xml><?xml version="1.0" encoding="utf-8"?>
+<inkml:ink xmlns:inkml="http://www.w3.org/2003/InkML">
+  <inkml:definitions>
+    <inkml:context xml:id="ctx0">
+      <inkml:inkSource xml:id="inkSrc0">
+        <inkml:traceFormat>
+          <inkml:channel name="X" type="integer" min="-2.14748E9" max="2.14748E9" units="cm"/>
+          <inkml:channel name="Y" type="integer" min="-2.14748E9" max="2.14748E9" units="cm"/>
+          <inkml:channel name="F" type="integer" max="32767" units="dev"/>
+          <inkml:channel name="OA" type="integer" max="360" units="deg"/>
+          <inkml:channel name="OE" type="integer" max="90" units="deg"/>
+        </inkml:traceFormat>
+        <inkml:channelProperties>
+          <inkml:channelProperty channel="X" name="resolution" value="1000" units="1/cm"/>
+          <inkml:channelProperty channel="Y" name="resolution" value="1000" units="1/cm"/>
+          <inkml:channelProperty channel="F" name="resolution" value="0" units="1/dev"/>
+          <inkml:channelProperty channel="OA" name="resolution" value="1000" units="1/deg"/>
+          <inkml:channelProperty channel="OE" name="resolution" value="1000" units="1/deg"/>
+        </inkml:channelProperties>
+      </inkml:inkSource>
+      <inkml:timestamp xml:id="ts0" timeString="2026-02-12T19:34:17.527"/>
+    </inkml:context>
+    <inkml:brush xml:id="br0">
+      <inkml:brushProperty name="width" value="0.025" units="cm"/>
+      <inkml:brushProperty name="height" value="0.025" units="cm"/>
+    </inkml:brush>
+  </inkml:definitions>
+  <inkml:trace contextRef="#ctx0" brushRef="#br0">10 1 464 0 0,'4'16'2220'0'0,"-1"0"-1"0"0,0 1 0 0 0,1 29 1 0 0,4 24 52 0 0,-4-51-1828 0 0,0-1 0 0 0,11 27-1 0 0,-14-41-367 0 0,1 0 0 0 0,0 1 0 0 0,0-1-1 0 0,1 0 1 0 0,-1 0 0 0 0,1 0 0 0 0,0-1-1 0 0,0 1 1 0 0,0-1 0 0 0,0 1 0 0 0,0-1 0 0 0,1 0-1 0 0,0 0 1 0 0,0-1 0 0 0,7 5 0 0 0,-9-6-38 0 0,-1-1 0 0 0,1 0 1 0 0,-1 0-1 0 0,1 1 0 0 0,-1-1 0 0 0,1 0 1 0 0,-1 0-1 0 0,1 0 0 0 0,-1-1 0 0 0,1 1 1 0 0,-1 0-1 0 0,1-1 0 0 0,-1 1 1 0 0,1 0-1 0 0,-1-1 0 0 0,1 0 0 0 0,-1 1 1 0 0,0-1-1 0 0,1 0 0 0 0,-1 0 0 0 0,0 0 1 0 0,0 0-1 0 0,0 0 0 0 0,0 0 1 0 0,1 0-1 0 0,-1 0 0 0 0,-1 0 0 0 0,1 0 1 0 0,0-1-1 0 0,0 1 0 0 0,0 0 0 0 0,-1-1 1 0 0,2-2-1 0 0,1-2 91 0 0,0 0 0 0 0,0-1 0 0 0,-1 1-1 0 0,0-1 1 0 0,-1 1 0 0 0,2-10 0 0 0,-2 11-24 0 0,-1 0 0 0 0,1-1 0 0 0,-1 1 0 0 0,-1 0 0 0 0,1 0 0 0 0,-1-1 0 0 0,0 1 0 0 0,0 0 0 0 0,0 0 1 0 0,-1 0-1 0 0,0 0 0 0 0,0 0 0 0 0,0 0 0 0 0,-5-7 0 0 0,1 4-39 0 0,0 1-1 0 0,-1 0 1 0 0,1 0 0 0 0,-2 1-1 0 0,1 0 1 0 0,-1 0 0 0 0,-9-6 0 0 0,-62-46-2334 0 0,73 52-131 0 0</inkml:trace>
+</inkml:ink>
+</file>
+
+<file path=ppt/ink/ink62.xml><?xml version="1.0" encoding="utf-8"?>
+<inkml:ink xmlns:inkml="http://www.w3.org/2003/InkML">
+  <inkml:definitions>
+    <inkml:context xml:id="ctx0">
+      <inkml:inkSource xml:id="inkSrc0">
+        <inkml:traceFormat>
+          <inkml:channel name="X" type="integer" min="-2.14748E9" max="2.14748E9" units="cm"/>
+          <inkml:channel name="Y" type="integer" min="-2.14748E9" max="2.14748E9" units="cm"/>
+          <inkml:channel name="F" type="integer" max="32767" units="dev"/>
+          <inkml:channel name="OA" type="integer" max="360" units="deg"/>
+          <inkml:channel name="OE" type="integer" max="90" units="deg"/>
+        </inkml:traceFormat>
+        <inkml:channelProperties>
+          <inkml:channelProperty channel="X" name="resolution" value="1000" units="1/cm"/>
+          <inkml:channelProperty channel="Y" name="resolution" value="1000" units="1/cm"/>
+          <inkml:channelProperty channel="F" name="resolution" value="0" units="1/dev"/>
+          <inkml:channelProperty channel="OA" name="resolution" value="1000" units="1/deg"/>
+          <inkml:channelProperty channel="OE" name="resolution" value="1000" units="1/deg"/>
+        </inkml:channelProperties>
+      </inkml:inkSource>
+      <inkml:timestamp xml:id="ts0" timeString="2026-02-12T19:34:18.062"/>
+    </inkml:context>
+    <inkml:brush xml:id="br0">
+      <inkml:brushProperty name="width" value="0.025" units="cm"/>
+      <inkml:brushProperty name="height" value="0.025" units="cm"/>
+    </inkml:brush>
+  </inkml:definitions>
+  <inkml:trace contextRef="#ctx0" brushRef="#br0">3 1 176 0 0,'-3'-1'3078'0'0,"5"6"-443"0"0,3 7 311 0 0,10 9-1632 0 0,76 115 2771 0 0,-80-116-3914 0 0,-1 1 0 0 0,0 0 0 0 0,-2 1 0 0 0,0 0-1 0 0,5 24 1 0 0,-5-6 8 0 0,6 73-1 0 0,-13-98-221 0 0,-1 1 0 0 0,0-1 0 0 0,-1 0 0 0 0,-1 0 0 0 0,-1 0 0 0 0,0 0 0 0 0,0-1 0 0 0,-8 18 0 0 0,7-17-308 0 0,3-13-160 0 0,1 0 0 0 0,-1 1 0 0 0,0-1-1 0 0,1 0 1 0 0,-1 1 0 0 0,0-1 0 0 0,0 0 0 0 0,-1 0-1 0 0,-1 4 1 0 0,-1-4-1021 0 0</inkml:trace>
+</inkml:ink>
+</file>
+
+<file path=ppt/ink/ink63.xml><?xml version="1.0" encoding="utf-8"?>
+<inkml:ink xmlns:inkml="http://www.w3.org/2003/InkML">
+  <inkml:definitions>
+    <inkml:context xml:id="ctx0">
+      <inkml:inkSource xml:id="inkSrc0">
+        <inkml:traceFormat>
+          <inkml:channel name="X" type="integer" min="-2.14748E9" max="2.14748E9" units="cm"/>
+          <inkml:channel name="Y" type="integer" min="-2.14748E9" max="2.14748E9" units="cm"/>
+          <inkml:channel name="F" type="integer" max="32767" units="dev"/>
+          <inkml:channel name="OA" type="integer" max="360" units="deg"/>
+          <inkml:channel name="OE" type="integer" max="90" units="deg"/>
+        </inkml:traceFormat>
+        <inkml:channelProperties>
+          <inkml:channelProperty channel="X" name="resolution" value="1000" units="1/cm"/>
+          <inkml:channelProperty channel="Y" name="resolution" value="1000" units="1/cm"/>
+          <inkml:channelProperty channel="F" name="resolution" value="0" units="1/dev"/>
+          <inkml:channelProperty channel="OA" name="resolution" value="1000" units="1/deg"/>
+          <inkml:channelProperty channel="OE" name="resolution" value="1000" units="1/deg"/>
+        </inkml:channelProperties>
+      </inkml:inkSource>
+      <inkml:timestamp xml:id="ts0" timeString="2026-02-12T19:34:18.661"/>
+    </inkml:context>
+    <inkml:brush xml:id="br0">
+      <inkml:brushProperty name="width" value="0.025" units="cm"/>
+      <inkml:brushProperty name="height" value="0.025" units="cm"/>
+    </inkml:brush>
+  </inkml:definitions>
+  <inkml:trace contextRef="#ctx0" brushRef="#br0">5 9 8 0 0,'-4'-8'5778'0'0,"8"20"-2118"0"0,2 6-2242 0 0,14 89 866 0 0,-5-23-2097 0 0,32 107 1 0 0,-45-186-1313 0 0,-2-8-2082 0 0,0-4 7 0 0,0 1 386 0 0</inkml:trace>
+</inkml:ink>
+</file>
+
+<file path=ppt/ink/ink64.xml><?xml version="1.0" encoding="utf-8"?>
+<inkml:ink xmlns:inkml="http://www.w3.org/2003/InkML">
+  <inkml:definitions>
+    <inkml:context xml:id="ctx0">
+      <inkml:inkSource xml:id="inkSrc0">
+        <inkml:traceFormat>
+          <inkml:channel name="X" type="integer" min="-2.14748E9" max="2.14748E9" units="cm"/>
+          <inkml:channel name="Y" type="integer" min="-2.14748E9" max="2.14748E9" units="cm"/>
+          <inkml:channel name="F" type="integer" max="32767" units="dev"/>
+          <inkml:channel name="OA" type="integer" max="360" units="deg"/>
+          <inkml:channel name="OE" type="integer" max="90" units="deg"/>
+        </inkml:traceFormat>
+        <inkml:channelProperties>
+          <inkml:channelProperty channel="X" name="resolution" value="1000" units="1/cm"/>
+          <inkml:channelProperty channel="Y" name="resolution" value="1000" units="1/cm"/>
+          <inkml:channelProperty channel="F" name="resolution" value="0" units="1/dev"/>
+          <inkml:channelProperty channel="OA" name="resolution" value="1000" units="1/deg"/>
+          <inkml:channelProperty channel="OE" name="resolution" value="1000" units="1/deg"/>
+        </inkml:channelProperties>
+      </inkml:inkSource>
+      <inkml:timestamp xml:id="ts0" timeString="2026-02-12T19:34:18.906"/>
+    </inkml:context>
+    <inkml:brush xml:id="br0">
+      <inkml:brushProperty name="width" value="0.025" units="cm"/>
+      <inkml:brushProperty name="height" value="0.025" units="cm"/>
+    </inkml:brush>
+  </inkml:definitions>
+  <inkml:trace contextRef="#ctx0" brushRef="#br0">0 11 8 0 0,'1'-1'330'0'0,"0"0"0"0"0,0 0 0 0 0,-1 1 0 0 0,1-1 0 0 0,0 0 0 0 0,0 0 0 0 0,0 1 1 0 0,0-1-1 0 0,0 1 0 0 0,0-1 0 0 0,0 1 0 0 0,0-1 0 0 0,0 1 0 0 0,0 0 0 0 0,0 0 0 0 0,0-1 0 0 0,0 1 0 0 0,0 0 0 0 0,0 0 0 0 0,0 0 0 0 0,0 0 0 0 0,0 0 1 0 0,1 0-1 0 0,-1 0 0 0 0,0 1 0 0 0,0-1 0 0 0,2 1 0 0 0,30 8 2468 0 0,-25-6-2328 0 0,5 2 161 0 0,1 0 0 0 0,-1 2-1 0 0,0 0 1 0 0,16 11 0 0 0,-25-16-593 0 0,-1 1-1 0 0,0 0 1 0 0,0 0-1 0 0,0 0 0 0 0,0 0 1 0 0,-1 0-1 0 0,0 0 1 0 0,1 1-1 0 0,-1 0 0 0 0,0-1 1 0 0,0 1-1 0 0,-1 0 1 0 0,1 0-1 0 0,-1 0 1 0 0,0 0-1 0 0,0 0 0 0 0,0 0 1 0 0,-1 0-1 0 0,1 0 1 0 0,-1 5-1 0 0,0-1-30 0 0,-1 1 1 0 0,0-1-1 0 0,0 0 0 0 0,0 1 0 0 0,-1-1 1 0 0,-1 0-1 0 0,-5 13 0 0 0,7-17-98 0 0,-1 0 0 0 0,0 0-1 0 0,-1 0 1 0 0,1 0 0 0 0,-1-1 0 0 0,1 1-1 0 0,-1-1 1 0 0,0 0 0 0 0,-1 0-1 0 0,1 0 1 0 0,0 0 0 0 0,-1 0 0 0 0,0-1-1 0 0,1 0 1 0 0,-1 1 0 0 0,-6 1 0 0 0,-3-5-2844 0 0,13 1 2793 0 0,0 0 1 0 0,0 0-1 0 0,0 0 1 0 0,-1 0-1 0 0,1 0 0 0 0,0 0 1 0 0,0-1-1 0 0,0 1 1 0 0,0 0-1 0 0,-1 0 0 0 0,1 0 1 0 0,0 0-1 0 0,0 0 1 0 0,0 0-1 0 0,0 0 1 0 0,0 0-1 0 0,0 0 0 0 0,-1-1 1 0 0,1 1-1 0 0,0 0 1 0 0,0 0-1 0 0,0 0 0 0 0,0 0 1 0 0,0 0-1 0 0,0-1 1 0 0,0 1-1 0 0,0 0 1 0 0,0 0-1 0 0,0 0 0 0 0,0 0 1 0 0,0-1-1 0 0,0 1 1 0 0,0 0-1 0 0,0 0 0 0 0,0 0 1 0 0,0 0-1 0 0,0-1 1 0 0,0 1-1 0 0</inkml:trace>
+</inkml:ink>
+</file>
+
+<file path=ppt/ink/ink65.xml><?xml version="1.0" encoding="utf-8"?>
+<inkml:ink xmlns:inkml="http://www.w3.org/2003/InkML">
+  <inkml:definitions>
+    <inkml:context xml:id="ctx0">
+      <inkml:inkSource xml:id="inkSrc0">
+        <inkml:traceFormat>
+          <inkml:channel name="X" type="integer" min="-2.14748E9" max="2.14748E9" units="cm"/>
+          <inkml:channel name="Y" type="integer" min="-2.14748E9" max="2.14748E9" units="cm"/>
+          <inkml:channel name="F" type="integer" max="32767" units="dev"/>
+          <inkml:channel name="OA" type="integer" max="360" units="deg"/>
+          <inkml:channel name="OE" type="integer" max="90" units="deg"/>
+        </inkml:traceFormat>
+        <inkml:channelProperties>
+          <inkml:channelProperty channel="X" name="resolution" value="1000" units="1/cm"/>
+          <inkml:channelProperty channel="Y" name="resolution" value="1000" units="1/cm"/>
+          <inkml:channelProperty channel="F" name="resolution" value="0" units="1/dev"/>
+          <inkml:channelProperty channel="OA" name="resolution" value="1000" units="1/deg"/>
+          <inkml:channelProperty channel="OE" name="resolution" value="1000" units="1/deg"/>
+        </inkml:channelProperties>
+      </inkml:inkSource>
+      <inkml:timestamp xml:id="ts0" timeString="2026-02-12T19:34:19.187"/>
+    </inkml:context>
+    <inkml:brush xml:id="br0">
+      <inkml:brushProperty name="width" value="0.025" units="cm"/>
+      <inkml:brushProperty name="height" value="0.025" units="cm"/>
+    </inkml:brush>
+  </inkml:definitions>
+  <inkml:trace contextRef="#ctx0" brushRef="#br0">0 55 8 0 0,'1'0'334'0'0,"0"0"1"0"0,0 1-1 0 0,0-1 0 0 0,0 0 0 0 0,0 0 1 0 0,0 1-1 0 0,0-1 0 0 0,0 0 0 0 0,0 1 1 0 0,0-1-1 0 0,-1 1 0 0 0,1 0 0 0 0,0-1 1 0 0,0 1-1 0 0,0-1 0 0 0,-1 1 0 0 0,1 0 1 0 0,0 0-1 0 0,-1 0 0 0 0,1-1 0 0 0,0 3 1 0 0,16 20 1729 0 0,-9 0-1180 0 0,-1 0-1 0 0,-2 0 1 0 0,5 32 0 0 0,-6-25 90 0 0,11 36 0 0 0,-15-65-958 0 0,0-1 0 0 0,0 0 0 0 0,0 0 0 0 0,0 0 0 0 0,0 0 0 0 0,0 1 0 0 0,0-1 0 0 0,0 0 0 0 0,0 0 0 0 0,0 0 1 0 0,0 1-1 0 0,0-1 0 0 0,0 0 0 0 0,0 0 0 0 0,0 0 0 0 0,0 0 0 0 0,1 1 0 0 0,-1-1 0 0 0,0 0 0 0 0,0 0 0 0 0,0 0 1 0 0,0 0-1 0 0,0 0 0 0 0,0 1 0 0 0,0-1 0 0 0,1 0 0 0 0,-1 0 0 0 0,0 0 0 0 0,0 0 0 0 0,0 0 0 0 0,0 0 1 0 0,0 0-1 0 0,1 1 0 0 0,-1-1 0 0 0,0 0 0 0 0,0 0 0 0 0,0 0 0 0 0,1 0 0 0 0,-1 0 0 0 0,0 0 0 0 0,0 0 0 0 0,0 0 1 0 0,0 0-1 0 0,1 0 0 0 0,-1 0 0 0 0,0 0 0 0 0,0 0 0 0 0,0 0 0 0 0,0 0 0 0 0,1 0 0 0 0,-1 0 0 0 0,0-1 0 0 0,0 1 1 0 0,0 0-1 0 0,1 0 0 0 0,6-13 446 0 0,3-22-38 0 0,28-167-941 0 0,-26 169-2154 0 0,-10 29 1504 0 0,0 0 1 0 0,0 0-1 0 0,1 0 1 0 0,0 0 0 0 0,4-4-1 0 0,-1 3-357 0 0</inkml:trace>
+</inkml:ink>
+</file>
+
+<file path=ppt/ink/ink66.xml><?xml version="1.0" encoding="utf-8"?>
+<inkml:ink xmlns:inkml="http://www.w3.org/2003/InkML">
+  <inkml:definitions>
+    <inkml:context xml:id="ctx0">
+      <inkml:inkSource xml:id="inkSrc0">
+        <inkml:traceFormat>
+          <inkml:channel name="X" type="integer" min="-2.14748E9" max="2.14748E9" units="cm"/>
+          <inkml:channel name="Y" type="integer" min="-2.14748E9" max="2.14748E9" units="cm"/>
+          <inkml:channel name="F" type="integer" max="32767" units="dev"/>
+          <inkml:channel name="OA" type="integer" max="360" units="deg"/>
+          <inkml:channel name="OE" type="integer" max="90" units="deg"/>
+        </inkml:traceFormat>
+        <inkml:channelProperties>
+          <inkml:channelProperty channel="X" name="resolution" value="1000" units="1/cm"/>
+          <inkml:channelProperty channel="Y" name="resolution" value="1000" units="1/cm"/>
+          <inkml:channelProperty channel="F" name="resolution" value="0" units="1/dev"/>
+          <inkml:channelProperty channel="OA" name="resolution" value="1000" units="1/deg"/>
+          <inkml:channelProperty channel="OE" name="resolution" value="1000" units="1/deg"/>
+        </inkml:channelProperties>
+      </inkml:inkSource>
+      <inkml:timestamp xml:id="ts0" timeString="2026-02-12T19:34:19.356"/>
+    </inkml:context>
+    <inkml:brush xml:id="br0">
+      <inkml:brushProperty name="width" value="0.025" units="cm"/>
+      <inkml:brushProperty name="height" value="0.025" units="cm"/>
+    </inkml:brush>
+  </inkml:definitions>
+  <inkml:trace contextRef="#ctx0" brushRef="#br0">0 0 984 0 0,'5'25'4472'0'0,"3"46"0"0"0,-7-3-3003 0 0,5-128-7517 0 0,-5 46 4364 0 0</inkml:trace>
+</inkml:ink>
+</file>
+
+<file path=ppt/ink/ink67.xml><?xml version="1.0" encoding="utf-8"?>
+<inkml:ink xmlns:inkml="http://www.w3.org/2003/InkML">
+  <inkml:definitions>
+    <inkml:context xml:id="ctx0">
+      <inkml:inkSource xml:id="inkSrc0">
+        <inkml:traceFormat>
+          <inkml:channel name="X" type="integer" min="-2.14748E9" max="2.14748E9" units="cm"/>
+          <inkml:channel name="Y" type="integer" min="-2.14748E9" max="2.14748E9" units="cm"/>
+          <inkml:channel name="F" type="integer" max="32767" units="dev"/>
+          <inkml:channel name="OA" type="integer" max="360" units="deg"/>
+          <inkml:channel name="OE" type="integer" max="90" units="deg"/>
+        </inkml:traceFormat>
+        <inkml:channelProperties>
+          <inkml:channelProperty channel="X" name="resolution" value="1000" units="1/cm"/>
+          <inkml:channelProperty channel="Y" name="resolution" value="1000" units="1/cm"/>
+          <inkml:channelProperty channel="F" name="resolution" value="0" units="1/dev"/>
+          <inkml:channelProperty channel="OA" name="resolution" value="1000" units="1/deg"/>
+          <inkml:channelProperty channel="OE" name="resolution" value="1000" units="1/deg"/>
+        </inkml:channelProperties>
+      </inkml:inkSource>
+      <inkml:timestamp xml:id="ts0" timeString="2026-02-12T19:34:19.471"/>
+    </inkml:context>
+    <inkml:brush xml:id="br0">
+      <inkml:brushProperty name="width" value="0.025" units="cm"/>
+      <inkml:brushProperty name="height" value="0.025" units="cm"/>
+    </inkml:brush>
+  </inkml:definitions>
+  <inkml:trace contextRef="#ctx0" brushRef="#br0">68 148 8 0 0,'-2'-10'163'0'0,"0"1"1"0"0,-2-1-1 0 0,-6-14 1 0 0,-16-25 4218 0 0,2 7 727 0 0,24 42-5106 0 0,1 0 1 0 0,-1 0-1 0 0,0 0 0 0 0,0 0 1 0 0,0 0-1 0 0,0 0 0 0 0,0 0 1 0 0,0 0-1 0 0,1 0 0 0 0,-1 0 1 0 0,0 0-1 0 0,0 0 0 0 0,0 0 1 0 0,0 0-1 0 0,0 0 0 0 0,0 0 1 0 0,1 0-1 0 0,-1 0 0 0 0,0 0 1 0 0,0 0-1 0 0,0 0 0 0 0,0 0 1 0 0,0 0-1 0 0,0-1 0 0 0,0 1 1 0 0,1 0-1 0 0,-1 0 0 0 0,0 0 1 0 0,0 0-1 0 0,0 0 0 0 0,0 0 1 0 0,0 0-1 0 0,0 0 0 0 0,0 0 1 0 0,0-1-1 0 0,0 1 0 0 0,0 0 1 0 0,0 0-1 0 0,1 0 0 0 0,-1 0 1 0 0,0 0-1 0 0,0 0 0 0 0,0-1 1 0 0,0 1-1 0 0,0 0 0 0 0,0 0 1 0 0,0 0-1 0 0,0 0 0 0 0,13 9-2614 0 0,-12-8 2170 0 0,5 4-1198 0 0</inkml:trace>
+</inkml:ink>
+</file>
+
+<file path=ppt/ink/ink68.xml><?xml version="1.0" encoding="utf-8"?>
+<inkml:ink xmlns:inkml="http://www.w3.org/2003/InkML">
+  <inkml:definitions>
+    <inkml:context xml:id="ctx0">
+      <inkml:inkSource xml:id="inkSrc0">
+        <inkml:traceFormat>
+          <inkml:channel name="X" type="integer" min="-2.14748E9" max="2.14748E9" units="cm"/>
+          <inkml:channel name="Y" type="integer" min="-2.14748E9" max="2.14748E9" units="cm"/>
+          <inkml:channel name="F" type="integer" max="32767" units="dev"/>
+          <inkml:channel name="OA" type="integer" max="360" units="deg"/>
+          <inkml:channel name="OE" type="integer" max="90" units="deg"/>
+        </inkml:traceFormat>
+        <inkml:channelProperties>
+          <inkml:channelProperty channel="X" name="resolution" value="1000" units="1/cm"/>
+          <inkml:channelProperty channel="Y" name="resolution" value="1000" units="1/cm"/>
+          <inkml:channelProperty channel="F" name="resolution" value="0" units="1/dev"/>
+          <inkml:channelProperty channel="OA" name="resolution" value="1000" units="1/deg"/>
+          <inkml:channelProperty channel="OE" name="resolution" value="1000" units="1/deg"/>
+        </inkml:channelProperties>
+      </inkml:inkSource>
+      <inkml:timestamp xml:id="ts0" timeString="2026-02-12T19:34:19.753"/>
+    </inkml:context>
+    <inkml:brush xml:id="br0">
+      <inkml:brushProperty name="width" value="0.025" units="cm"/>
+      <inkml:brushProperty name="height" value="0.025" units="cm"/>
+    </inkml:brush>
+  </inkml:definitions>
+  <inkml:trace contextRef="#ctx0" brushRef="#br0">23 50 208 0 0,'-4'9'1509'0'0,"1"1"1"0"0,-1-1-1 0 0,1 1 1 0 0,1 0-1 0 0,-2 12 0 0 0,2-10-1127 0 0,1-1-1 0 0,1 1 1 0 0,0-1-1 0 0,1 1 1 0 0,0-1-1 0 0,0 1 1 0 0,6 19-1 0 0,-7-30-332 0 0,0 1 0 0 0,1-1 0 0 0,-1 0 1 0 0,0 0-1 0 0,1 1 0 0 0,-1-1 0 0 0,1 0 0 0 0,-1 0 0 0 0,1 0 1 0 0,-1 0-1 0 0,1 0 0 0 0,0 0 0 0 0,0 0 0 0 0,-1 0 0 0 0,1 0 1 0 0,0 0-1 0 0,0 0 0 0 0,0 0 0 0 0,0-1 0 0 0,0 1 0 0 0,0 0 1 0 0,0-1-1 0 0,0 1 0 0 0,0 0 0 0 0,1-1 0 0 0,-1 0 0 0 0,0 1 1 0 0,0-1-1 0 0,0 0 0 0 0,1 1 0 0 0,-1-1 0 0 0,0 0 0 0 0,0 0 1 0 0,1 0-1 0 0,-1 0 0 0 0,0 0 0 0 0,0 0 0 0 0,1-1 0 0 0,-1 1 1 0 0,0 0-1 0 0,0-1 0 0 0,0 1 0 0 0,2-1 0 0 0,0-1 57 0 0,-1 1-1 0 0,1-1 0 0 0,0 0 1 0 0,-1 0-1 0 0,1 0 0 0 0,-1-1 1 0 0,1 1-1 0 0,-1-1 0 0 0,0 1 1 0 0,0-1-1 0 0,0 0 0 0 0,-1 1 1 0 0,1-1-1 0 0,0 0 0 0 0,1-5 1 0 0,-1 1-31 0 0,-1 1 0 0 0,1-1 0 0 0,-1 0 0 0 0,0 1-1 0 0,-1-1 1 0 0,0 0 0 0 0,0 0 0 0 0,0 0 0 0 0,-1 0 0 0 0,0 1 0 0 0,-3-12 0 0 0,-1 2-392 0 0,-1 0 1 0 0,-1 0 0 0 0,-13-21-1 0 0,19 35 0 0 0,0 1 0 0 0,1-1 0 0 0,-1 0 0 0 0,1 0 0 0 0,-1 1-1 0 0,1-1 1 0 0,-1 0 0 0 0,1 0 0 0 0,0 0 0 0 0,0-2 0 0 0,0 4-144 0 0,0-1-1 0 0,0 0 1 0 0,0 1 0 0 0,0-1-1 0 0,1 0 1 0 0,-1 0 0 0 0,0 1-1 0 0,0-1 1 0 0,1 0 0 0 0,-1 1-1 0 0,0-1 1 0 0,1 0 0 0 0,-1 1-1 0 0,0-1 1 0 0,1 1 0 0 0,-1-1 0 0 0,1 0-1 0 0,2-1-1031 0 0</inkml:trace>
+</inkml:ink>
+</file>
+
+<file path=ppt/ink/ink69.xml><?xml version="1.0" encoding="utf-8"?>
+<inkml:ink xmlns:inkml="http://www.w3.org/2003/InkML">
+  <inkml:definitions>
+    <inkml:context xml:id="ctx0">
+      <inkml:inkSource xml:id="inkSrc0">
+        <inkml:traceFormat>
+          <inkml:channel name="X" type="integer" min="-2.14748E9" max="2.14748E9" units="cm"/>
+          <inkml:channel name="Y" type="integer" min="-2.14748E9" max="2.14748E9" units="cm"/>
+          <inkml:channel name="F" type="integer" max="32767" units="dev"/>
+          <inkml:channel name="OA" type="integer" max="360" units="deg"/>
+          <inkml:channel name="OE" type="integer" max="90" units="deg"/>
+        </inkml:traceFormat>
+        <inkml:channelProperties>
+          <inkml:channelProperty channel="X" name="resolution" value="1000" units="1/cm"/>
+          <inkml:channelProperty channel="Y" name="resolution" value="1000" units="1/cm"/>
+          <inkml:channelProperty channel="F" name="resolution" value="0" units="1/dev"/>
+          <inkml:channelProperty channel="OA" name="resolution" value="1000" units="1/deg"/>
+          <inkml:channelProperty channel="OE" name="resolution" value="1000" units="1/deg"/>
+        </inkml:channelProperties>
+      </inkml:inkSource>
+      <inkml:timestamp xml:id="ts0" timeString="2026-02-12T19:34:20.139"/>
+    </inkml:context>
+    <inkml:brush xml:id="br0">
+      <inkml:brushProperty name="width" value="0.025" units="cm"/>
+      <inkml:brushProperty name="height" value="0.025" units="cm"/>
+    </inkml:brush>
+  </inkml:definitions>
+  <inkml:trace contextRef="#ctx0" brushRef="#br0">0 14 8 0 0,'4'3'96'0'0,"-1"1"1"0"0,0-1-1 0 0,0 1 1 0 0,0 0-1 0 0,0 0 0 0 0,-1 0 1 0 0,0 0-1 0 0,3 7 1 0 0,13 38 3202 0 0,-16-43-2698 0 0,29 114 4761 0 0,-10-30-3039 0 0,-21-89-2318 0 0,1 0 0 0 0,-1 0 1 0 0,0 0-1 0 0,0 0 0 0 0,1 0 0 0 0,-1 0 0 0 0,0 0 0 0 0,1 0 0 0 0,-1 0 0 0 0,1 0 0 0 0,-1-1 0 0 0,1 1 0 0 0,0 0 0 0 0,-1 0 0 0 0,2 1 0 0 0,-2-3-16 0 0,1 1 0 0 0,-1 0-1 0 0,0 0 1 0 0,1 0 0 0 0,-1 0-1 0 0,0 0 1 0 0,1 0 0 0 0,-1 0-1 0 0,0-1 1 0 0,0 1 0 0 0,1 0-1 0 0,-1 0 1 0 0,0 0 0 0 0,0-1 0 0 0,1 1-1 0 0,-1 0 1 0 0,0 0 0 0 0,0-1-1 0 0,1 1 1 0 0,-1 0 0 0 0,0 0-1 0 0,0-1 1 0 0,0 1 0 0 0,0 0-1 0 0,0-1 1 0 0,0 1 0 0 0,1 0-1 0 0,-1-1 1 0 0,0 1 0 0 0,9-41-1842 0 0,-6 29 566 0 0,7-21-2630 0 0,27-60 0 0 0,-8 32 3810 0 0,3 2 3612 0 0,-28 52-2814 0 0,3-11 1890 0 0,-6 13-694 0 0,-5 14-721 0 0,1-3-878 0 0,1 0 1 0 0,0 0 0 0 0,0 1 0 0 0,1-1-1 0 0,-1 1 1 0 0,2-1 0 0 0,-1 1 0 0 0,0 0-1 0 0,1-1 1 0 0,1 1 0 0 0,-1 0-1 0 0,1-1 1 0 0,0 1 0 0 0,3 9 0 0 0,0-3 271 0 0,1-1 0 0 0,0 0 1 0 0,0-1-1 0 0,2 1 1 0 0,-1-1-1 0 0,14 16 0 0 0,-18-24-477 0 0,1 1-1 0 0,-1-1 1 0 0,0 1-1 0 0,0 0 1 0 0,0 0-1 0 0,0-1 1 0 0,-1 1-1 0 0,0 0 0 0 0,1 0 1 0 0,-1 1-1 0 0,-1-1 1 0 0,1 0-1 0 0,-1 0 1 0 0,1 5-1 0 0,-2-6-75 0 0,1-1 0 0 0,0 1 0 0 0,-1 0 0 0 0,0 0 0 0 0,0-1 0 0 0,0 1 0 0 0,0 0 0 0 0,0-1 0 0 0,0 1 0 0 0,-1-1 0 0 0,1 1 0 0 0,-1-1 0 0 0,0 0-1 0 0,1 0 1 0 0,-1 0 0 0 0,0 0 0 0 0,0 0 0 0 0,-1 0 0 0 0,1 0 0 0 0,0-1 0 0 0,-5 3 0 0 0,5-3-105 0 0,1 0 1 0 0,0-1-1 0 0,0 1 0 0 0,-1-1 1 0 0,1 1-1 0 0,0-1 0 0 0,-1 0 0 0 0,1 0 1 0 0,0 1-1 0 0,-1-1 0 0 0,1 0 1 0 0,0 0-1 0 0,-1 0 0 0 0,1-1 1 0 0,-1 1-1 0 0,1 0 0 0 0,0 0 0 0 0,0-1 1 0 0,-1 1-1 0 0,1-1 0 0 0,0 1 1 0 0,-1-1-1 0 0,-1-1 0 0 0,1 1-605 0 0,0 0-1 0 0,1-1 1 0 0,-1 1-1 0 0,0-1 1 0 0,1 0-1 0 0,-1 0 1 0 0,1 1-1 0 0,-2-4 1 0 0,-3-6-2926 0 0</inkml:trace>
 </inkml:ink>
 </file>
 
@@ -4270,8 +5882,8 @@
           </a:p>
         </p:txBody>
       </p:sp>
-      <mc:AlternateContent xmlns:mc="http://schemas.openxmlformats.org/markup-compatibility/2006">
-        <mc:Choice xmlns:p14="http://schemas.microsoft.com/office/powerpoint/2010/main" Requires="p14">
+      <mc:AlternateContent xmlns:mc="http://schemas.openxmlformats.org/markup-compatibility/2006" xmlns:p14="http://schemas.microsoft.com/office/powerpoint/2010/main">
+        <mc:Choice Requires="p14">
           <p:contentPart p14:bwMode="auto" r:id="rId3">
             <p14:nvContentPartPr>
               <p14:cNvPr id="25" name="Ink 24">
@@ -4290,7 +5902,7 @@
             </p14:xfrm>
           </p:contentPart>
         </mc:Choice>
-        <mc:Fallback>
+        <mc:Fallback xmlns="">
           <p:pic>
             <p:nvPicPr>
               <p:cNvPr id="25" name="Ink 24">
@@ -4341,8 +5953,8 @@
             <a:chExt cx="1000080" cy="472680"/>
           </a:xfrm>
         </p:grpSpPr>
-        <mc:AlternateContent xmlns:mc="http://schemas.openxmlformats.org/markup-compatibility/2006">
-          <mc:Choice xmlns:p14="http://schemas.microsoft.com/office/powerpoint/2010/main" Requires="p14">
+        <mc:AlternateContent xmlns:mc="http://schemas.openxmlformats.org/markup-compatibility/2006" xmlns:p14="http://schemas.microsoft.com/office/powerpoint/2010/main">
+          <mc:Choice Requires="p14">
             <p:contentPart p14:bwMode="auto" r:id="rId5">
               <p14:nvContentPartPr>
                 <p14:cNvPr id="30" name="Ink 29">
@@ -4361,7 +5973,7 @@
               </p14:xfrm>
             </p:contentPart>
           </mc:Choice>
-          <mc:Fallback>
+          <mc:Fallback xmlns="">
             <p:pic>
               <p:nvPicPr>
                 <p:cNvPr id="30" name="Ink 29">
@@ -4392,8 +6004,8 @@
             </p:pic>
           </mc:Fallback>
         </mc:AlternateContent>
-        <mc:AlternateContent xmlns:mc="http://schemas.openxmlformats.org/markup-compatibility/2006">
-          <mc:Choice xmlns:p14="http://schemas.microsoft.com/office/powerpoint/2010/main" Requires="p14">
+        <mc:AlternateContent xmlns:mc="http://schemas.openxmlformats.org/markup-compatibility/2006" xmlns:p14="http://schemas.microsoft.com/office/powerpoint/2010/main">
+          <mc:Choice Requires="p14">
             <p:contentPart p14:bwMode="auto" r:id="rId7">
               <p14:nvContentPartPr>
                 <p14:cNvPr id="31" name="Ink 30">
@@ -4412,7 +6024,7 @@
               </p14:xfrm>
             </p:contentPart>
           </mc:Choice>
-          <mc:Fallback>
+          <mc:Fallback xmlns="">
             <p:pic>
               <p:nvPicPr>
                 <p:cNvPr id="31" name="Ink 30">
@@ -4443,8 +6055,8 @@
             </p:pic>
           </mc:Fallback>
         </mc:AlternateContent>
-        <mc:AlternateContent xmlns:mc="http://schemas.openxmlformats.org/markup-compatibility/2006">
-          <mc:Choice xmlns:p14="http://schemas.microsoft.com/office/powerpoint/2010/main" Requires="p14">
+        <mc:AlternateContent xmlns:mc="http://schemas.openxmlformats.org/markup-compatibility/2006" xmlns:p14="http://schemas.microsoft.com/office/powerpoint/2010/main">
+          <mc:Choice Requires="p14">
             <p:contentPart p14:bwMode="auto" r:id="rId9">
               <p14:nvContentPartPr>
                 <p14:cNvPr id="32" name="Ink 31">
@@ -4463,7 +6075,7 @@
               </p14:xfrm>
             </p:contentPart>
           </mc:Choice>
-          <mc:Fallback>
+          <mc:Fallback xmlns="">
             <p:pic>
               <p:nvPicPr>
                 <p:cNvPr id="32" name="Ink 31">
@@ -4494,8 +6106,8 @@
             </p:pic>
           </mc:Fallback>
         </mc:AlternateContent>
-        <mc:AlternateContent xmlns:mc="http://schemas.openxmlformats.org/markup-compatibility/2006">
-          <mc:Choice xmlns:p14="http://schemas.microsoft.com/office/powerpoint/2010/main" Requires="p14">
+        <mc:AlternateContent xmlns:mc="http://schemas.openxmlformats.org/markup-compatibility/2006" xmlns:p14="http://schemas.microsoft.com/office/powerpoint/2010/main">
+          <mc:Choice Requires="p14">
             <p:contentPart p14:bwMode="auto" r:id="rId11">
               <p14:nvContentPartPr>
                 <p14:cNvPr id="33" name="Ink 32">
@@ -4514,7 +6126,7 @@
               </p14:xfrm>
             </p:contentPart>
           </mc:Choice>
-          <mc:Fallback>
+          <mc:Fallback xmlns="">
             <p:pic>
               <p:nvPicPr>
                 <p:cNvPr id="33" name="Ink 32">
@@ -4545,8 +6157,8 @@
             </p:pic>
           </mc:Fallback>
         </mc:AlternateContent>
-        <mc:AlternateContent xmlns:mc="http://schemas.openxmlformats.org/markup-compatibility/2006">
-          <mc:Choice xmlns:p14="http://schemas.microsoft.com/office/powerpoint/2010/main" Requires="p14">
+        <mc:AlternateContent xmlns:mc="http://schemas.openxmlformats.org/markup-compatibility/2006" xmlns:p14="http://schemas.microsoft.com/office/powerpoint/2010/main">
+          <mc:Choice Requires="p14">
             <p:contentPart p14:bwMode="auto" r:id="rId13">
               <p14:nvContentPartPr>
                 <p14:cNvPr id="34" name="Ink 33">
@@ -4565,7 +6177,7 @@
               </p14:xfrm>
             </p:contentPart>
           </mc:Choice>
-          <mc:Fallback>
+          <mc:Fallback xmlns="">
             <p:pic>
               <p:nvPicPr>
                 <p:cNvPr id="34" name="Ink 33">
@@ -4596,8 +6208,8 @@
             </p:pic>
           </mc:Fallback>
         </mc:AlternateContent>
-        <mc:AlternateContent xmlns:mc="http://schemas.openxmlformats.org/markup-compatibility/2006">
-          <mc:Choice xmlns:p14="http://schemas.microsoft.com/office/powerpoint/2010/main" Requires="p14">
+        <mc:AlternateContent xmlns:mc="http://schemas.openxmlformats.org/markup-compatibility/2006" xmlns:p14="http://schemas.microsoft.com/office/powerpoint/2010/main">
+          <mc:Choice Requires="p14">
             <p:contentPart p14:bwMode="auto" r:id="rId15">
               <p14:nvContentPartPr>
                 <p14:cNvPr id="35" name="Ink 34">
@@ -4616,7 +6228,7 @@
               </p14:xfrm>
             </p:contentPart>
           </mc:Choice>
-          <mc:Fallback>
+          <mc:Fallback xmlns="">
             <p:pic>
               <p:nvPicPr>
                 <p:cNvPr id="35" name="Ink 34">
@@ -4647,8 +6259,8 @@
             </p:pic>
           </mc:Fallback>
         </mc:AlternateContent>
-        <mc:AlternateContent xmlns:mc="http://schemas.openxmlformats.org/markup-compatibility/2006">
-          <mc:Choice xmlns:p14="http://schemas.microsoft.com/office/powerpoint/2010/main" Requires="p14">
+        <mc:AlternateContent xmlns:mc="http://schemas.openxmlformats.org/markup-compatibility/2006" xmlns:p14="http://schemas.microsoft.com/office/powerpoint/2010/main">
+          <mc:Choice Requires="p14">
             <p:contentPart p14:bwMode="auto" r:id="rId17">
               <p14:nvContentPartPr>
                 <p14:cNvPr id="36" name="Ink 35">
@@ -4667,7 +6279,7 @@
               </p14:xfrm>
             </p:contentPart>
           </mc:Choice>
-          <mc:Fallback>
+          <mc:Fallback xmlns="">
             <p:pic>
               <p:nvPicPr>
                 <p:cNvPr id="36" name="Ink 35">
@@ -4698,8 +6310,8 @@
             </p:pic>
           </mc:Fallback>
         </mc:AlternateContent>
-        <mc:AlternateContent xmlns:mc="http://schemas.openxmlformats.org/markup-compatibility/2006">
-          <mc:Choice xmlns:p14="http://schemas.microsoft.com/office/powerpoint/2010/main" Requires="p14">
+        <mc:AlternateContent xmlns:mc="http://schemas.openxmlformats.org/markup-compatibility/2006" xmlns:p14="http://schemas.microsoft.com/office/powerpoint/2010/main">
+          <mc:Choice Requires="p14">
             <p:contentPart p14:bwMode="auto" r:id="rId19">
               <p14:nvContentPartPr>
                 <p14:cNvPr id="37" name="Ink 36">
@@ -4718,7 +6330,7 @@
               </p14:xfrm>
             </p:contentPart>
           </mc:Choice>
-          <mc:Fallback>
+          <mc:Fallback xmlns="">
             <p:pic>
               <p:nvPicPr>
                 <p:cNvPr id="37" name="Ink 36">
@@ -4749,8 +6361,8 @@
             </p:pic>
           </mc:Fallback>
         </mc:AlternateContent>
-        <mc:AlternateContent xmlns:mc="http://schemas.openxmlformats.org/markup-compatibility/2006">
-          <mc:Choice xmlns:p14="http://schemas.microsoft.com/office/powerpoint/2010/main" Requires="p14">
+        <mc:AlternateContent xmlns:mc="http://schemas.openxmlformats.org/markup-compatibility/2006" xmlns:p14="http://schemas.microsoft.com/office/powerpoint/2010/main">
+          <mc:Choice Requires="p14">
             <p:contentPart p14:bwMode="auto" r:id="rId21">
               <p14:nvContentPartPr>
                 <p14:cNvPr id="39" name="Ink 38">
@@ -4769,7 +6381,7 @@
               </p14:xfrm>
             </p:contentPart>
           </mc:Choice>
-          <mc:Fallback>
+          <mc:Fallback xmlns="">
             <p:pic>
               <p:nvPicPr>
                 <p:cNvPr id="39" name="Ink 38">
@@ -4800,8 +6412,8 @@
             </p:pic>
           </mc:Fallback>
         </mc:AlternateContent>
-        <mc:AlternateContent xmlns:mc="http://schemas.openxmlformats.org/markup-compatibility/2006">
-          <mc:Choice xmlns:p14="http://schemas.microsoft.com/office/powerpoint/2010/main" Requires="p14">
+        <mc:AlternateContent xmlns:mc="http://schemas.openxmlformats.org/markup-compatibility/2006" xmlns:p14="http://schemas.microsoft.com/office/powerpoint/2010/main">
+          <mc:Choice Requires="p14">
             <p:contentPart p14:bwMode="auto" r:id="rId23">
               <p14:nvContentPartPr>
                 <p14:cNvPr id="40" name="Ink 39">
@@ -4820,7 +6432,7 @@
               </p14:xfrm>
             </p:contentPart>
           </mc:Choice>
-          <mc:Fallback>
+          <mc:Fallback xmlns="">
             <p:pic>
               <p:nvPicPr>
                 <p:cNvPr id="40" name="Ink 39">
@@ -4872,8 +6484,8 @@
             <a:chExt cx="664200" cy="159120"/>
           </a:xfrm>
         </p:grpSpPr>
-        <mc:AlternateContent xmlns:mc="http://schemas.openxmlformats.org/markup-compatibility/2006">
-          <mc:Choice xmlns:p14="http://schemas.microsoft.com/office/powerpoint/2010/main" Requires="p14">
+        <mc:AlternateContent xmlns:mc="http://schemas.openxmlformats.org/markup-compatibility/2006" xmlns:p14="http://schemas.microsoft.com/office/powerpoint/2010/main">
+          <mc:Choice Requires="p14">
             <p:contentPart p14:bwMode="auto" r:id="rId25">
               <p14:nvContentPartPr>
                 <p14:cNvPr id="41" name="Ink 40">
@@ -4892,7 +6504,7 @@
               </p14:xfrm>
             </p:contentPart>
           </mc:Choice>
-          <mc:Fallback>
+          <mc:Fallback xmlns="">
             <p:pic>
               <p:nvPicPr>
                 <p:cNvPr id="41" name="Ink 40">
@@ -4923,8 +6535,8 @@
             </p:pic>
           </mc:Fallback>
         </mc:AlternateContent>
-        <mc:AlternateContent xmlns:mc="http://schemas.openxmlformats.org/markup-compatibility/2006">
-          <mc:Choice xmlns:p14="http://schemas.microsoft.com/office/powerpoint/2010/main" Requires="p14">
+        <mc:AlternateContent xmlns:mc="http://schemas.openxmlformats.org/markup-compatibility/2006" xmlns:p14="http://schemas.microsoft.com/office/powerpoint/2010/main">
+          <mc:Choice Requires="p14">
             <p:contentPart p14:bwMode="auto" r:id="rId27">
               <p14:nvContentPartPr>
                 <p14:cNvPr id="42" name="Ink 41">
@@ -4943,7 +6555,7 @@
               </p14:xfrm>
             </p:contentPart>
           </mc:Choice>
-          <mc:Fallback>
+          <mc:Fallback xmlns="">
             <p:pic>
               <p:nvPicPr>
                 <p:cNvPr id="42" name="Ink 41">
@@ -4974,8 +6586,8 @@
             </p:pic>
           </mc:Fallback>
         </mc:AlternateContent>
-        <mc:AlternateContent xmlns:mc="http://schemas.openxmlformats.org/markup-compatibility/2006">
-          <mc:Choice xmlns:p14="http://schemas.microsoft.com/office/powerpoint/2010/main" Requires="p14">
+        <mc:AlternateContent xmlns:mc="http://schemas.openxmlformats.org/markup-compatibility/2006" xmlns:p14="http://schemas.microsoft.com/office/powerpoint/2010/main">
+          <mc:Choice Requires="p14">
             <p:contentPart p14:bwMode="auto" r:id="rId29">
               <p14:nvContentPartPr>
                 <p14:cNvPr id="43" name="Ink 42">
@@ -4994,7 +6606,7 @@
               </p14:xfrm>
             </p:contentPart>
           </mc:Choice>
-          <mc:Fallback>
+          <mc:Fallback xmlns="">
             <p:pic>
               <p:nvPicPr>
                 <p:cNvPr id="43" name="Ink 42">
@@ -5025,8 +6637,8 @@
             </p:pic>
           </mc:Fallback>
         </mc:AlternateContent>
-        <mc:AlternateContent xmlns:mc="http://schemas.openxmlformats.org/markup-compatibility/2006">
-          <mc:Choice xmlns:p14="http://schemas.microsoft.com/office/powerpoint/2010/main" Requires="p14">
+        <mc:AlternateContent xmlns:mc="http://schemas.openxmlformats.org/markup-compatibility/2006" xmlns:p14="http://schemas.microsoft.com/office/powerpoint/2010/main">
+          <mc:Choice Requires="p14">
             <p:contentPart p14:bwMode="auto" r:id="rId31">
               <p14:nvContentPartPr>
                 <p14:cNvPr id="44" name="Ink 43">
@@ -5045,7 +6657,7 @@
               </p14:xfrm>
             </p:contentPart>
           </mc:Choice>
-          <mc:Fallback>
+          <mc:Fallback xmlns="">
             <p:pic>
               <p:nvPicPr>
                 <p:cNvPr id="44" name="Ink 43">
@@ -5076,8 +6688,8 @@
             </p:pic>
           </mc:Fallback>
         </mc:AlternateContent>
-        <mc:AlternateContent xmlns:mc="http://schemas.openxmlformats.org/markup-compatibility/2006">
-          <mc:Choice xmlns:p14="http://schemas.microsoft.com/office/powerpoint/2010/main" Requires="p14">
+        <mc:AlternateContent xmlns:mc="http://schemas.openxmlformats.org/markup-compatibility/2006" xmlns:p14="http://schemas.microsoft.com/office/powerpoint/2010/main">
+          <mc:Choice Requires="p14">
             <p:contentPart p14:bwMode="auto" r:id="rId33">
               <p14:nvContentPartPr>
                 <p14:cNvPr id="45" name="Ink 44">
@@ -5096,7 +6708,7 @@
               </p14:xfrm>
             </p:contentPart>
           </mc:Choice>
-          <mc:Fallback>
+          <mc:Fallback xmlns="">
             <p:pic>
               <p:nvPicPr>
                 <p:cNvPr id="45" name="Ink 44">
@@ -5127,8 +6739,8 @@
             </p:pic>
           </mc:Fallback>
         </mc:AlternateContent>
-        <mc:AlternateContent xmlns:mc="http://schemas.openxmlformats.org/markup-compatibility/2006">
-          <mc:Choice xmlns:p14="http://schemas.microsoft.com/office/powerpoint/2010/main" Requires="p14">
+        <mc:AlternateContent xmlns:mc="http://schemas.openxmlformats.org/markup-compatibility/2006" xmlns:p14="http://schemas.microsoft.com/office/powerpoint/2010/main">
+          <mc:Choice Requires="p14">
             <p:contentPart p14:bwMode="auto" r:id="rId35">
               <p14:nvContentPartPr>
                 <p14:cNvPr id="46" name="Ink 45">
@@ -5147,7 +6759,7 @@
               </p14:xfrm>
             </p:contentPart>
           </mc:Choice>
-          <mc:Fallback>
+          <mc:Fallback xmlns="">
             <p:pic>
               <p:nvPicPr>
                 <p:cNvPr id="46" name="Ink 45">
@@ -5170,6 +6782,2700 @@
                 <a:xfrm>
                   <a:off x="4751651" y="6186869"/>
                   <a:ext cx="77760" cy="101880"/>
+                </a:xfrm>
+                <a:prstGeom prst="rect">
+                  <a:avLst/>
+                </a:prstGeom>
+              </p:spPr>
+            </p:pic>
+          </mc:Fallback>
+        </mc:AlternateContent>
+      </p:grpSp>
+      <p:grpSp>
+        <p:nvGrpSpPr>
+          <p:cNvPr id="6" name="Group 5">
+            <a:extLst>
+              <a:ext uri="{FF2B5EF4-FFF2-40B4-BE49-F238E27FC236}">
+                <a16:creationId xmlns:a16="http://schemas.microsoft.com/office/drawing/2014/main" id="{778C40AE-6F87-3E4D-FC5B-CF0633CDB15F}"/>
+              </a:ext>
+            </a:extLst>
+          </p:cNvPr>
+          <p:cNvGrpSpPr/>
+          <p:nvPr/>
+        </p:nvGrpSpPr>
+        <p:grpSpPr>
+          <a:xfrm>
+            <a:off x="5477170" y="3329710"/>
+            <a:ext cx="479520" cy="389160"/>
+            <a:chOff x="5477170" y="3329710"/>
+            <a:chExt cx="479520" cy="389160"/>
+          </a:xfrm>
+        </p:grpSpPr>
+        <mc:AlternateContent xmlns:mc="http://schemas.openxmlformats.org/markup-compatibility/2006">
+          <mc:Choice xmlns:p14="http://schemas.microsoft.com/office/powerpoint/2010/main" Requires="p14">
+            <p:contentPart p14:bwMode="auto" r:id="rId37">
+              <p14:nvContentPartPr>
+                <p14:cNvPr id="2" name="Ink 1">
+                  <a:extLst>
+                    <a:ext uri="{FF2B5EF4-FFF2-40B4-BE49-F238E27FC236}">
+                      <a16:creationId xmlns:a16="http://schemas.microsoft.com/office/drawing/2014/main" id="{FC27BBB1-958F-EBA3-E815-4D87BEC5E1EE}"/>
+                    </a:ext>
+                  </a:extLst>
+                </p14:cNvPr>
+                <p14:cNvContentPartPr/>
+                <p14:nvPr/>
+              </p14:nvContentPartPr>
+              <p14:xfrm>
+                <a:off x="5477170" y="3461830"/>
+                <a:ext cx="232920" cy="124560"/>
+              </p14:xfrm>
+            </p:contentPart>
+          </mc:Choice>
+          <mc:Fallback>
+            <p:pic>
+              <p:nvPicPr>
+                <p:cNvPr id="2" name="Ink 1">
+                  <a:extLst>
+                    <a:ext uri="{FF2B5EF4-FFF2-40B4-BE49-F238E27FC236}">
+                      <a16:creationId xmlns:a16="http://schemas.microsoft.com/office/drawing/2014/main" id="{FC27BBB1-958F-EBA3-E815-4D87BEC5E1EE}"/>
+                    </a:ext>
+                  </a:extLst>
+                </p:cNvPr>
+                <p:cNvPicPr/>
+                <p:nvPr/>
+              </p:nvPicPr>
+              <p:blipFill>
+                <a:blip r:embed="rId38"/>
+                <a:stretch>
+                  <a:fillRect/>
+                </a:stretch>
+              </p:blipFill>
+              <p:spPr>
+                <a:xfrm>
+                  <a:off x="5472850" y="3457510"/>
+                  <a:ext cx="241560" cy="133200"/>
+                </a:xfrm>
+                <a:prstGeom prst="rect">
+                  <a:avLst/>
+                </a:prstGeom>
+              </p:spPr>
+            </p:pic>
+          </mc:Fallback>
+        </mc:AlternateContent>
+        <mc:AlternateContent xmlns:mc="http://schemas.openxmlformats.org/markup-compatibility/2006">
+          <mc:Choice xmlns:p14="http://schemas.microsoft.com/office/powerpoint/2010/main" Requires="p14">
+            <p:contentPart p14:bwMode="auto" r:id="rId39">
+              <p14:nvContentPartPr>
+                <p14:cNvPr id="3" name="Ink 2">
+                  <a:extLst>
+                    <a:ext uri="{FF2B5EF4-FFF2-40B4-BE49-F238E27FC236}">
+                      <a16:creationId xmlns:a16="http://schemas.microsoft.com/office/drawing/2014/main" id="{FAD50216-8AC6-025E-6209-BCC8306F3010}"/>
+                    </a:ext>
+                  </a:extLst>
+                </p14:cNvPr>
+                <p14:cNvContentPartPr/>
+                <p14:nvPr/>
+              </p14:nvContentPartPr>
+              <p14:xfrm>
+                <a:off x="5531530" y="3329710"/>
+                <a:ext cx="105840" cy="255600"/>
+              </p14:xfrm>
+            </p:contentPart>
+          </mc:Choice>
+          <mc:Fallback>
+            <p:pic>
+              <p:nvPicPr>
+                <p:cNvPr id="3" name="Ink 2">
+                  <a:extLst>
+                    <a:ext uri="{FF2B5EF4-FFF2-40B4-BE49-F238E27FC236}">
+                      <a16:creationId xmlns:a16="http://schemas.microsoft.com/office/drawing/2014/main" id="{FAD50216-8AC6-025E-6209-BCC8306F3010}"/>
+                    </a:ext>
+                  </a:extLst>
+                </p:cNvPr>
+                <p:cNvPicPr/>
+                <p:nvPr/>
+              </p:nvPicPr>
+              <p:blipFill>
+                <a:blip r:embed="rId40"/>
+                <a:stretch>
+                  <a:fillRect/>
+                </a:stretch>
+              </p:blipFill>
+              <p:spPr>
+                <a:xfrm>
+                  <a:off x="5527210" y="3325390"/>
+                  <a:ext cx="114480" cy="264240"/>
+                </a:xfrm>
+                <a:prstGeom prst="rect">
+                  <a:avLst/>
+                </a:prstGeom>
+              </p:spPr>
+            </p:pic>
+          </mc:Fallback>
+        </mc:AlternateContent>
+        <mc:AlternateContent xmlns:mc="http://schemas.openxmlformats.org/markup-compatibility/2006">
+          <mc:Choice xmlns:p14="http://schemas.microsoft.com/office/powerpoint/2010/main" Requires="p14">
+            <p:contentPart p14:bwMode="auto" r:id="rId41">
+              <p14:nvContentPartPr>
+                <p14:cNvPr id="5" name="Ink 4">
+                  <a:extLst>
+                    <a:ext uri="{FF2B5EF4-FFF2-40B4-BE49-F238E27FC236}">
+                      <a16:creationId xmlns:a16="http://schemas.microsoft.com/office/drawing/2014/main" id="{67044F9C-639E-3DDA-DDE8-6EECBCAC13CB}"/>
+                    </a:ext>
+                  </a:extLst>
+                </p14:cNvPr>
+                <p14:cNvContentPartPr/>
+                <p14:nvPr/>
+              </p14:nvContentPartPr>
+              <p14:xfrm>
+                <a:off x="5848690" y="3432670"/>
+                <a:ext cx="108000" cy="286200"/>
+              </p14:xfrm>
+            </p:contentPart>
+          </mc:Choice>
+          <mc:Fallback>
+            <p:pic>
+              <p:nvPicPr>
+                <p:cNvPr id="5" name="Ink 4">
+                  <a:extLst>
+                    <a:ext uri="{FF2B5EF4-FFF2-40B4-BE49-F238E27FC236}">
+                      <a16:creationId xmlns:a16="http://schemas.microsoft.com/office/drawing/2014/main" id="{67044F9C-639E-3DDA-DDE8-6EECBCAC13CB}"/>
+                    </a:ext>
+                  </a:extLst>
+                </p:cNvPr>
+                <p:cNvPicPr/>
+                <p:nvPr/>
+              </p:nvPicPr>
+              <p:blipFill>
+                <a:blip r:embed="rId42"/>
+                <a:stretch>
+                  <a:fillRect/>
+                </a:stretch>
+              </p:blipFill>
+              <p:spPr>
+                <a:xfrm>
+                  <a:off x="5844370" y="3428350"/>
+                  <a:ext cx="116640" cy="294840"/>
+                </a:xfrm>
+                <a:prstGeom prst="rect">
+                  <a:avLst/>
+                </a:prstGeom>
+              </p:spPr>
+            </p:pic>
+          </mc:Fallback>
+        </mc:AlternateContent>
+      </p:grpSp>
+      <p:grpSp>
+        <p:nvGrpSpPr>
+          <p:cNvPr id="80" name="Group 79">
+            <a:extLst>
+              <a:ext uri="{FF2B5EF4-FFF2-40B4-BE49-F238E27FC236}">
+                <a16:creationId xmlns:a16="http://schemas.microsoft.com/office/drawing/2014/main" id="{C8779886-C208-6C27-69AB-086AA7331D18}"/>
+              </a:ext>
+            </a:extLst>
+          </p:cNvPr>
+          <p:cNvGrpSpPr/>
+          <p:nvPr/>
+        </p:nvGrpSpPr>
+        <p:grpSpPr>
+          <a:xfrm>
+            <a:off x="178320" y="577920"/>
+            <a:ext cx="2885760" cy="872640"/>
+            <a:chOff x="178320" y="577920"/>
+            <a:chExt cx="2885760" cy="872640"/>
+          </a:xfrm>
+        </p:grpSpPr>
+        <mc:AlternateContent xmlns:mc="http://schemas.openxmlformats.org/markup-compatibility/2006">
+          <mc:Choice xmlns:p14="http://schemas.microsoft.com/office/powerpoint/2010/main" Requires="p14">
+            <p:contentPart p14:bwMode="auto" r:id="rId43">
+              <p14:nvContentPartPr>
+                <p14:cNvPr id="7" name="Ink 6">
+                  <a:extLst>
+                    <a:ext uri="{FF2B5EF4-FFF2-40B4-BE49-F238E27FC236}">
+                      <a16:creationId xmlns:a16="http://schemas.microsoft.com/office/drawing/2014/main" id="{A47CFF93-BD9B-9ABE-B196-041798EB751F}"/>
+                    </a:ext>
+                  </a:extLst>
+                </p14:cNvPr>
+                <p14:cNvContentPartPr/>
+                <p14:nvPr/>
+              </p14:nvContentPartPr>
+              <p14:xfrm>
+                <a:off x="188760" y="1303320"/>
+                <a:ext cx="5400" cy="33840"/>
+              </p14:xfrm>
+            </p:contentPart>
+          </mc:Choice>
+          <mc:Fallback>
+            <p:pic>
+              <p:nvPicPr>
+                <p:cNvPr id="7" name="Ink 6">
+                  <a:extLst>
+                    <a:ext uri="{FF2B5EF4-FFF2-40B4-BE49-F238E27FC236}">
+                      <a16:creationId xmlns:a16="http://schemas.microsoft.com/office/drawing/2014/main" id="{A47CFF93-BD9B-9ABE-B196-041798EB751F}"/>
+                    </a:ext>
+                  </a:extLst>
+                </p:cNvPr>
+                <p:cNvPicPr/>
+                <p:nvPr/>
+              </p:nvPicPr>
+              <p:blipFill>
+                <a:blip r:embed="rId44"/>
+                <a:stretch>
+                  <a:fillRect/>
+                </a:stretch>
+              </p:blipFill>
+              <p:spPr>
+                <a:xfrm>
+                  <a:off x="184440" y="1299000"/>
+                  <a:ext cx="14040" cy="42480"/>
+                </a:xfrm>
+                <a:prstGeom prst="rect">
+                  <a:avLst/>
+                </a:prstGeom>
+              </p:spPr>
+            </p:pic>
+          </mc:Fallback>
+        </mc:AlternateContent>
+        <mc:AlternateContent xmlns:mc="http://schemas.openxmlformats.org/markup-compatibility/2006">
+          <mc:Choice xmlns:p14="http://schemas.microsoft.com/office/powerpoint/2010/main" Requires="p14">
+            <p:contentPart p14:bwMode="auto" r:id="rId45">
+              <p14:nvContentPartPr>
+                <p14:cNvPr id="8" name="Ink 7">
+                  <a:extLst>
+                    <a:ext uri="{FF2B5EF4-FFF2-40B4-BE49-F238E27FC236}">
+                      <a16:creationId xmlns:a16="http://schemas.microsoft.com/office/drawing/2014/main" id="{C0398449-4D2F-B946-11FA-B23DB52AEEE4}"/>
+                    </a:ext>
+                  </a:extLst>
+                </p14:cNvPr>
+                <p14:cNvContentPartPr/>
+                <p14:nvPr/>
+              </p14:nvContentPartPr>
+              <p14:xfrm>
+                <a:off x="178320" y="1245360"/>
+                <a:ext cx="237240" cy="178560"/>
+              </p14:xfrm>
+            </p:contentPart>
+          </mc:Choice>
+          <mc:Fallback>
+            <p:pic>
+              <p:nvPicPr>
+                <p:cNvPr id="8" name="Ink 7">
+                  <a:extLst>
+                    <a:ext uri="{FF2B5EF4-FFF2-40B4-BE49-F238E27FC236}">
+                      <a16:creationId xmlns:a16="http://schemas.microsoft.com/office/drawing/2014/main" id="{C0398449-4D2F-B946-11FA-B23DB52AEEE4}"/>
+                    </a:ext>
+                  </a:extLst>
+                </p:cNvPr>
+                <p:cNvPicPr/>
+                <p:nvPr/>
+              </p:nvPicPr>
+              <p:blipFill>
+                <a:blip r:embed="rId46"/>
+                <a:stretch>
+                  <a:fillRect/>
+                </a:stretch>
+              </p:blipFill>
+              <p:spPr>
+                <a:xfrm>
+                  <a:off x="174000" y="1241040"/>
+                  <a:ext cx="245880" cy="187200"/>
+                </a:xfrm>
+                <a:prstGeom prst="rect">
+                  <a:avLst/>
+                </a:prstGeom>
+              </p:spPr>
+            </p:pic>
+          </mc:Fallback>
+        </mc:AlternateContent>
+        <mc:AlternateContent xmlns:mc="http://schemas.openxmlformats.org/markup-compatibility/2006">
+          <mc:Choice xmlns:p14="http://schemas.microsoft.com/office/powerpoint/2010/main" Requires="p14">
+            <p:contentPart p14:bwMode="auto" r:id="rId47">
+              <p14:nvContentPartPr>
+                <p14:cNvPr id="9" name="Ink 8">
+                  <a:extLst>
+                    <a:ext uri="{FF2B5EF4-FFF2-40B4-BE49-F238E27FC236}">
+                      <a16:creationId xmlns:a16="http://schemas.microsoft.com/office/drawing/2014/main" id="{E97972FD-EE55-C08C-FF17-857192896C91}"/>
+                    </a:ext>
+                  </a:extLst>
+                </p14:cNvPr>
+                <p14:cNvContentPartPr/>
+                <p14:nvPr/>
+              </p14:nvContentPartPr>
+              <p14:xfrm>
+                <a:off x="440040" y="1066440"/>
+                <a:ext cx="141840" cy="143640"/>
+              </p14:xfrm>
+            </p:contentPart>
+          </mc:Choice>
+          <mc:Fallback>
+            <p:pic>
+              <p:nvPicPr>
+                <p:cNvPr id="9" name="Ink 8">
+                  <a:extLst>
+                    <a:ext uri="{FF2B5EF4-FFF2-40B4-BE49-F238E27FC236}">
+                      <a16:creationId xmlns:a16="http://schemas.microsoft.com/office/drawing/2014/main" id="{E97972FD-EE55-C08C-FF17-857192896C91}"/>
+                    </a:ext>
+                  </a:extLst>
+                </p:cNvPr>
+                <p:cNvPicPr/>
+                <p:nvPr/>
+              </p:nvPicPr>
+              <p:blipFill>
+                <a:blip r:embed="rId48"/>
+                <a:stretch>
+                  <a:fillRect/>
+                </a:stretch>
+              </p:blipFill>
+              <p:spPr>
+                <a:xfrm>
+                  <a:off x="435720" y="1062120"/>
+                  <a:ext cx="150480" cy="152280"/>
+                </a:xfrm>
+                <a:prstGeom prst="rect">
+                  <a:avLst/>
+                </a:prstGeom>
+              </p:spPr>
+            </p:pic>
+          </mc:Fallback>
+        </mc:AlternateContent>
+        <mc:AlternateContent xmlns:mc="http://schemas.openxmlformats.org/markup-compatibility/2006">
+          <mc:Choice xmlns:p14="http://schemas.microsoft.com/office/powerpoint/2010/main" Requires="p14">
+            <p:contentPart p14:bwMode="auto" r:id="rId49">
+              <p14:nvContentPartPr>
+                <p14:cNvPr id="10" name="Ink 9">
+                  <a:extLst>
+                    <a:ext uri="{FF2B5EF4-FFF2-40B4-BE49-F238E27FC236}">
+                      <a16:creationId xmlns:a16="http://schemas.microsoft.com/office/drawing/2014/main" id="{A3674AAC-9B2E-58F0-C73C-B583CADD39F8}"/>
+                    </a:ext>
+                  </a:extLst>
+                </p14:cNvPr>
+                <p14:cNvContentPartPr/>
+                <p14:nvPr/>
+              </p14:nvContentPartPr>
+              <p14:xfrm>
+                <a:off x="566760" y="1001640"/>
+                <a:ext cx="109440" cy="120600"/>
+              </p14:xfrm>
+            </p:contentPart>
+          </mc:Choice>
+          <mc:Fallback>
+            <p:pic>
+              <p:nvPicPr>
+                <p:cNvPr id="10" name="Ink 9">
+                  <a:extLst>
+                    <a:ext uri="{FF2B5EF4-FFF2-40B4-BE49-F238E27FC236}">
+                      <a16:creationId xmlns:a16="http://schemas.microsoft.com/office/drawing/2014/main" id="{A3674AAC-9B2E-58F0-C73C-B583CADD39F8}"/>
+                    </a:ext>
+                  </a:extLst>
+                </p:cNvPr>
+                <p:cNvPicPr/>
+                <p:nvPr/>
+              </p:nvPicPr>
+              <p:blipFill>
+                <a:blip r:embed="rId50"/>
+                <a:stretch>
+                  <a:fillRect/>
+                </a:stretch>
+              </p:blipFill>
+              <p:spPr>
+                <a:xfrm>
+                  <a:off x="562440" y="997320"/>
+                  <a:ext cx="118080" cy="129240"/>
+                </a:xfrm>
+                <a:prstGeom prst="rect">
+                  <a:avLst/>
+                </a:prstGeom>
+              </p:spPr>
+            </p:pic>
+          </mc:Fallback>
+        </mc:AlternateContent>
+        <mc:AlternateContent xmlns:mc="http://schemas.openxmlformats.org/markup-compatibility/2006">
+          <mc:Choice xmlns:p14="http://schemas.microsoft.com/office/powerpoint/2010/main" Requires="p14">
+            <p:contentPart p14:bwMode="auto" r:id="rId51">
+              <p14:nvContentPartPr>
+                <p14:cNvPr id="11" name="Ink 10">
+                  <a:extLst>
+                    <a:ext uri="{FF2B5EF4-FFF2-40B4-BE49-F238E27FC236}">
+                      <a16:creationId xmlns:a16="http://schemas.microsoft.com/office/drawing/2014/main" id="{F922C0CC-DBEF-F5F9-0486-B7011FC63613}"/>
+                    </a:ext>
+                  </a:extLst>
+                </p14:cNvPr>
+                <p14:cNvContentPartPr/>
+                <p14:nvPr/>
+              </p14:nvContentPartPr>
+              <p14:xfrm>
+                <a:off x="637680" y="903720"/>
+                <a:ext cx="140040" cy="126000"/>
+              </p14:xfrm>
+            </p:contentPart>
+          </mc:Choice>
+          <mc:Fallback>
+            <p:pic>
+              <p:nvPicPr>
+                <p:cNvPr id="11" name="Ink 10">
+                  <a:extLst>
+                    <a:ext uri="{FF2B5EF4-FFF2-40B4-BE49-F238E27FC236}">
+                      <a16:creationId xmlns:a16="http://schemas.microsoft.com/office/drawing/2014/main" id="{F922C0CC-DBEF-F5F9-0486-B7011FC63613}"/>
+                    </a:ext>
+                  </a:extLst>
+                </p:cNvPr>
+                <p:cNvPicPr/>
+                <p:nvPr/>
+              </p:nvPicPr>
+              <p:blipFill>
+                <a:blip r:embed="rId52"/>
+                <a:stretch>
+                  <a:fillRect/>
+                </a:stretch>
+              </p:blipFill>
+              <p:spPr>
+                <a:xfrm>
+                  <a:off x="633360" y="899400"/>
+                  <a:ext cx="148680" cy="134640"/>
+                </a:xfrm>
+                <a:prstGeom prst="rect">
+                  <a:avLst/>
+                </a:prstGeom>
+              </p:spPr>
+            </p:pic>
+          </mc:Fallback>
+        </mc:AlternateContent>
+        <mc:AlternateContent xmlns:mc="http://schemas.openxmlformats.org/markup-compatibility/2006">
+          <mc:Choice xmlns:p14="http://schemas.microsoft.com/office/powerpoint/2010/main" Requires="p14">
+            <p:contentPart p14:bwMode="auto" r:id="rId53">
+              <p14:nvContentPartPr>
+                <p14:cNvPr id="12" name="Ink 11">
+                  <a:extLst>
+                    <a:ext uri="{FF2B5EF4-FFF2-40B4-BE49-F238E27FC236}">
+                      <a16:creationId xmlns:a16="http://schemas.microsoft.com/office/drawing/2014/main" id="{408B6F27-8E0F-49BD-AEE2-A2C55E37370B}"/>
+                    </a:ext>
+                  </a:extLst>
+                </p14:cNvPr>
+                <p14:cNvContentPartPr/>
+                <p14:nvPr/>
+              </p14:nvContentPartPr>
+              <p14:xfrm>
+                <a:off x="922440" y="721920"/>
+                <a:ext cx="106560" cy="176400"/>
+              </p14:xfrm>
+            </p:contentPart>
+          </mc:Choice>
+          <mc:Fallback>
+            <p:pic>
+              <p:nvPicPr>
+                <p:cNvPr id="12" name="Ink 11">
+                  <a:extLst>
+                    <a:ext uri="{FF2B5EF4-FFF2-40B4-BE49-F238E27FC236}">
+                      <a16:creationId xmlns:a16="http://schemas.microsoft.com/office/drawing/2014/main" id="{408B6F27-8E0F-49BD-AEE2-A2C55E37370B}"/>
+                    </a:ext>
+                  </a:extLst>
+                </p:cNvPr>
+                <p:cNvPicPr/>
+                <p:nvPr/>
+              </p:nvPicPr>
+              <p:blipFill>
+                <a:blip r:embed="rId54"/>
+                <a:stretch>
+                  <a:fillRect/>
+                </a:stretch>
+              </p:blipFill>
+              <p:spPr>
+                <a:xfrm>
+                  <a:off x="918120" y="717600"/>
+                  <a:ext cx="115200" cy="185040"/>
+                </a:xfrm>
+                <a:prstGeom prst="rect">
+                  <a:avLst/>
+                </a:prstGeom>
+              </p:spPr>
+            </p:pic>
+          </mc:Fallback>
+        </mc:AlternateContent>
+        <mc:AlternateContent xmlns:mc="http://schemas.openxmlformats.org/markup-compatibility/2006">
+          <mc:Choice xmlns:p14="http://schemas.microsoft.com/office/powerpoint/2010/main" Requires="p14">
+            <p:contentPart p14:bwMode="auto" r:id="rId55">
+              <p14:nvContentPartPr>
+                <p14:cNvPr id="13" name="Ink 12">
+                  <a:extLst>
+                    <a:ext uri="{FF2B5EF4-FFF2-40B4-BE49-F238E27FC236}">
+                      <a16:creationId xmlns:a16="http://schemas.microsoft.com/office/drawing/2014/main" id="{DE5B366D-5CF4-7593-FC2F-0C490D749861}"/>
+                    </a:ext>
+                  </a:extLst>
+                </p14:cNvPr>
+                <p14:cNvContentPartPr/>
+                <p14:nvPr/>
+              </p14:nvContentPartPr>
+              <p14:xfrm>
+                <a:off x="676200" y="1333560"/>
+                <a:ext cx="80280" cy="117000"/>
+              </p14:xfrm>
+            </p:contentPart>
+          </mc:Choice>
+          <mc:Fallback>
+            <p:pic>
+              <p:nvPicPr>
+                <p:cNvPr id="13" name="Ink 12">
+                  <a:extLst>
+                    <a:ext uri="{FF2B5EF4-FFF2-40B4-BE49-F238E27FC236}">
+                      <a16:creationId xmlns:a16="http://schemas.microsoft.com/office/drawing/2014/main" id="{DE5B366D-5CF4-7593-FC2F-0C490D749861}"/>
+                    </a:ext>
+                  </a:extLst>
+                </p:cNvPr>
+                <p:cNvPicPr/>
+                <p:nvPr/>
+              </p:nvPicPr>
+              <p:blipFill>
+                <a:blip r:embed="rId56"/>
+                <a:stretch>
+                  <a:fillRect/>
+                </a:stretch>
+              </p:blipFill>
+              <p:spPr>
+                <a:xfrm>
+                  <a:off x="671880" y="1329240"/>
+                  <a:ext cx="88920" cy="125640"/>
+                </a:xfrm>
+                <a:prstGeom prst="rect">
+                  <a:avLst/>
+                </a:prstGeom>
+              </p:spPr>
+            </p:pic>
+          </mc:Fallback>
+        </mc:AlternateContent>
+        <mc:AlternateContent xmlns:mc="http://schemas.openxmlformats.org/markup-compatibility/2006">
+          <mc:Choice xmlns:p14="http://schemas.microsoft.com/office/powerpoint/2010/main" Requires="p14">
+            <p:contentPart p14:bwMode="auto" r:id="rId57">
+              <p14:nvContentPartPr>
+                <p14:cNvPr id="14" name="Ink 13">
+                  <a:extLst>
+                    <a:ext uri="{FF2B5EF4-FFF2-40B4-BE49-F238E27FC236}">
+                      <a16:creationId xmlns:a16="http://schemas.microsoft.com/office/drawing/2014/main" id="{AC7287D7-DE9F-DE2D-9B7B-0070EAA85515}"/>
+                    </a:ext>
+                  </a:extLst>
+                </p14:cNvPr>
+                <p14:cNvContentPartPr/>
+                <p14:nvPr/>
+              </p14:nvContentPartPr>
+              <p14:xfrm>
+                <a:off x="654600" y="1288920"/>
+                <a:ext cx="87480" cy="87840"/>
+              </p14:xfrm>
+            </p:contentPart>
+          </mc:Choice>
+          <mc:Fallback>
+            <p:pic>
+              <p:nvPicPr>
+                <p:cNvPr id="14" name="Ink 13">
+                  <a:extLst>
+                    <a:ext uri="{FF2B5EF4-FFF2-40B4-BE49-F238E27FC236}">
+                      <a16:creationId xmlns:a16="http://schemas.microsoft.com/office/drawing/2014/main" id="{AC7287D7-DE9F-DE2D-9B7B-0070EAA85515}"/>
+                    </a:ext>
+                  </a:extLst>
+                </p:cNvPr>
+                <p:cNvPicPr/>
+                <p:nvPr/>
+              </p:nvPicPr>
+              <p:blipFill>
+                <a:blip r:embed="rId58"/>
+                <a:stretch>
+                  <a:fillRect/>
+                </a:stretch>
+              </p:blipFill>
+              <p:spPr>
+                <a:xfrm>
+                  <a:off x="650280" y="1284600"/>
+                  <a:ext cx="96120" cy="96480"/>
+                </a:xfrm>
+                <a:prstGeom prst="rect">
+                  <a:avLst/>
+                </a:prstGeom>
+              </p:spPr>
+            </p:pic>
+          </mc:Fallback>
+        </mc:AlternateContent>
+        <mc:AlternateContent xmlns:mc="http://schemas.openxmlformats.org/markup-compatibility/2006">
+          <mc:Choice xmlns:p14="http://schemas.microsoft.com/office/powerpoint/2010/main" Requires="p14">
+            <p:contentPart p14:bwMode="auto" r:id="rId59">
+              <p14:nvContentPartPr>
+                <p14:cNvPr id="15" name="Ink 14">
+                  <a:extLst>
+                    <a:ext uri="{FF2B5EF4-FFF2-40B4-BE49-F238E27FC236}">
+                      <a16:creationId xmlns:a16="http://schemas.microsoft.com/office/drawing/2014/main" id="{5F5E0E37-89FD-5FAA-C60D-606460D0D8B8}"/>
+                    </a:ext>
+                  </a:extLst>
+                </p14:cNvPr>
+                <p14:cNvContentPartPr/>
+                <p14:nvPr/>
+              </p14:nvContentPartPr>
+              <p14:xfrm>
+                <a:off x="723000" y="1201800"/>
+                <a:ext cx="64440" cy="142560"/>
+              </p14:xfrm>
+            </p:contentPart>
+          </mc:Choice>
+          <mc:Fallback>
+            <p:pic>
+              <p:nvPicPr>
+                <p:cNvPr id="15" name="Ink 14">
+                  <a:extLst>
+                    <a:ext uri="{FF2B5EF4-FFF2-40B4-BE49-F238E27FC236}">
+                      <a16:creationId xmlns:a16="http://schemas.microsoft.com/office/drawing/2014/main" id="{5F5E0E37-89FD-5FAA-C60D-606460D0D8B8}"/>
+                    </a:ext>
+                  </a:extLst>
+                </p:cNvPr>
+                <p:cNvPicPr/>
+                <p:nvPr/>
+              </p:nvPicPr>
+              <p:blipFill>
+                <a:blip r:embed="rId60"/>
+                <a:stretch>
+                  <a:fillRect/>
+                </a:stretch>
+              </p:blipFill>
+              <p:spPr>
+                <a:xfrm>
+                  <a:off x="718680" y="1197480"/>
+                  <a:ext cx="73080" cy="151200"/>
+                </a:xfrm>
+                <a:prstGeom prst="rect">
+                  <a:avLst/>
+                </a:prstGeom>
+              </p:spPr>
+            </p:pic>
+          </mc:Fallback>
+        </mc:AlternateContent>
+        <mc:AlternateContent xmlns:mc="http://schemas.openxmlformats.org/markup-compatibility/2006">
+          <mc:Choice xmlns:p14="http://schemas.microsoft.com/office/powerpoint/2010/main" Requires="p14">
+            <p:contentPart p14:bwMode="auto" r:id="rId61">
+              <p14:nvContentPartPr>
+                <p14:cNvPr id="16" name="Ink 15">
+                  <a:extLst>
+                    <a:ext uri="{FF2B5EF4-FFF2-40B4-BE49-F238E27FC236}">
+                      <a16:creationId xmlns:a16="http://schemas.microsoft.com/office/drawing/2014/main" id="{002A3E56-8076-7854-B58D-307A1981819B}"/>
+                    </a:ext>
+                  </a:extLst>
+                </p14:cNvPr>
+                <p14:cNvContentPartPr/>
+                <p14:nvPr/>
+              </p14:nvContentPartPr>
+              <p14:xfrm>
+                <a:off x="821280" y="1218360"/>
+                <a:ext cx="40680" cy="61200"/>
+              </p14:xfrm>
+            </p:contentPart>
+          </mc:Choice>
+          <mc:Fallback>
+            <p:pic>
+              <p:nvPicPr>
+                <p:cNvPr id="16" name="Ink 15">
+                  <a:extLst>
+                    <a:ext uri="{FF2B5EF4-FFF2-40B4-BE49-F238E27FC236}">
+                      <a16:creationId xmlns:a16="http://schemas.microsoft.com/office/drawing/2014/main" id="{002A3E56-8076-7854-B58D-307A1981819B}"/>
+                    </a:ext>
+                  </a:extLst>
+                </p:cNvPr>
+                <p:cNvPicPr/>
+                <p:nvPr/>
+              </p:nvPicPr>
+              <p:blipFill>
+                <a:blip r:embed="rId62"/>
+                <a:stretch>
+                  <a:fillRect/>
+                </a:stretch>
+              </p:blipFill>
+              <p:spPr>
+                <a:xfrm>
+                  <a:off x="816960" y="1214040"/>
+                  <a:ext cx="49320" cy="69840"/>
+                </a:xfrm>
+                <a:prstGeom prst="rect">
+                  <a:avLst/>
+                </a:prstGeom>
+              </p:spPr>
+            </p:pic>
+          </mc:Fallback>
+        </mc:AlternateContent>
+        <mc:AlternateContent xmlns:mc="http://schemas.openxmlformats.org/markup-compatibility/2006">
+          <mc:Choice xmlns:p14="http://schemas.microsoft.com/office/powerpoint/2010/main" Requires="p14">
+            <p:contentPart p14:bwMode="auto" r:id="rId63">
+              <p14:nvContentPartPr>
+                <p14:cNvPr id="17" name="Ink 16">
+                  <a:extLst>
+                    <a:ext uri="{FF2B5EF4-FFF2-40B4-BE49-F238E27FC236}">
+                      <a16:creationId xmlns:a16="http://schemas.microsoft.com/office/drawing/2014/main" id="{91B9506D-245A-0CAF-3F5F-9ED06A51B9E0}"/>
+                    </a:ext>
+                  </a:extLst>
+                </p14:cNvPr>
+                <p14:cNvContentPartPr/>
+                <p14:nvPr/>
+              </p14:nvContentPartPr>
+              <p14:xfrm>
+                <a:off x="780240" y="1119360"/>
+                <a:ext cx="20520" cy="27360"/>
+              </p14:xfrm>
+            </p:contentPart>
+          </mc:Choice>
+          <mc:Fallback>
+            <p:pic>
+              <p:nvPicPr>
+                <p:cNvPr id="17" name="Ink 16">
+                  <a:extLst>
+                    <a:ext uri="{FF2B5EF4-FFF2-40B4-BE49-F238E27FC236}">
+                      <a16:creationId xmlns:a16="http://schemas.microsoft.com/office/drawing/2014/main" id="{91B9506D-245A-0CAF-3F5F-9ED06A51B9E0}"/>
+                    </a:ext>
+                  </a:extLst>
+                </p:cNvPr>
+                <p:cNvPicPr/>
+                <p:nvPr/>
+              </p:nvPicPr>
+              <p:blipFill>
+                <a:blip r:embed="rId64"/>
+                <a:stretch>
+                  <a:fillRect/>
+                </a:stretch>
+              </p:blipFill>
+              <p:spPr>
+                <a:xfrm>
+                  <a:off x="775920" y="1115040"/>
+                  <a:ext cx="29160" cy="36000"/>
+                </a:xfrm>
+                <a:prstGeom prst="rect">
+                  <a:avLst/>
+                </a:prstGeom>
+              </p:spPr>
+            </p:pic>
+          </mc:Fallback>
+        </mc:AlternateContent>
+        <mc:AlternateContent xmlns:mc="http://schemas.openxmlformats.org/markup-compatibility/2006">
+          <mc:Choice xmlns:p14="http://schemas.microsoft.com/office/powerpoint/2010/main" Requires="p14">
+            <p:contentPart p14:bwMode="auto" r:id="rId65">
+              <p14:nvContentPartPr>
+                <p14:cNvPr id="18" name="Ink 17">
+                  <a:extLst>
+                    <a:ext uri="{FF2B5EF4-FFF2-40B4-BE49-F238E27FC236}">
+                      <a16:creationId xmlns:a16="http://schemas.microsoft.com/office/drawing/2014/main" id="{7B7CD990-0325-AE09-1795-05FDD3CDA9B2}"/>
+                    </a:ext>
+                  </a:extLst>
+                </p14:cNvPr>
+                <p14:cNvContentPartPr/>
+                <p14:nvPr/>
+              </p14:nvContentPartPr>
+              <p14:xfrm>
+                <a:off x="868080" y="1135200"/>
+                <a:ext cx="59400" cy="74880"/>
+              </p14:xfrm>
+            </p:contentPart>
+          </mc:Choice>
+          <mc:Fallback>
+            <p:pic>
+              <p:nvPicPr>
+                <p:cNvPr id="18" name="Ink 17">
+                  <a:extLst>
+                    <a:ext uri="{FF2B5EF4-FFF2-40B4-BE49-F238E27FC236}">
+                      <a16:creationId xmlns:a16="http://schemas.microsoft.com/office/drawing/2014/main" id="{7B7CD990-0325-AE09-1795-05FDD3CDA9B2}"/>
+                    </a:ext>
+                  </a:extLst>
+                </p:cNvPr>
+                <p:cNvPicPr/>
+                <p:nvPr/>
+              </p:nvPicPr>
+              <p:blipFill>
+                <a:blip r:embed="rId66"/>
+                <a:stretch>
+                  <a:fillRect/>
+                </a:stretch>
+              </p:blipFill>
+              <p:spPr>
+                <a:xfrm>
+                  <a:off x="863760" y="1130880"/>
+                  <a:ext cx="68040" cy="83520"/>
+                </a:xfrm>
+                <a:prstGeom prst="rect">
+                  <a:avLst/>
+                </a:prstGeom>
+              </p:spPr>
+            </p:pic>
+          </mc:Fallback>
+        </mc:AlternateContent>
+        <mc:AlternateContent xmlns:mc="http://schemas.openxmlformats.org/markup-compatibility/2006">
+          <mc:Choice xmlns:p14="http://schemas.microsoft.com/office/powerpoint/2010/main" Requires="p14">
+            <p:contentPart p14:bwMode="auto" r:id="rId67">
+              <p14:nvContentPartPr>
+                <p14:cNvPr id="19" name="Ink 18">
+                  <a:extLst>
+                    <a:ext uri="{FF2B5EF4-FFF2-40B4-BE49-F238E27FC236}">
+                      <a16:creationId xmlns:a16="http://schemas.microsoft.com/office/drawing/2014/main" id="{8CD30440-67F7-1620-ADAC-4DDECAB08BFB}"/>
+                    </a:ext>
+                  </a:extLst>
+                </p14:cNvPr>
+                <p14:cNvContentPartPr/>
+                <p14:nvPr/>
+              </p14:nvContentPartPr>
+              <p14:xfrm>
+                <a:off x="931080" y="1028640"/>
+                <a:ext cx="100800" cy="135000"/>
+              </p14:xfrm>
+            </p:contentPart>
+          </mc:Choice>
+          <mc:Fallback>
+            <p:pic>
+              <p:nvPicPr>
+                <p:cNvPr id="19" name="Ink 18">
+                  <a:extLst>
+                    <a:ext uri="{FF2B5EF4-FFF2-40B4-BE49-F238E27FC236}">
+                      <a16:creationId xmlns:a16="http://schemas.microsoft.com/office/drawing/2014/main" id="{8CD30440-67F7-1620-ADAC-4DDECAB08BFB}"/>
+                    </a:ext>
+                  </a:extLst>
+                </p:cNvPr>
+                <p:cNvPicPr/>
+                <p:nvPr/>
+              </p:nvPicPr>
+              <p:blipFill>
+                <a:blip r:embed="rId68"/>
+                <a:stretch>
+                  <a:fillRect/>
+                </a:stretch>
+              </p:blipFill>
+              <p:spPr>
+                <a:xfrm>
+                  <a:off x="926760" y="1024320"/>
+                  <a:ext cx="109440" cy="143640"/>
+                </a:xfrm>
+                <a:prstGeom prst="rect">
+                  <a:avLst/>
+                </a:prstGeom>
+              </p:spPr>
+            </p:pic>
+          </mc:Fallback>
+        </mc:AlternateContent>
+        <mc:AlternateContent xmlns:mc="http://schemas.openxmlformats.org/markup-compatibility/2006">
+          <mc:Choice xmlns:p14="http://schemas.microsoft.com/office/powerpoint/2010/main" Requires="p14">
+            <p:contentPart p14:bwMode="auto" r:id="rId69">
+              <p14:nvContentPartPr>
+                <p14:cNvPr id="20" name="Ink 19">
+                  <a:extLst>
+                    <a:ext uri="{FF2B5EF4-FFF2-40B4-BE49-F238E27FC236}">
+                      <a16:creationId xmlns:a16="http://schemas.microsoft.com/office/drawing/2014/main" id="{D02D36BD-DCDB-6510-D53B-A9622745AAA5}"/>
+                    </a:ext>
+                  </a:extLst>
+                </p14:cNvPr>
+                <p14:cNvContentPartPr/>
+                <p14:nvPr/>
+              </p14:nvContentPartPr>
+              <p14:xfrm>
+                <a:off x="1045920" y="931440"/>
+                <a:ext cx="11520" cy="41400"/>
+              </p14:xfrm>
+            </p:contentPart>
+          </mc:Choice>
+          <mc:Fallback>
+            <p:pic>
+              <p:nvPicPr>
+                <p:cNvPr id="20" name="Ink 19">
+                  <a:extLst>
+                    <a:ext uri="{FF2B5EF4-FFF2-40B4-BE49-F238E27FC236}">
+                      <a16:creationId xmlns:a16="http://schemas.microsoft.com/office/drawing/2014/main" id="{D02D36BD-DCDB-6510-D53B-A9622745AAA5}"/>
+                    </a:ext>
+                  </a:extLst>
+                </p:cNvPr>
+                <p:cNvPicPr/>
+                <p:nvPr/>
+              </p:nvPicPr>
+              <p:blipFill>
+                <a:blip r:embed="rId70"/>
+                <a:stretch>
+                  <a:fillRect/>
+                </a:stretch>
+              </p:blipFill>
+              <p:spPr>
+                <a:xfrm>
+                  <a:off x="1041600" y="927120"/>
+                  <a:ext cx="20160" cy="50040"/>
+                </a:xfrm>
+                <a:prstGeom prst="rect">
+                  <a:avLst/>
+                </a:prstGeom>
+              </p:spPr>
+            </p:pic>
+          </mc:Fallback>
+        </mc:AlternateContent>
+        <mc:AlternateContent xmlns:mc="http://schemas.openxmlformats.org/markup-compatibility/2006">
+          <mc:Choice xmlns:p14="http://schemas.microsoft.com/office/powerpoint/2010/main" Requires="p14">
+            <p:contentPart p14:bwMode="auto" r:id="rId71">
+              <p14:nvContentPartPr>
+                <p14:cNvPr id="21" name="Ink 20">
+                  <a:extLst>
+                    <a:ext uri="{FF2B5EF4-FFF2-40B4-BE49-F238E27FC236}">
+                      <a16:creationId xmlns:a16="http://schemas.microsoft.com/office/drawing/2014/main" id="{BA642F91-B15E-2567-396C-429424788366}"/>
+                    </a:ext>
+                  </a:extLst>
+                </p14:cNvPr>
+                <p14:cNvContentPartPr/>
+                <p14:nvPr/>
+              </p14:nvContentPartPr>
+              <p14:xfrm>
+                <a:off x="1115040" y="1034760"/>
+                <a:ext cx="5760" cy="26640"/>
+              </p14:xfrm>
+            </p:contentPart>
+          </mc:Choice>
+          <mc:Fallback>
+            <p:pic>
+              <p:nvPicPr>
+                <p:cNvPr id="21" name="Ink 20">
+                  <a:extLst>
+                    <a:ext uri="{FF2B5EF4-FFF2-40B4-BE49-F238E27FC236}">
+                      <a16:creationId xmlns:a16="http://schemas.microsoft.com/office/drawing/2014/main" id="{BA642F91-B15E-2567-396C-429424788366}"/>
+                    </a:ext>
+                  </a:extLst>
+                </p:cNvPr>
+                <p:cNvPicPr/>
+                <p:nvPr/>
+              </p:nvPicPr>
+              <p:blipFill>
+                <a:blip r:embed="rId72"/>
+                <a:stretch>
+                  <a:fillRect/>
+                </a:stretch>
+              </p:blipFill>
+              <p:spPr>
+                <a:xfrm>
+                  <a:off x="1110720" y="1030440"/>
+                  <a:ext cx="14400" cy="35280"/>
+                </a:xfrm>
+                <a:prstGeom prst="rect">
+                  <a:avLst/>
+                </a:prstGeom>
+              </p:spPr>
+            </p:pic>
+          </mc:Fallback>
+        </mc:AlternateContent>
+        <mc:AlternateContent xmlns:mc="http://schemas.openxmlformats.org/markup-compatibility/2006">
+          <mc:Choice xmlns:p14="http://schemas.microsoft.com/office/powerpoint/2010/main" Requires="p14">
+            <p:contentPart p14:bwMode="auto" r:id="rId73">
+              <p14:nvContentPartPr>
+                <p14:cNvPr id="23" name="Ink 22">
+                  <a:extLst>
+                    <a:ext uri="{FF2B5EF4-FFF2-40B4-BE49-F238E27FC236}">
+                      <a16:creationId xmlns:a16="http://schemas.microsoft.com/office/drawing/2014/main" id="{B77C7AEC-6AB5-38B2-EBD2-76D3AE9BBAA3}"/>
+                    </a:ext>
+                  </a:extLst>
+                </p14:cNvPr>
+                <p14:cNvContentPartPr/>
+                <p14:nvPr/>
+              </p14:nvContentPartPr>
+              <p14:xfrm>
+                <a:off x="994440" y="1303680"/>
+                <a:ext cx="80280" cy="87480"/>
+              </p14:xfrm>
+            </p:contentPart>
+          </mc:Choice>
+          <mc:Fallback>
+            <p:pic>
+              <p:nvPicPr>
+                <p:cNvPr id="23" name="Ink 22">
+                  <a:extLst>
+                    <a:ext uri="{FF2B5EF4-FFF2-40B4-BE49-F238E27FC236}">
+                      <a16:creationId xmlns:a16="http://schemas.microsoft.com/office/drawing/2014/main" id="{B77C7AEC-6AB5-38B2-EBD2-76D3AE9BBAA3}"/>
+                    </a:ext>
+                  </a:extLst>
+                </p:cNvPr>
+                <p:cNvPicPr/>
+                <p:nvPr/>
+              </p:nvPicPr>
+              <p:blipFill>
+                <a:blip r:embed="rId74"/>
+                <a:stretch>
+                  <a:fillRect/>
+                </a:stretch>
+              </p:blipFill>
+              <p:spPr>
+                <a:xfrm>
+                  <a:off x="990120" y="1299360"/>
+                  <a:ext cx="88920" cy="96120"/>
+                </a:xfrm>
+                <a:prstGeom prst="rect">
+                  <a:avLst/>
+                </a:prstGeom>
+              </p:spPr>
+            </p:pic>
+          </mc:Fallback>
+        </mc:AlternateContent>
+        <mc:AlternateContent xmlns:mc="http://schemas.openxmlformats.org/markup-compatibility/2006">
+          <mc:Choice xmlns:p14="http://schemas.microsoft.com/office/powerpoint/2010/main" Requires="p14">
+            <p:contentPart p14:bwMode="auto" r:id="rId75">
+              <p14:nvContentPartPr>
+                <p14:cNvPr id="24" name="Ink 23">
+                  <a:extLst>
+                    <a:ext uri="{FF2B5EF4-FFF2-40B4-BE49-F238E27FC236}">
+                      <a16:creationId xmlns:a16="http://schemas.microsoft.com/office/drawing/2014/main" id="{35AFAA3D-47F4-1B34-DF6A-464268EBE99D}"/>
+                    </a:ext>
+                  </a:extLst>
+                </p14:cNvPr>
+                <p14:cNvContentPartPr/>
+                <p14:nvPr/>
+              </p14:nvContentPartPr>
+              <p14:xfrm>
+                <a:off x="961680" y="1182720"/>
+                <a:ext cx="262800" cy="240120"/>
+              </p14:xfrm>
+            </p:contentPart>
+          </mc:Choice>
+          <mc:Fallback>
+            <p:pic>
+              <p:nvPicPr>
+                <p:cNvPr id="24" name="Ink 23">
+                  <a:extLst>
+                    <a:ext uri="{FF2B5EF4-FFF2-40B4-BE49-F238E27FC236}">
+                      <a16:creationId xmlns:a16="http://schemas.microsoft.com/office/drawing/2014/main" id="{35AFAA3D-47F4-1B34-DF6A-464268EBE99D}"/>
+                    </a:ext>
+                  </a:extLst>
+                </p:cNvPr>
+                <p:cNvPicPr/>
+                <p:nvPr/>
+              </p:nvPicPr>
+              <p:blipFill>
+                <a:blip r:embed="rId76"/>
+                <a:stretch>
+                  <a:fillRect/>
+                </a:stretch>
+              </p:blipFill>
+              <p:spPr>
+                <a:xfrm>
+                  <a:off x="957360" y="1178400"/>
+                  <a:ext cx="271440" cy="248760"/>
+                </a:xfrm>
+                <a:prstGeom prst="rect">
+                  <a:avLst/>
+                </a:prstGeom>
+              </p:spPr>
+            </p:pic>
+          </mc:Fallback>
+        </mc:AlternateContent>
+        <mc:AlternateContent xmlns:mc="http://schemas.openxmlformats.org/markup-compatibility/2006">
+          <mc:Choice xmlns:p14="http://schemas.microsoft.com/office/powerpoint/2010/main" Requires="p14">
+            <p:contentPart p14:bwMode="auto" r:id="rId77">
+              <p14:nvContentPartPr>
+                <p14:cNvPr id="26" name="Ink 25">
+                  <a:extLst>
+                    <a:ext uri="{FF2B5EF4-FFF2-40B4-BE49-F238E27FC236}">
+                      <a16:creationId xmlns:a16="http://schemas.microsoft.com/office/drawing/2014/main" id="{7F082CCD-36BC-786D-5465-1F6A6BE633DA}"/>
+                    </a:ext>
+                  </a:extLst>
+                </p14:cNvPr>
+                <p14:cNvContentPartPr/>
+                <p14:nvPr/>
+              </p14:nvContentPartPr>
+              <p14:xfrm>
+                <a:off x="1232400" y="1052760"/>
+                <a:ext cx="88560" cy="123840"/>
+              </p14:xfrm>
+            </p:contentPart>
+          </mc:Choice>
+          <mc:Fallback>
+            <p:pic>
+              <p:nvPicPr>
+                <p:cNvPr id="26" name="Ink 25">
+                  <a:extLst>
+                    <a:ext uri="{FF2B5EF4-FFF2-40B4-BE49-F238E27FC236}">
+                      <a16:creationId xmlns:a16="http://schemas.microsoft.com/office/drawing/2014/main" id="{7F082CCD-36BC-786D-5465-1F6A6BE633DA}"/>
+                    </a:ext>
+                  </a:extLst>
+                </p:cNvPr>
+                <p:cNvPicPr/>
+                <p:nvPr/>
+              </p:nvPicPr>
+              <p:blipFill>
+                <a:blip r:embed="rId78"/>
+                <a:stretch>
+                  <a:fillRect/>
+                </a:stretch>
+              </p:blipFill>
+              <p:spPr>
+                <a:xfrm>
+                  <a:off x="1228080" y="1048440"/>
+                  <a:ext cx="97200" cy="132480"/>
+                </a:xfrm>
+                <a:prstGeom prst="rect">
+                  <a:avLst/>
+                </a:prstGeom>
+              </p:spPr>
+            </p:pic>
+          </mc:Fallback>
+        </mc:AlternateContent>
+        <mc:AlternateContent xmlns:mc="http://schemas.openxmlformats.org/markup-compatibility/2006">
+          <mc:Choice xmlns:p14="http://schemas.microsoft.com/office/powerpoint/2010/main" Requires="p14">
+            <p:contentPart p14:bwMode="auto" r:id="rId79">
+              <p14:nvContentPartPr>
+                <p14:cNvPr id="27" name="Ink 26">
+                  <a:extLst>
+                    <a:ext uri="{FF2B5EF4-FFF2-40B4-BE49-F238E27FC236}">
+                      <a16:creationId xmlns:a16="http://schemas.microsoft.com/office/drawing/2014/main" id="{17BCFD2D-CD0C-CCA8-586D-192A6A17B449}"/>
+                    </a:ext>
+                  </a:extLst>
+                </p14:cNvPr>
+                <p14:cNvContentPartPr/>
+                <p14:nvPr/>
+              </p14:nvContentPartPr>
+              <p14:xfrm>
+                <a:off x="1291800" y="990480"/>
+                <a:ext cx="92160" cy="82440"/>
+              </p14:xfrm>
+            </p:contentPart>
+          </mc:Choice>
+          <mc:Fallback>
+            <p:pic>
+              <p:nvPicPr>
+                <p:cNvPr id="27" name="Ink 26">
+                  <a:extLst>
+                    <a:ext uri="{FF2B5EF4-FFF2-40B4-BE49-F238E27FC236}">
+                      <a16:creationId xmlns:a16="http://schemas.microsoft.com/office/drawing/2014/main" id="{17BCFD2D-CD0C-CCA8-586D-192A6A17B449}"/>
+                    </a:ext>
+                  </a:extLst>
+                </p:cNvPr>
+                <p:cNvPicPr/>
+                <p:nvPr/>
+              </p:nvPicPr>
+              <p:blipFill>
+                <a:blip r:embed="rId80"/>
+                <a:stretch>
+                  <a:fillRect/>
+                </a:stretch>
+              </p:blipFill>
+              <p:spPr>
+                <a:xfrm>
+                  <a:off x="1287480" y="986160"/>
+                  <a:ext cx="100800" cy="91080"/>
+                </a:xfrm>
+                <a:prstGeom prst="rect">
+                  <a:avLst/>
+                </a:prstGeom>
+              </p:spPr>
+            </p:pic>
+          </mc:Fallback>
+        </mc:AlternateContent>
+        <mc:AlternateContent xmlns:mc="http://schemas.openxmlformats.org/markup-compatibility/2006">
+          <mc:Choice xmlns:p14="http://schemas.microsoft.com/office/powerpoint/2010/main" Requires="p14">
+            <p:contentPart p14:bwMode="auto" r:id="rId81">
+              <p14:nvContentPartPr>
+                <p14:cNvPr id="28" name="Ink 27">
+                  <a:extLst>
+                    <a:ext uri="{FF2B5EF4-FFF2-40B4-BE49-F238E27FC236}">
+                      <a16:creationId xmlns:a16="http://schemas.microsoft.com/office/drawing/2014/main" id="{8326D62D-8C91-2D3B-EA32-5F3E569FD1D2}"/>
+                    </a:ext>
+                  </a:extLst>
+                </p14:cNvPr>
+                <p14:cNvContentPartPr/>
+                <p14:nvPr/>
+              </p14:nvContentPartPr>
+              <p14:xfrm>
+                <a:off x="1344000" y="925320"/>
+                <a:ext cx="18000" cy="178560"/>
+              </p14:xfrm>
+            </p:contentPart>
+          </mc:Choice>
+          <mc:Fallback>
+            <p:pic>
+              <p:nvPicPr>
+                <p:cNvPr id="28" name="Ink 27">
+                  <a:extLst>
+                    <a:ext uri="{FF2B5EF4-FFF2-40B4-BE49-F238E27FC236}">
+                      <a16:creationId xmlns:a16="http://schemas.microsoft.com/office/drawing/2014/main" id="{8326D62D-8C91-2D3B-EA32-5F3E569FD1D2}"/>
+                    </a:ext>
+                  </a:extLst>
+                </p:cNvPr>
+                <p:cNvPicPr/>
+                <p:nvPr/>
+              </p:nvPicPr>
+              <p:blipFill>
+                <a:blip r:embed="rId82"/>
+                <a:stretch>
+                  <a:fillRect/>
+                </a:stretch>
+              </p:blipFill>
+              <p:spPr>
+                <a:xfrm>
+                  <a:off x="1339680" y="921000"/>
+                  <a:ext cx="26640" cy="187200"/>
+                </a:xfrm>
+                <a:prstGeom prst="rect">
+                  <a:avLst/>
+                </a:prstGeom>
+              </p:spPr>
+            </p:pic>
+          </mc:Fallback>
+        </mc:AlternateContent>
+        <mc:AlternateContent xmlns:mc="http://schemas.openxmlformats.org/markup-compatibility/2006">
+          <mc:Choice xmlns:p14="http://schemas.microsoft.com/office/powerpoint/2010/main" Requires="p14">
+            <p:contentPart p14:bwMode="auto" r:id="rId83">
+              <p14:nvContentPartPr>
+                <p14:cNvPr id="29" name="Ink 28">
+                  <a:extLst>
+                    <a:ext uri="{FF2B5EF4-FFF2-40B4-BE49-F238E27FC236}">
+                      <a16:creationId xmlns:a16="http://schemas.microsoft.com/office/drawing/2014/main" id="{092FB9D7-C13C-8AB9-68E2-E46D831CFF8F}"/>
+                    </a:ext>
+                  </a:extLst>
+                </p14:cNvPr>
+                <p14:cNvContentPartPr/>
+                <p14:nvPr/>
+              </p14:nvContentPartPr>
+              <p14:xfrm>
+                <a:off x="1364880" y="850080"/>
+                <a:ext cx="87840" cy="189000"/>
+              </p14:xfrm>
+            </p:contentPart>
+          </mc:Choice>
+          <mc:Fallback>
+            <p:pic>
+              <p:nvPicPr>
+                <p:cNvPr id="29" name="Ink 28">
+                  <a:extLst>
+                    <a:ext uri="{FF2B5EF4-FFF2-40B4-BE49-F238E27FC236}">
+                      <a16:creationId xmlns:a16="http://schemas.microsoft.com/office/drawing/2014/main" id="{092FB9D7-C13C-8AB9-68E2-E46D831CFF8F}"/>
+                    </a:ext>
+                  </a:extLst>
+                </p:cNvPr>
+                <p:cNvPicPr/>
+                <p:nvPr/>
+              </p:nvPicPr>
+              <p:blipFill>
+                <a:blip r:embed="rId84"/>
+                <a:stretch>
+                  <a:fillRect/>
+                </a:stretch>
+              </p:blipFill>
+              <p:spPr>
+                <a:xfrm>
+                  <a:off x="1360560" y="845760"/>
+                  <a:ext cx="96480" cy="197640"/>
+                </a:xfrm>
+                <a:prstGeom prst="rect">
+                  <a:avLst/>
+                </a:prstGeom>
+              </p:spPr>
+            </p:pic>
+          </mc:Fallback>
+        </mc:AlternateContent>
+        <mc:AlternateContent xmlns:mc="http://schemas.openxmlformats.org/markup-compatibility/2006">
+          <mc:Choice xmlns:p14="http://schemas.microsoft.com/office/powerpoint/2010/main" Requires="p14">
+            <p:contentPart p14:bwMode="auto" r:id="rId85">
+              <p14:nvContentPartPr>
+                <p14:cNvPr id="38" name="Ink 37">
+                  <a:extLst>
+                    <a:ext uri="{FF2B5EF4-FFF2-40B4-BE49-F238E27FC236}">
+                      <a16:creationId xmlns:a16="http://schemas.microsoft.com/office/drawing/2014/main" id="{3B153DC8-572D-F932-937C-E25031E53AAC}"/>
+                    </a:ext>
+                  </a:extLst>
+                </p14:cNvPr>
+                <p14:cNvContentPartPr/>
+                <p14:nvPr/>
+              </p14:nvContentPartPr>
+              <p14:xfrm>
+                <a:off x="1350120" y="1288200"/>
+                <a:ext cx="66240" cy="105480"/>
+              </p14:xfrm>
+            </p:contentPart>
+          </mc:Choice>
+          <mc:Fallback>
+            <p:pic>
+              <p:nvPicPr>
+                <p:cNvPr id="38" name="Ink 37">
+                  <a:extLst>
+                    <a:ext uri="{FF2B5EF4-FFF2-40B4-BE49-F238E27FC236}">
+                      <a16:creationId xmlns:a16="http://schemas.microsoft.com/office/drawing/2014/main" id="{3B153DC8-572D-F932-937C-E25031E53AAC}"/>
+                    </a:ext>
+                  </a:extLst>
+                </p:cNvPr>
+                <p:cNvPicPr/>
+                <p:nvPr/>
+              </p:nvPicPr>
+              <p:blipFill>
+                <a:blip r:embed="rId86"/>
+                <a:stretch>
+                  <a:fillRect/>
+                </a:stretch>
+              </p:blipFill>
+              <p:spPr>
+                <a:xfrm>
+                  <a:off x="1345800" y="1283880"/>
+                  <a:ext cx="74880" cy="114120"/>
+                </a:xfrm>
+                <a:prstGeom prst="rect">
+                  <a:avLst/>
+                </a:prstGeom>
+              </p:spPr>
+            </p:pic>
+          </mc:Fallback>
+        </mc:AlternateContent>
+        <mc:AlternateContent xmlns:mc="http://schemas.openxmlformats.org/markup-compatibility/2006">
+          <mc:Choice xmlns:p14="http://schemas.microsoft.com/office/powerpoint/2010/main" Requires="p14">
+            <p:contentPart p14:bwMode="auto" r:id="rId87">
+              <p14:nvContentPartPr>
+                <p14:cNvPr id="49" name="Ink 48">
+                  <a:extLst>
+                    <a:ext uri="{FF2B5EF4-FFF2-40B4-BE49-F238E27FC236}">
+                      <a16:creationId xmlns:a16="http://schemas.microsoft.com/office/drawing/2014/main" id="{DC6349FD-5E09-EA0F-DB0A-2F17B32F5481}"/>
+                    </a:ext>
+                  </a:extLst>
+                </p14:cNvPr>
+                <p14:cNvContentPartPr/>
+                <p14:nvPr/>
+              </p14:nvContentPartPr>
+              <p14:xfrm>
+                <a:off x="1326000" y="1229520"/>
+                <a:ext cx="61200" cy="111240"/>
+              </p14:xfrm>
+            </p:contentPart>
+          </mc:Choice>
+          <mc:Fallback>
+            <p:pic>
+              <p:nvPicPr>
+                <p:cNvPr id="49" name="Ink 48">
+                  <a:extLst>
+                    <a:ext uri="{FF2B5EF4-FFF2-40B4-BE49-F238E27FC236}">
+                      <a16:creationId xmlns:a16="http://schemas.microsoft.com/office/drawing/2014/main" id="{DC6349FD-5E09-EA0F-DB0A-2F17B32F5481}"/>
+                    </a:ext>
+                  </a:extLst>
+                </p:cNvPr>
+                <p:cNvPicPr/>
+                <p:nvPr/>
+              </p:nvPicPr>
+              <p:blipFill>
+                <a:blip r:embed="rId88"/>
+                <a:stretch>
+                  <a:fillRect/>
+                </a:stretch>
+              </p:blipFill>
+              <p:spPr>
+                <a:xfrm>
+                  <a:off x="1321680" y="1225200"/>
+                  <a:ext cx="69840" cy="119880"/>
+                </a:xfrm>
+                <a:prstGeom prst="rect">
+                  <a:avLst/>
+                </a:prstGeom>
+              </p:spPr>
+            </p:pic>
+          </mc:Fallback>
+        </mc:AlternateContent>
+        <mc:AlternateContent xmlns:mc="http://schemas.openxmlformats.org/markup-compatibility/2006">
+          <mc:Choice xmlns:p14="http://schemas.microsoft.com/office/powerpoint/2010/main" Requires="p14">
+            <p:contentPart p14:bwMode="auto" r:id="rId89">
+              <p14:nvContentPartPr>
+                <p14:cNvPr id="50" name="Ink 49">
+                  <a:extLst>
+                    <a:ext uri="{FF2B5EF4-FFF2-40B4-BE49-F238E27FC236}">
+                      <a16:creationId xmlns:a16="http://schemas.microsoft.com/office/drawing/2014/main" id="{9427668E-59EA-F46F-42D3-7129B2E2B58C}"/>
+                    </a:ext>
+                  </a:extLst>
+                </p14:cNvPr>
+                <p14:cNvContentPartPr/>
+                <p14:nvPr/>
+              </p14:nvContentPartPr>
+              <p14:xfrm>
+                <a:off x="1377840" y="1149600"/>
+                <a:ext cx="72000" cy="137880"/>
+              </p14:xfrm>
+            </p:contentPart>
+          </mc:Choice>
+          <mc:Fallback>
+            <p:pic>
+              <p:nvPicPr>
+                <p:cNvPr id="50" name="Ink 49">
+                  <a:extLst>
+                    <a:ext uri="{FF2B5EF4-FFF2-40B4-BE49-F238E27FC236}">
+                      <a16:creationId xmlns:a16="http://schemas.microsoft.com/office/drawing/2014/main" id="{9427668E-59EA-F46F-42D3-7129B2E2B58C}"/>
+                    </a:ext>
+                  </a:extLst>
+                </p:cNvPr>
+                <p:cNvPicPr/>
+                <p:nvPr/>
+              </p:nvPicPr>
+              <p:blipFill>
+                <a:blip r:embed="rId90"/>
+                <a:stretch>
+                  <a:fillRect/>
+                </a:stretch>
+              </p:blipFill>
+              <p:spPr>
+                <a:xfrm>
+                  <a:off x="1373520" y="1145280"/>
+                  <a:ext cx="80640" cy="146520"/>
+                </a:xfrm>
+                <a:prstGeom prst="rect">
+                  <a:avLst/>
+                </a:prstGeom>
+              </p:spPr>
+            </p:pic>
+          </mc:Fallback>
+        </mc:AlternateContent>
+        <mc:AlternateContent xmlns:mc="http://schemas.openxmlformats.org/markup-compatibility/2006">
+          <mc:Choice xmlns:p14="http://schemas.microsoft.com/office/powerpoint/2010/main" Requires="p14">
+            <p:contentPart p14:bwMode="auto" r:id="rId91">
+              <p14:nvContentPartPr>
+                <p14:cNvPr id="51" name="Ink 50">
+                  <a:extLst>
+                    <a:ext uri="{FF2B5EF4-FFF2-40B4-BE49-F238E27FC236}">
+                      <a16:creationId xmlns:a16="http://schemas.microsoft.com/office/drawing/2014/main" id="{6EFE6A8C-AC6B-E765-611D-6A9214ACE94F}"/>
+                    </a:ext>
+                  </a:extLst>
+                </p14:cNvPr>
+                <p14:cNvContentPartPr/>
+                <p14:nvPr/>
+              </p14:nvContentPartPr>
+              <p14:xfrm>
+                <a:off x="1488720" y="1125480"/>
+                <a:ext cx="48240" cy="82440"/>
+              </p14:xfrm>
+            </p:contentPart>
+          </mc:Choice>
+          <mc:Fallback>
+            <p:pic>
+              <p:nvPicPr>
+                <p:cNvPr id="51" name="Ink 50">
+                  <a:extLst>
+                    <a:ext uri="{FF2B5EF4-FFF2-40B4-BE49-F238E27FC236}">
+                      <a16:creationId xmlns:a16="http://schemas.microsoft.com/office/drawing/2014/main" id="{6EFE6A8C-AC6B-E765-611D-6A9214ACE94F}"/>
+                    </a:ext>
+                  </a:extLst>
+                </p:cNvPr>
+                <p:cNvPicPr/>
+                <p:nvPr/>
+              </p:nvPicPr>
+              <p:blipFill>
+                <a:blip r:embed="rId92"/>
+                <a:stretch>
+                  <a:fillRect/>
+                </a:stretch>
+              </p:blipFill>
+              <p:spPr>
+                <a:xfrm>
+                  <a:off x="1484400" y="1121160"/>
+                  <a:ext cx="56880" cy="91080"/>
+                </a:xfrm>
+                <a:prstGeom prst="rect">
+                  <a:avLst/>
+                </a:prstGeom>
+              </p:spPr>
+            </p:pic>
+          </mc:Fallback>
+        </mc:AlternateContent>
+        <mc:AlternateContent xmlns:mc="http://schemas.openxmlformats.org/markup-compatibility/2006">
+          <mc:Choice xmlns:p14="http://schemas.microsoft.com/office/powerpoint/2010/main" Requires="p14">
+            <p:contentPart p14:bwMode="auto" r:id="rId93">
+              <p14:nvContentPartPr>
+                <p14:cNvPr id="52" name="Ink 51">
+                  <a:extLst>
+                    <a:ext uri="{FF2B5EF4-FFF2-40B4-BE49-F238E27FC236}">
+                      <a16:creationId xmlns:a16="http://schemas.microsoft.com/office/drawing/2014/main" id="{A2A94533-E934-6A6F-AA8B-B800AE8B5769}"/>
+                    </a:ext>
+                  </a:extLst>
+                </p14:cNvPr>
+                <p14:cNvContentPartPr/>
+                <p14:nvPr/>
+              </p14:nvContentPartPr>
+              <p14:xfrm>
+                <a:off x="1452720" y="1081200"/>
+                <a:ext cx="14400" cy="10800"/>
+              </p14:xfrm>
+            </p:contentPart>
+          </mc:Choice>
+          <mc:Fallback>
+            <p:pic>
+              <p:nvPicPr>
+                <p:cNvPr id="52" name="Ink 51">
+                  <a:extLst>
+                    <a:ext uri="{FF2B5EF4-FFF2-40B4-BE49-F238E27FC236}">
+                      <a16:creationId xmlns:a16="http://schemas.microsoft.com/office/drawing/2014/main" id="{A2A94533-E934-6A6F-AA8B-B800AE8B5769}"/>
+                    </a:ext>
+                  </a:extLst>
+                </p:cNvPr>
+                <p:cNvPicPr/>
+                <p:nvPr/>
+              </p:nvPicPr>
+              <p:blipFill>
+                <a:blip r:embed="rId94"/>
+                <a:stretch>
+                  <a:fillRect/>
+                </a:stretch>
+              </p:blipFill>
+              <p:spPr>
+                <a:xfrm>
+                  <a:off x="1448400" y="1076880"/>
+                  <a:ext cx="23040" cy="19440"/>
+                </a:xfrm>
+                <a:prstGeom prst="rect">
+                  <a:avLst/>
+                </a:prstGeom>
+              </p:spPr>
+            </p:pic>
+          </mc:Fallback>
+        </mc:AlternateContent>
+        <mc:AlternateContent xmlns:mc="http://schemas.openxmlformats.org/markup-compatibility/2006">
+          <mc:Choice xmlns:p14="http://schemas.microsoft.com/office/powerpoint/2010/main" Requires="p14">
+            <p:contentPart p14:bwMode="auto" r:id="rId95">
+              <p14:nvContentPartPr>
+                <p14:cNvPr id="53" name="Ink 52">
+                  <a:extLst>
+                    <a:ext uri="{FF2B5EF4-FFF2-40B4-BE49-F238E27FC236}">
+                      <a16:creationId xmlns:a16="http://schemas.microsoft.com/office/drawing/2014/main" id="{2C9DC3CA-96F8-9318-690D-8CB169279A90}"/>
+                    </a:ext>
+                  </a:extLst>
+                </p14:cNvPr>
+                <p14:cNvContentPartPr/>
+                <p14:nvPr/>
+              </p14:nvContentPartPr>
+              <p14:xfrm>
+                <a:off x="1537680" y="1050960"/>
+                <a:ext cx="60480" cy="91800"/>
+              </p14:xfrm>
+            </p:contentPart>
+          </mc:Choice>
+          <mc:Fallback>
+            <p:pic>
+              <p:nvPicPr>
+                <p:cNvPr id="53" name="Ink 52">
+                  <a:extLst>
+                    <a:ext uri="{FF2B5EF4-FFF2-40B4-BE49-F238E27FC236}">
+                      <a16:creationId xmlns:a16="http://schemas.microsoft.com/office/drawing/2014/main" id="{2C9DC3CA-96F8-9318-690D-8CB169279A90}"/>
+                    </a:ext>
+                  </a:extLst>
+                </p:cNvPr>
+                <p:cNvPicPr/>
+                <p:nvPr/>
+              </p:nvPicPr>
+              <p:blipFill>
+                <a:blip r:embed="rId96"/>
+                <a:stretch>
+                  <a:fillRect/>
+                </a:stretch>
+              </p:blipFill>
+              <p:spPr>
+                <a:xfrm>
+                  <a:off x="1533360" y="1046640"/>
+                  <a:ext cx="69120" cy="100440"/>
+                </a:xfrm>
+                <a:prstGeom prst="rect">
+                  <a:avLst/>
+                </a:prstGeom>
+              </p:spPr>
+            </p:pic>
+          </mc:Fallback>
+        </mc:AlternateContent>
+        <mc:AlternateContent xmlns:mc="http://schemas.openxmlformats.org/markup-compatibility/2006">
+          <mc:Choice xmlns:p14="http://schemas.microsoft.com/office/powerpoint/2010/main" Requires="p14">
+            <p:contentPart p14:bwMode="auto" r:id="rId97">
+              <p14:nvContentPartPr>
+                <p14:cNvPr id="54" name="Ink 53">
+                  <a:extLst>
+                    <a:ext uri="{FF2B5EF4-FFF2-40B4-BE49-F238E27FC236}">
+                      <a16:creationId xmlns:a16="http://schemas.microsoft.com/office/drawing/2014/main" id="{50A7FBEC-858E-001F-2216-0E0617CC9377}"/>
+                    </a:ext>
+                  </a:extLst>
+                </p14:cNvPr>
+                <p14:cNvContentPartPr/>
+                <p14:nvPr/>
+              </p14:nvContentPartPr>
+              <p14:xfrm>
+                <a:off x="1582320" y="946200"/>
+                <a:ext cx="46800" cy="146880"/>
+              </p14:xfrm>
+            </p:contentPart>
+          </mc:Choice>
+          <mc:Fallback>
+            <p:pic>
+              <p:nvPicPr>
+                <p:cNvPr id="54" name="Ink 53">
+                  <a:extLst>
+                    <a:ext uri="{FF2B5EF4-FFF2-40B4-BE49-F238E27FC236}">
+                      <a16:creationId xmlns:a16="http://schemas.microsoft.com/office/drawing/2014/main" id="{50A7FBEC-858E-001F-2216-0E0617CC9377}"/>
+                    </a:ext>
+                  </a:extLst>
+                </p:cNvPr>
+                <p:cNvPicPr/>
+                <p:nvPr/>
+              </p:nvPicPr>
+              <p:blipFill>
+                <a:blip r:embed="rId98"/>
+                <a:stretch>
+                  <a:fillRect/>
+                </a:stretch>
+              </p:blipFill>
+              <p:spPr>
+                <a:xfrm>
+                  <a:off x="1578000" y="941880"/>
+                  <a:ext cx="55440" cy="155520"/>
+                </a:xfrm>
+                <a:prstGeom prst="rect">
+                  <a:avLst/>
+                </a:prstGeom>
+              </p:spPr>
+            </p:pic>
+          </mc:Fallback>
+        </mc:AlternateContent>
+        <mc:AlternateContent xmlns:mc="http://schemas.openxmlformats.org/markup-compatibility/2006">
+          <mc:Choice xmlns:p14="http://schemas.microsoft.com/office/powerpoint/2010/main" Requires="p14">
+            <p:contentPart p14:bwMode="auto" r:id="rId99">
+              <p14:nvContentPartPr>
+                <p14:cNvPr id="55" name="Ink 54">
+                  <a:extLst>
+                    <a:ext uri="{FF2B5EF4-FFF2-40B4-BE49-F238E27FC236}">
+                      <a16:creationId xmlns:a16="http://schemas.microsoft.com/office/drawing/2014/main" id="{0D3F331F-97F9-A065-6322-FF73330C851F}"/>
+                    </a:ext>
+                  </a:extLst>
+                </p14:cNvPr>
+                <p14:cNvContentPartPr/>
+                <p14:nvPr/>
+              </p14:nvContentPartPr>
+              <p14:xfrm>
+                <a:off x="1743240" y="760800"/>
+                <a:ext cx="135360" cy="171720"/>
+              </p14:xfrm>
+            </p:contentPart>
+          </mc:Choice>
+          <mc:Fallback>
+            <p:pic>
+              <p:nvPicPr>
+                <p:cNvPr id="55" name="Ink 54">
+                  <a:extLst>
+                    <a:ext uri="{FF2B5EF4-FFF2-40B4-BE49-F238E27FC236}">
+                      <a16:creationId xmlns:a16="http://schemas.microsoft.com/office/drawing/2014/main" id="{0D3F331F-97F9-A065-6322-FF73330C851F}"/>
+                    </a:ext>
+                  </a:extLst>
+                </p:cNvPr>
+                <p:cNvPicPr/>
+                <p:nvPr/>
+              </p:nvPicPr>
+              <p:blipFill>
+                <a:blip r:embed="rId100"/>
+                <a:stretch>
+                  <a:fillRect/>
+                </a:stretch>
+              </p:blipFill>
+              <p:spPr>
+                <a:xfrm>
+                  <a:off x="1738920" y="756480"/>
+                  <a:ext cx="144000" cy="180360"/>
+                </a:xfrm>
+                <a:prstGeom prst="rect">
+                  <a:avLst/>
+                </a:prstGeom>
+              </p:spPr>
+            </p:pic>
+          </mc:Fallback>
+        </mc:AlternateContent>
+        <mc:AlternateContent xmlns:mc="http://schemas.openxmlformats.org/markup-compatibility/2006">
+          <mc:Choice xmlns:p14="http://schemas.microsoft.com/office/powerpoint/2010/main" Requires="p14">
+            <p:contentPart p14:bwMode="auto" r:id="rId101">
+              <p14:nvContentPartPr>
+                <p14:cNvPr id="56" name="Ink 55">
+                  <a:extLst>
+                    <a:ext uri="{FF2B5EF4-FFF2-40B4-BE49-F238E27FC236}">
+                      <a16:creationId xmlns:a16="http://schemas.microsoft.com/office/drawing/2014/main" id="{EEC3A1C2-7470-90C2-8456-5C3199C40680}"/>
+                    </a:ext>
+                  </a:extLst>
+                </p14:cNvPr>
+                <p14:cNvContentPartPr/>
+                <p14:nvPr/>
+              </p14:nvContentPartPr>
+              <p14:xfrm>
+                <a:off x="1575120" y="1271280"/>
+                <a:ext cx="95040" cy="135360"/>
+              </p14:xfrm>
+            </p:contentPart>
+          </mc:Choice>
+          <mc:Fallback>
+            <p:pic>
+              <p:nvPicPr>
+                <p:cNvPr id="56" name="Ink 55">
+                  <a:extLst>
+                    <a:ext uri="{FF2B5EF4-FFF2-40B4-BE49-F238E27FC236}">
+                      <a16:creationId xmlns:a16="http://schemas.microsoft.com/office/drawing/2014/main" id="{EEC3A1C2-7470-90C2-8456-5C3199C40680}"/>
+                    </a:ext>
+                  </a:extLst>
+                </p:cNvPr>
+                <p:cNvPicPr/>
+                <p:nvPr/>
+              </p:nvPicPr>
+              <p:blipFill>
+                <a:blip r:embed="rId102"/>
+                <a:stretch>
+                  <a:fillRect/>
+                </a:stretch>
+              </p:blipFill>
+              <p:spPr>
+                <a:xfrm>
+                  <a:off x="1570800" y="1266960"/>
+                  <a:ext cx="103680" cy="144000"/>
+                </a:xfrm>
+                <a:prstGeom prst="rect">
+                  <a:avLst/>
+                </a:prstGeom>
+              </p:spPr>
+            </p:pic>
+          </mc:Fallback>
+        </mc:AlternateContent>
+        <mc:AlternateContent xmlns:mc="http://schemas.openxmlformats.org/markup-compatibility/2006">
+          <mc:Choice xmlns:p14="http://schemas.microsoft.com/office/powerpoint/2010/main" Requires="p14">
+            <p:contentPart p14:bwMode="auto" r:id="rId103">
+              <p14:nvContentPartPr>
+                <p14:cNvPr id="57" name="Ink 56">
+                  <a:extLst>
+                    <a:ext uri="{FF2B5EF4-FFF2-40B4-BE49-F238E27FC236}">
+                      <a16:creationId xmlns:a16="http://schemas.microsoft.com/office/drawing/2014/main" id="{3A3B3BC3-5AFB-F8E5-C86D-4FF5DC265537}"/>
+                    </a:ext>
+                  </a:extLst>
+                </p14:cNvPr>
+                <p14:cNvContentPartPr/>
+                <p14:nvPr/>
+              </p14:nvContentPartPr>
+              <p14:xfrm>
+                <a:off x="1560000" y="1189560"/>
+                <a:ext cx="219240" cy="208440"/>
+              </p14:xfrm>
+            </p:contentPart>
+          </mc:Choice>
+          <mc:Fallback>
+            <p:pic>
+              <p:nvPicPr>
+                <p:cNvPr id="57" name="Ink 56">
+                  <a:extLst>
+                    <a:ext uri="{FF2B5EF4-FFF2-40B4-BE49-F238E27FC236}">
+                      <a16:creationId xmlns:a16="http://schemas.microsoft.com/office/drawing/2014/main" id="{3A3B3BC3-5AFB-F8E5-C86D-4FF5DC265537}"/>
+                    </a:ext>
+                  </a:extLst>
+                </p:cNvPr>
+                <p:cNvPicPr/>
+                <p:nvPr/>
+              </p:nvPicPr>
+              <p:blipFill>
+                <a:blip r:embed="rId104"/>
+                <a:stretch>
+                  <a:fillRect/>
+                </a:stretch>
+              </p:blipFill>
+              <p:spPr>
+                <a:xfrm>
+                  <a:off x="1555680" y="1185240"/>
+                  <a:ext cx="227880" cy="217080"/>
+                </a:xfrm>
+                <a:prstGeom prst="rect">
+                  <a:avLst/>
+                </a:prstGeom>
+              </p:spPr>
+            </p:pic>
+          </mc:Fallback>
+        </mc:AlternateContent>
+        <mc:AlternateContent xmlns:mc="http://schemas.openxmlformats.org/markup-compatibility/2006">
+          <mc:Choice xmlns:p14="http://schemas.microsoft.com/office/powerpoint/2010/main" Requires="p14">
+            <p:contentPart p14:bwMode="auto" r:id="rId105">
+              <p14:nvContentPartPr>
+                <p14:cNvPr id="62" name="Ink 61">
+                  <a:extLst>
+                    <a:ext uri="{FF2B5EF4-FFF2-40B4-BE49-F238E27FC236}">
+                      <a16:creationId xmlns:a16="http://schemas.microsoft.com/office/drawing/2014/main" id="{86B662B9-7812-AA13-07E0-093303F0691F}"/>
+                    </a:ext>
+                  </a:extLst>
+                </p14:cNvPr>
+                <p14:cNvContentPartPr/>
+                <p14:nvPr/>
+              </p14:nvContentPartPr>
+              <p14:xfrm>
+                <a:off x="1800480" y="960240"/>
+                <a:ext cx="191520" cy="194760"/>
+              </p14:xfrm>
+            </p:contentPart>
+          </mc:Choice>
+          <mc:Fallback>
+            <p:pic>
+              <p:nvPicPr>
+                <p:cNvPr id="62" name="Ink 61">
+                  <a:extLst>
+                    <a:ext uri="{FF2B5EF4-FFF2-40B4-BE49-F238E27FC236}">
+                      <a16:creationId xmlns:a16="http://schemas.microsoft.com/office/drawing/2014/main" id="{86B662B9-7812-AA13-07E0-093303F0691F}"/>
+                    </a:ext>
+                  </a:extLst>
+                </p:cNvPr>
+                <p:cNvPicPr/>
+                <p:nvPr/>
+              </p:nvPicPr>
+              <p:blipFill>
+                <a:blip r:embed="rId106"/>
+                <a:stretch>
+                  <a:fillRect/>
+                </a:stretch>
+              </p:blipFill>
+              <p:spPr>
+                <a:xfrm>
+                  <a:off x="1796160" y="955920"/>
+                  <a:ext cx="200160" cy="203400"/>
+                </a:xfrm>
+                <a:prstGeom prst="rect">
+                  <a:avLst/>
+                </a:prstGeom>
+              </p:spPr>
+            </p:pic>
+          </mc:Fallback>
+        </mc:AlternateContent>
+        <mc:AlternateContent xmlns:mc="http://schemas.openxmlformats.org/markup-compatibility/2006">
+          <mc:Choice xmlns:p14="http://schemas.microsoft.com/office/powerpoint/2010/main" Requires="p14">
+            <p:contentPart p14:bwMode="auto" r:id="rId107">
+              <p14:nvContentPartPr>
+                <p14:cNvPr id="63" name="Ink 62">
+                  <a:extLst>
+                    <a:ext uri="{FF2B5EF4-FFF2-40B4-BE49-F238E27FC236}">
+                      <a16:creationId xmlns:a16="http://schemas.microsoft.com/office/drawing/2014/main" id="{B5017726-C420-C526-BBB8-8222FB102A13}"/>
+                    </a:ext>
+                  </a:extLst>
+                </p14:cNvPr>
+                <p14:cNvContentPartPr/>
+                <p14:nvPr/>
+              </p14:nvContentPartPr>
+              <p14:xfrm>
+                <a:off x="1934400" y="919560"/>
+                <a:ext cx="81000" cy="100080"/>
+              </p14:xfrm>
+            </p:contentPart>
+          </mc:Choice>
+          <mc:Fallback>
+            <p:pic>
+              <p:nvPicPr>
+                <p:cNvPr id="63" name="Ink 62">
+                  <a:extLst>
+                    <a:ext uri="{FF2B5EF4-FFF2-40B4-BE49-F238E27FC236}">
+                      <a16:creationId xmlns:a16="http://schemas.microsoft.com/office/drawing/2014/main" id="{B5017726-C420-C526-BBB8-8222FB102A13}"/>
+                    </a:ext>
+                  </a:extLst>
+                </p:cNvPr>
+                <p:cNvPicPr/>
+                <p:nvPr/>
+              </p:nvPicPr>
+              <p:blipFill>
+                <a:blip r:embed="rId108"/>
+                <a:stretch>
+                  <a:fillRect/>
+                </a:stretch>
+              </p:blipFill>
+              <p:spPr>
+                <a:xfrm>
+                  <a:off x="1930080" y="915240"/>
+                  <a:ext cx="89640" cy="108720"/>
+                </a:xfrm>
+                <a:prstGeom prst="rect">
+                  <a:avLst/>
+                </a:prstGeom>
+              </p:spPr>
+            </p:pic>
+          </mc:Fallback>
+        </mc:AlternateContent>
+        <mc:AlternateContent xmlns:mc="http://schemas.openxmlformats.org/markup-compatibility/2006">
+          <mc:Choice xmlns:p14="http://schemas.microsoft.com/office/powerpoint/2010/main" Requires="p14">
+            <p:contentPart p14:bwMode="auto" r:id="rId109">
+              <p14:nvContentPartPr>
+                <p14:cNvPr id="64" name="Ink 63">
+                  <a:extLst>
+                    <a:ext uri="{FF2B5EF4-FFF2-40B4-BE49-F238E27FC236}">
+                      <a16:creationId xmlns:a16="http://schemas.microsoft.com/office/drawing/2014/main" id="{395774D0-89F9-1D5B-F9FB-521D63EFE497}"/>
+                    </a:ext>
+                  </a:extLst>
+                </p14:cNvPr>
+                <p14:cNvContentPartPr/>
+                <p14:nvPr/>
+              </p14:nvContentPartPr>
+              <p14:xfrm>
+                <a:off x="1936200" y="860880"/>
+                <a:ext cx="152280" cy="135000"/>
+              </p14:xfrm>
+            </p:contentPart>
+          </mc:Choice>
+          <mc:Fallback>
+            <p:pic>
+              <p:nvPicPr>
+                <p:cNvPr id="64" name="Ink 63">
+                  <a:extLst>
+                    <a:ext uri="{FF2B5EF4-FFF2-40B4-BE49-F238E27FC236}">
+                      <a16:creationId xmlns:a16="http://schemas.microsoft.com/office/drawing/2014/main" id="{395774D0-89F9-1D5B-F9FB-521D63EFE497}"/>
+                    </a:ext>
+                  </a:extLst>
+                </p:cNvPr>
+                <p:cNvPicPr/>
+                <p:nvPr/>
+              </p:nvPicPr>
+              <p:blipFill>
+                <a:blip r:embed="rId110"/>
+                <a:stretch>
+                  <a:fillRect/>
+                </a:stretch>
+              </p:blipFill>
+              <p:spPr>
+                <a:xfrm>
+                  <a:off x="1931880" y="856560"/>
+                  <a:ext cx="160920" cy="143640"/>
+                </a:xfrm>
+                <a:prstGeom prst="rect">
+                  <a:avLst/>
+                </a:prstGeom>
+              </p:spPr>
+            </p:pic>
+          </mc:Fallback>
+        </mc:AlternateContent>
+        <mc:AlternateContent xmlns:mc="http://schemas.openxmlformats.org/markup-compatibility/2006">
+          <mc:Choice xmlns:p14="http://schemas.microsoft.com/office/powerpoint/2010/main" Requires="p14">
+            <p:contentPart p14:bwMode="auto" r:id="rId111">
+              <p14:nvContentPartPr>
+                <p14:cNvPr id="65" name="Ink 64">
+                  <a:extLst>
+                    <a:ext uri="{FF2B5EF4-FFF2-40B4-BE49-F238E27FC236}">
+                      <a16:creationId xmlns:a16="http://schemas.microsoft.com/office/drawing/2014/main" id="{478B6071-C53E-DEE8-5576-38A5EFACAA66}"/>
+                    </a:ext>
+                  </a:extLst>
+                </p14:cNvPr>
+                <p14:cNvContentPartPr/>
+                <p14:nvPr/>
+              </p14:nvContentPartPr>
+              <p14:xfrm>
+                <a:off x="2047080" y="730560"/>
+                <a:ext cx="95040" cy="150840"/>
+              </p14:xfrm>
+            </p:contentPart>
+          </mc:Choice>
+          <mc:Fallback>
+            <p:pic>
+              <p:nvPicPr>
+                <p:cNvPr id="65" name="Ink 64">
+                  <a:extLst>
+                    <a:ext uri="{FF2B5EF4-FFF2-40B4-BE49-F238E27FC236}">
+                      <a16:creationId xmlns:a16="http://schemas.microsoft.com/office/drawing/2014/main" id="{478B6071-C53E-DEE8-5576-38A5EFACAA66}"/>
+                    </a:ext>
+                  </a:extLst>
+                </p:cNvPr>
+                <p:cNvPicPr/>
+                <p:nvPr/>
+              </p:nvPicPr>
+              <p:blipFill>
+                <a:blip r:embed="rId112"/>
+                <a:stretch>
+                  <a:fillRect/>
+                </a:stretch>
+              </p:blipFill>
+              <p:spPr>
+                <a:xfrm>
+                  <a:off x="2042760" y="726240"/>
+                  <a:ext cx="103680" cy="159480"/>
+                </a:xfrm>
+                <a:prstGeom prst="rect">
+                  <a:avLst/>
+                </a:prstGeom>
+              </p:spPr>
+            </p:pic>
+          </mc:Fallback>
+        </mc:AlternateContent>
+        <mc:AlternateContent xmlns:mc="http://schemas.openxmlformats.org/markup-compatibility/2006">
+          <mc:Choice xmlns:p14="http://schemas.microsoft.com/office/powerpoint/2010/main" Requires="p14">
+            <p:contentPart p14:bwMode="auto" r:id="rId113">
+              <p14:nvContentPartPr>
+                <p14:cNvPr id="66" name="Ink 65">
+                  <a:extLst>
+                    <a:ext uri="{FF2B5EF4-FFF2-40B4-BE49-F238E27FC236}">
+                      <a16:creationId xmlns:a16="http://schemas.microsoft.com/office/drawing/2014/main" id="{26030B92-8DA1-7B22-A25E-DA83CDD61050}"/>
+                    </a:ext>
+                  </a:extLst>
+                </p14:cNvPr>
+                <p14:cNvContentPartPr/>
+                <p14:nvPr/>
+              </p14:nvContentPartPr>
+              <p14:xfrm>
+                <a:off x="2103960" y="679440"/>
+                <a:ext cx="112320" cy="186840"/>
+              </p14:xfrm>
+            </p:contentPart>
+          </mc:Choice>
+          <mc:Fallback>
+            <p:pic>
+              <p:nvPicPr>
+                <p:cNvPr id="66" name="Ink 65">
+                  <a:extLst>
+                    <a:ext uri="{FF2B5EF4-FFF2-40B4-BE49-F238E27FC236}">
+                      <a16:creationId xmlns:a16="http://schemas.microsoft.com/office/drawing/2014/main" id="{26030B92-8DA1-7B22-A25E-DA83CDD61050}"/>
+                    </a:ext>
+                  </a:extLst>
+                </p:cNvPr>
+                <p:cNvPicPr/>
+                <p:nvPr/>
+              </p:nvPicPr>
+              <p:blipFill>
+                <a:blip r:embed="rId114"/>
+                <a:stretch>
+                  <a:fillRect/>
+                </a:stretch>
+              </p:blipFill>
+              <p:spPr>
+                <a:xfrm>
+                  <a:off x="2099640" y="675120"/>
+                  <a:ext cx="120960" cy="195480"/>
+                </a:xfrm>
+                <a:prstGeom prst="rect">
+                  <a:avLst/>
+                </a:prstGeom>
+              </p:spPr>
+            </p:pic>
+          </mc:Fallback>
+        </mc:AlternateContent>
+        <mc:AlternateContent xmlns:mc="http://schemas.openxmlformats.org/markup-compatibility/2006">
+          <mc:Choice xmlns:p14="http://schemas.microsoft.com/office/powerpoint/2010/main" Requires="p14">
+            <p:contentPart p14:bwMode="auto" r:id="rId115">
+              <p14:nvContentPartPr>
+                <p14:cNvPr id="67" name="Ink 66">
+                  <a:extLst>
+                    <a:ext uri="{FF2B5EF4-FFF2-40B4-BE49-F238E27FC236}">
+                      <a16:creationId xmlns:a16="http://schemas.microsoft.com/office/drawing/2014/main" id="{AA0CD41B-54D5-C5B2-C810-D6A98E33B74E}"/>
+                    </a:ext>
+                  </a:extLst>
+                </p14:cNvPr>
+                <p14:cNvContentPartPr/>
+                <p14:nvPr/>
+              </p14:nvContentPartPr>
+              <p14:xfrm>
+                <a:off x="2180280" y="664320"/>
+                <a:ext cx="58680" cy="82080"/>
+              </p14:xfrm>
+            </p:contentPart>
+          </mc:Choice>
+          <mc:Fallback>
+            <p:pic>
+              <p:nvPicPr>
+                <p:cNvPr id="67" name="Ink 66">
+                  <a:extLst>
+                    <a:ext uri="{FF2B5EF4-FFF2-40B4-BE49-F238E27FC236}">
+                      <a16:creationId xmlns:a16="http://schemas.microsoft.com/office/drawing/2014/main" id="{AA0CD41B-54D5-C5B2-C810-D6A98E33B74E}"/>
+                    </a:ext>
+                  </a:extLst>
+                </p:cNvPr>
+                <p:cNvPicPr/>
+                <p:nvPr/>
+              </p:nvPicPr>
+              <p:blipFill>
+                <a:blip r:embed="rId116"/>
+                <a:stretch>
+                  <a:fillRect/>
+                </a:stretch>
+              </p:blipFill>
+              <p:spPr>
+                <a:xfrm>
+                  <a:off x="2175960" y="660000"/>
+                  <a:ext cx="67320" cy="90720"/>
+                </a:xfrm>
+                <a:prstGeom prst="rect">
+                  <a:avLst/>
+                </a:prstGeom>
+              </p:spPr>
+            </p:pic>
+          </mc:Fallback>
+        </mc:AlternateContent>
+        <mc:AlternateContent xmlns:mc="http://schemas.openxmlformats.org/markup-compatibility/2006">
+          <mc:Choice xmlns:p14="http://schemas.microsoft.com/office/powerpoint/2010/main" Requires="p14">
+            <p:contentPart p14:bwMode="auto" r:id="rId117">
+              <p14:nvContentPartPr>
+                <p14:cNvPr id="68" name="Ink 67">
+                  <a:extLst>
+                    <a:ext uri="{FF2B5EF4-FFF2-40B4-BE49-F238E27FC236}">
+                      <a16:creationId xmlns:a16="http://schemas.microsoft.com/office/drawing/2014/main" id="{D7F35872-9CBA-8EA3-D398-F0B8E76E94F8}"/>
+                    </a:ext>
+                  </a:extLst>
+                </p14:cNvPr>
+                <p14:cNvContentPartPr/>
+                <p14:nvPr/>
+              </p14:nvContentPartPr>
+              <p14:xfrm>
+                <a:off x="2291880" y="760440"/>
+                <a:ext cx="24840" cy="100440"/>
+              </p14:xfrm>
+            </p:contentPart>
+          </mc:Choice>
+          <mc:Fallback>
+            <p:pic>
+              <p:nvPicPr>
+                <p:cNvPr id="68" name="Ink 67">
+                  <a:extLst>
+                    <a:ext uri="{FF2B5EF4-FFF2-40B4-BE49-F238E27FC236}">
+                      <a16:creationId xmlns:a16="http://schemas.microsoft.com/office/drawing/2014/main" id="{D7F35872-9CBA-8EA3-D398-F0B8E76E94F8}"/>
+                    </a:ext>
+                  </a:extLst>
+                </p:cNvPr>
+                <p:cNvPicPr/>
+                <p:nvPr/>
+              </p:nvPicPr>
+              <p:blipFill>
+                <a:blip r:embed="rId118"/>
+                <a:stretch>
+                  <a:fillRect/>
+                </a:stretch>
+              </p:blipFill>
+              <p:spPr>
+                <a:xfrm>
+                  <a:off x="2287560" y="756120"/>
+                  <a:ext cx="33480" cy="109080"/>
+                </a:xfrm>
+                <a:prstGeom prst="rect">
+                  <a:avLst/>
+                </a:prstGeom>
+              </p:spPr>
+            </p:pic>
+          </mc:Fallback>
+        </mc:AlternateContent>
+        <mc:AlternateContent xmlns:mc="http://schemas.openxmlformats.org/markup-compatibility/2006">
+          <mc:Choice xmlns:p14="http://schemas.microsoft.com/office/powerpoint/2010/main" Requires="p14">
+            <p:contentPart p14:bwMode="auto" r:id="rId119">
+              <p14:nvContentPartPr>
+                <p14:cNvPr id="69" name="Ink 68">
+                  <a:extLst>
+                    <a:ext uri="{FF2B5EF4-FFF2-40B4-BE49-F238E27FC236}">
+                      <a16:creationId xmlns:a16="http://schemas.microsoft.com/office/drawing/2014/main" id="{5B779892-DACC-8CEA-D43E-BAEA490BCD40}"/>
+                    </a:ext>
+                  </a:extLst>
+                </p14:cNvPr>
+                <p14:cNvContentPartPr/>
+                <p14:nvPr/>
+              </p14:nvContentPartPr>
+              <p14:xfrm>
+                <a:off x="2299800" y="636600"/>
+                <a:ext cx="65160" cy="91800"/>
+              </p14:xfrm>
+            </p:contentPart>
+          </mc:Choice>
+          <mc:Fallback>
+            <p:pic>
+              <p:nvPicPr>
+                <p:cNvPr id="69" name="Ink 68">
+                  <a:extLst>
+                    <a:ext uri="{FF2B5EF4-FFF2-40B4-BE49-F238E27FC236}">
+                      <a16:creationId xmlns:a16="http://schemas.microsoft.com/office/drawing/2014/main" id="{5B779892-DACC-8CEA-D43E-BAEA490BCD40}"/>
+                    </a:ext>
+                  </a:extLst>
+                </p:cNvPr>
+                <p:cNvPicPr/>
+                <p:nvPr/>
+              </p:nvPicPr>
+              <p:blipFill>
+                <a:blip r:embed="rId120"/>
+                <a:stretch>
+                  <a:fillRect/>
+                </a:stretch>
+              </p:blipFill>
+              <p:spPr>
+                <a:xfrm>
+                  <a:off x="2295480" y="632280"/>
+                  <a:ext cx="73800" cy="100440"/>
+                </a:xfrm>
+                <a:prstGeom prst="rect">
+                  <a:avLst/>
+                </a:prstGeom>
+              </p:spPr>
+            </p:pic>
+          </mc:Fallback>
+        </mc:AlternateContent>
+        <mc:AlternateContent xmlns:mc="http://schemas.openxmlformats.org/markup-compatibility/2006">
+          <mc:Choice xmlns:p14="http://schemas.microsoft.com/office/powerpoint/2010/main" Requires="p14">
+            <p:contentPart p14:bwMode="auto" r:id="rId121">
+              <p14:nvContentPartPr>
+                <p14:cNvPr id="70" name="Ink 69">
+                  <a:extLst>
+                    <a:ext uri="{FF2B5EF4-FFF2-40B4-BE49-F238E27FC236}">
+                      <a16:creationId xmlns:a16="http://schemas.microsoft.com/office/drawing/2014/main" id="{CBCE7E54-A9B5-9710-D02E-5A1168491687}"/>
+                    </a:ext>
+                  </a:extLst>
+                </p14:cNvPr>
+                <p14:cNvContentPartPr/>
+                <p14:nvPr/>
+              </p14:nvContentPartPr>
+              <p14:xfrm>
+                <a:off x="2350920" y="612840"/>
+                <a:ext cx="50400" cy="218160"/>
+              </p14:xfrm>
+            </p:contentPart>
+          </mc:Choice>
+          <mc:Fallback>
+            <p:pic>
+              <p:nvPicPr>
+                <p:cNvPr id="70" name="Ink 69">
+                  <a:extLst>
+                    <a:ext uri="{FF2B5EF4-FFF2-40B4-BE49-F238E27FC236}">
+                      <a16:creationId xmlns:a16="http://schemas.microsoft.com/office/drawing/2014/main" id="{CBCE7E54-A9B5-9710-D02E-5A1168491687}"/>
+                    </a:ext>
+                  </a:extLst>
+                </p:cNvPr>
+                <p:cNvPicPr/>
+                <p:nvPr/>
+              </p:nvPicPr>
+              <p:blipFill>
+                <a:blip r:embed="rId122"/>
+                <a:stretch>
+                  <a:fillRect/>
+                </a:stretch>
+              </p:blipFill>
+              <p:spPr>
+                <a:xfrm>
+                  <a:off x="2346600" y="608520"/>
+                  <a:ext cx="59040" cy="226800"/>
+                </a:xfrm>
+                <a:prstGeom prst="rect">
+                  <a:avLst/>
+                </a:prstGeom>
+              </p:spPr>
+            </p:pic>
+          </mc:Fallback>
+        </mc:AlternateContent>
+        <mc:AlternateContent xmlns:mc="http://schemas.openxmlformats.org/markup-compatibility/2006">
+          <mc:Choice xmlns:p14="http://schemas.microsoft.com/office/powerpoint/2010/main" Requires="p14">
+            <p:contentPart p14:bwMode="auto" r:id="rId123">
+              <p14:nvContentPartPr>
+                <p14:cNvPr id="71" name="Ink 70">
+                  <a:extLst>
+                    <a:ext uri="{FF2B5EF4-FFF2-40B4-BE49-F238E27FC236}">
+                      <a16:creationId xmlns:a16="http://schemas.microsoft.com/office/drawing/2014/main" id="{F90163AF-A652-4FC6-A0F3-E809E7658A2D}"/>
+                    </a:ext>
+                  </a:extLst>
+                </p14:cNvPr>
+                <p14:cNvContentPartPr/>
+                <p14:nvPr/>
+              </p14:nvContentPartPr>
+              <p14:xfrm>
+                <a:off x="2400600" y="631200"/>
+                <a:ext cx="61560" cy="111960"/>
+              </p14:xfrm>
+            </p:contentPart>
+          </mc:Choice>
+          <mc:Fallback>
+            <p:pic>
+              <p:nvPicPr>
+                <p:cNvPr id="71" name="Ink 70">
+                  <a:extLst>
+                    <a:ext uri="{FF2B5EF4-FFF2-40B4-BE49-F238E27FC236}">
+                      <a16:creationId xmlns:a16="http://schemas.microsoft.com/office/drawing/2014/main" id="{F90163AF-A652-4FC6-A0F3-E809E7658A2D}"/>
+                    </a:ext>
+                  </a:extLst>
+                </p:cNvPr>
+                <p:cNvPicPr/>
+                <p:nvPr/>
+              </p:nvPicPr>
+              <p:blipFill>
+                <a:blip r:embed="rId124"/>
+                <a:stretch>
+                  <a:fillRect/>
+                </a:stretch>
+              </p:blipFill>
+              <p:spPr>
+                <a:xfrm>
+                  <a:off x="2396280" y="626880"/>
+                  <a:ext cx="70200" cy="120600"/>
+                </a:xfrm>
+                <a:prstGeom prst="rect">
+                  <a:avLst/>
+                </a:prstGeom>
+              </p:spPr>
+            </p:pic>
+          </mc:Fallback>
+        </mc:AlternateContent>
+        <mc:AlternateContent xmlns:mc="http://schemas.openxmlformats.org/markup-compatibility/2006">
+          <mc:Choice xmlns:p14="http://schemas.microsoft.com/office/powerpoint/2010/main" Requires="p14">
+            <p:contentPart p14:bwMode="auto" r:id="rId125">
+              <p14:nvContentPartPr>
+                <p14:cNvPr id="72" name="Ink 71">
+                  <a:extLst>
+                    <a:ext uri="{FF2B5EF4-FFF2-40B4-BE49-F238E27FC236}">
+                      <a16:creationId xmlns:a16="http://schemas.microsoft.com/office/drawing/2014/main" id="{128495DE-6D2C-E878-EBCD-862F4021E002}"/>
+                    </a:ext>
+                  </a:extLst>
+                </p14:cNvPr>
+                <p14:cNvContentPartPr/>
+                <p14:nvPr/>
+              </p14:nvContentPartPr>
+              <p14:xfrm>
+                <a:off x="2494560" y="577920"/>
+                <a:ext cx="70920" cy="243000"/>
+              </p14:xfrm>
+            </p:contentPart>
+          </mc:Choice>
+          <mc:Fallback>
+            <p:pic>
+              <p:nvPicPr>
+                <p:cNvPr id="72" name="Ink 71">
+                  <a:extLst>
+                    <a:ext uri="{FF2B5EF4-FFF2-40B4-BE49-F238E27FC236}">
+                      <a16:creationId xmlns:a16="http://schemas.microsoft.com/office/drawing/2014/main" id="{128495DE-6D2C-E878-EBCD-862F4021E002}"/>
+                    </a:ext>
+                  </a:extLst>
+                </p:cNvPr>
+                <p:cNvPicPr/>
+                <p:nvPr/>
+              </p:nvPicPr>
+              <p:blipFill>
+                <a:blip r:embed="rId126"/>
+                <a:stretch>
+                  <a:fillRect/>
+                </a:stretch>
+              </p:blipFill>
+              <p:spPr>
+                <a:xfrm>
+                  <a:off x="2490240" y="573600"/>
+                  <a:ext cx="79560" cy="251640"/>
+                </a:xfrm>
+                <a:prstGeom prst="rect">
+                  <a:avLst/>
+                </a:prstGeom>
+              </p:spPr>
+            </p:pic>
+          </mc:Fallback>
+        </mc:AlternateContent>
+        <mc:AlternateContent xmlns:mc="http://schemas.openxmlformats.org/markup-compatibility/2006">
+          <mc:Choice xmlns:p14="http://schemas.microsoft.com/office/powerpoint/2010/main" Requires="p14">
+            <p:contentPart p14:bwMode="auto" r:id="rId127">
+              <p14:nvContentPartPr>
+                <p14:cNvPr id="73" name="Ink 72">
+                  <a:extLst>
+                    <a:ext uri="{FF2B5EF4-FFF2-40B4-BE49-F238E27FC236}">
+                      <a16:creationId xmlns:a16="http://schemas.microsoft.com/office/drawing/2014/main" id="{B30712E4-ACFF-A189-A0C7-5F9BF608609B}"/>
+                    </a:ext>
+                  </a:extLst>
+                </p14:cNvPr>
+                <p14:cNvContentPartPr/>
+                <p14:nvPr/>
+              </p14:nvContentPartPr>
+              <p14:xfrm>
+                <a:off x="2675280" y="690600"/>
+                <a:ext cx="34560" cy="150840"/>
+              </p14:xfrm>
+            </p:contentPart>
+          </mc:Choice>
+          <mc:Fallback>
+            <p:pic>
+              <p:nvPicPr>
+                <p:cNvPr id="73" name="Ink 72">
+                  <a:extLst>
+                    <a:ext uri="{FF2B5EF4-FFF2-40B4-BE49-F238E27FC236}">
+                      <a16:creationId xmlns:a16="http://schemas.microsoft.com/office/drawing/2014/main" id="{B30712E4-ACFF-A189-A0C7-5F9BF608609B}"/>
+                    </a:ext>
+                  </a:extLst>
+                </p:cNvPr>
+                <p:cNvPicPr/>
+                <p:nvPr/>
+              </p:nvPicPr>
+              <p:blipFill>
+                <a:blip r:embed="rId128"/>
+                <a:stretch>
+                  <a:fillRect/>
+                </a:stretch>
+              </p:blipFill>
+              <p:spPr>
+                <a:xfrm>
+                  <a:off x="2670960" y="686280"/>
+                  <a:ext cx="43200" cy="159480"/>
+                </a:xfrm>
+                <a:prstGeom prst="rect">
+                  <a:avLst/>
+                </a:prstGeom>
+              </p:spPr>
+            </p:pic>
+          </mc:Fallback>
+        </mc:AlternateContent>
+        <mc:AlternateContent xmlns:mc="http://schemas.openxmlformats.org/markup-compatibility/2006">
+          <mc:Choice xmlns:p14="http://schemas.microsoft.com/office/powerpoint/2010/main" Requires="p14">
+            <p:contentPart p14:bwMode="auto" r:id="rId129">
+              <p14:nvContentPartPr>
+                <p14:cNvPr id="74" name="Ink 73">
+                  <a:extLst>
+                    <a:ext uri="{FF2B5EF4-FFF2-40B4-BE49-F238E27FC236}">
+                      <a16:creationId xmlns:a16="http://schemas.microsoft.com/office/drawing/2014/main" id="{3AB50F0B-6A59-2E17-3841-E8FDA81957C7}"/>
+                    </a:ext>
+                  </a:extLst>
+                </p14:cNvPr>
+                <p14:cNvContentPartPr/>
+                <p14:nvPr/>
+              </p14:nvContentPartPr>
+              <p14:xfrm>
+                <a:off x="2668080" y="673680"/>
+                <a:ext cx="69480" cy="97560"/>
+              </p14:xfrm>
+            </p:contentPart>
+          </mc:Choice>
+          <mc:Fallback>
+            <p:pic>
+              <p:nvPicPr>
+                <p:cNvPr id="74" name="Ink 73">
+                  <a:extLst>
+                    <a:ext uri="{FF2B5EF4-FFF2-40B4-BE49-F238E27FC236}">
+                      <a16:creationId xmlns:a16="http://schemas.microsoft.com/office/drawing/2014/main" id="{3AB50F0B-6A59-2E17-3841-E8FDA81957C7}"/>
+                    </a:ext>
+                  </a:extLst>
+                </p:cNvPr>
+                <p:cNvPicPr/>
+                <p:nvPr/>
+              </p:nvPicPr>
+              <p:blipFill>
+                <a:blip r:embed="rId130"/>
+                <a:stretch>
+                  <a:fillRect/>
+                </a:stretch>
+              </p:blipFill>
+              <p:spPr>
+                <a:xfrm>
+                  <a:off x="2663760" y="669360"/>
+                  <a:ext cx="78120" cy="106200"/>
+                </a:xfrm>
+                <a:prstGeom prst="rect">
+                  <a:avLst/>
+                </a:prstGeom>
+              </p:spPr>
+            </p:pic>
+          </mc:Fallback>
+        </mc:AlternateContent>
+        <mc:AlternateContent xmlns:mc="http://schemas.openxmlformats.org/markup-compatibility/2006">
+          <mc:Choice xmlns:p14="http://schemas.microsoft.com/office/powerpoint/2010/main" Requires="p14">
+            <p:contentPart p14:bwMode="auto" r:id="rId131">
+              <p14:nvContentPartPr>
+                <p14:cNvPr id="75" name="Ink 74">
+                  <a:extLst>
+                    <a:ext uri="{FF2B5EF4-FFF2-40B4-BE49-F238E27FC236}">
+                      <a16:creationId xmlns:a16="http://schemas.microsoft.com/office/drawing/2014/main" id="{4D03AAE7-05B0-7384-ABCF-807D30FA9C5D}"/>
+                    </a:ext>
+                  </a:extLst>
+                </p14:cNvPr>
+                <p14:cNvContentPartPr/>
+                <p14:nvPr/>
+              </p14:nvContentPartPr>
+              <p14:xfrm>
+                <a:off x="2753760" y="672600"/>
+                <a:ext cx="66600" cy="114480"/>
+              </p14:xfrm>
+            </p:contentPart>
+          </mc:Choice>
+          <mc:Fallback>
+            <p:pic>
+              <p:nvPicPr>
+                <p:cNvPr id="75" name="Ink 74">
+                  <a:extLst>
+                    <a:ext uri="{FF2B5EF4-FFF2-40B4-BE49-F238E27FC236}">
+                      <a16:creationId xmlns:a16="http://schemas.microsoft.com/office/drawing/2014/main" id="{4D03AAE7-05B0-7384-ABCF-807D30FA9C5D}"/>
+                    </a:ext>
+                  </a:extLst>
+                </p:cNvPr>
+                <p:cNvPicPr/>
+                <p:nvPr/>
+              </p:nvPicPr>
+              <p:blipFill>
+                <a:blip r:embed="rId132"/>
+                <a:stretch>
+                  <a:fillRect/>
+                </a:stretch>
+              </p:blipFill>
+              <p:spPr>
+                <a:xfrm>
+                  <a:off x="2749440" y="668280"/>
+                  <a:ext cx="75240" cy="123120"/>
+                </a:xfrm>
+                <a:prstGeom prst="rect">
+                  <a:avLst/>
+                </a:prstGeom>
+              </p:spPr>
+            </p:pic>
+          </mc:Fallback>
+        </mc:AlternateContent>
+        <mc:AlternateContent xmlns:mc="http://schemas.openxmlformats.org/markup-compatibility/2006">
+          <mc:Choice xmlns:p14="http://schemas.microsoft.com/office/powerpoint/2010/main" Requires="p14">
+            <p:contentPart p14:bwMode="auto" r:id="rId133">
+              <p14:nvContentPartPr>
+                <p14:cNvPr id="76" name="Ink 75">
+                  <a:extLst>
+                    <a:ext uri="{FF2B5EF4-FFF2-40B4-BE49-F238E27FC236}">
+                      <a16:creationId xmlns:a16="http://schemas.microsoft.com/office/drawing/2014/main" id="{AE6C0A0D-2D51-23F3-8E95-B30FA2D91518}"/>
+                    </a:ext>
+                  </a:extLst>
+                </p14:cNvPr>
+                <p14:cNvContentPartPr/>
+                <p14:nvPr/>
+              </p14:nvContentPartPr>
+              <p14:xfrm>
+                <a:off x="2861760" y="689160"/>
+                <a:ext cx="7920" cy="59400"/>
+              </p14:xfrm>
+            </p:contentPart>
+          </mc:Choice>
+          <mc:Fallback>
+            <p:pic>
+              <p:nvPicPr>
+                <p:cNvPr id="76" name="Ink 75">
+                  <a:extLst>
+                    <a:ext uri="{FF2B5EF4-FFF2-40B4-BE49-F238E27FC236}">
+                      <a16:creationId xmlns:a16="http://schemas.microsoft.com/office/drawing/2014/main" id="{AE6C0A0D-2D51-23F3-8E95-B30FA2D91518}"/>
+                    </a:ext>
+                  </a:extLst>
+                </p:cNvPr>
+                <p:cNvPicPr/>
+                <p:nvPr/>
+              </p:nvPicPr>
+              <p:blipFill>
+                <a:blip r:embed="rId134"/>
+                <a:stretch>
+                  <a:fillRect/>
+                </a:stretch>
+              </p:blipFill>
+              <p:spPr>
+                <a:xfrm>
+                  <a:off x="2857440" y="684840"/>
+                  <a:ext cx="16560" cy="68040"/>
+                </a:xfrm>
+                <a:prstGeom prst="rect">
+                  <a:avLst/>
+                </a:prstGeom>
+              </p:spPr>
+            </p:pic>
+          </mc:Fallback>
+        </mc:AlternateContent>
+        <mc:AlternateContent xmlns:mc="http://schemas.openxmlformats.org/markup-compatibility/2006">
+          <mc:Choice xmlns:p14="http://schemas.microsoft.com/office/powerpoint/2010/main" Requires="p14">
+            <p:contentPart p14:bwMode="auto" r:id="rId135">
+              <p14:nvContentPartPr>
+                <p14:cNvPr id="77" name="Ink 76">
+                  <a:extLst>
+                    <a:ext uri="{FF2B5EF4-FFF2-40B4-BE49-F238E27FC236}">
+                      <a16:creationId xmlns:a16="http://schemas.microsoft.com/office/drawing/2014/main" id="{A607345B-C9D1-695F-3B2D-6CDDD4B95A23}"/>
+                    </a:ext>
+                  </a:extLst>
+                </p14:cNvPr>
+                <p14:cNvContentPartPr/>
+                <p14:nvPr/>
+              </p14:nvContentPartPr>
+              <p14:xfrm>
+                <a:off x="2843040" y="614640"/>
+                <a:ext cx="24840" cy="53280"/>
+              </p14:xfrm>
+            </p:contentPart>
+          </mc:Choice>
+          <mc:Fallback>
+            <p:pic>
+              <p:nvPicPr>
+                <p:cNvPr id="77" name="Ink 76">
+                  <a:extLst>
+                    <a:ext uri="{FF2B5EF4-FFF2-40B4-BE49-F238E27FC236}">
+                      <a16:creationId xmlns:a16="http://schemas.microsoft.com/office/drawing/2014/main" id="{A607345B-C9D1-695F-3B2D-6CDDD4B95A23}"/>
+                    </a:ext>
+                  </a:extLst>
+                </p:cNvPr>
+                <p:cNvPicPr/>
+                <p:nvPr/>
+              </p:nvPicPr>
+              <p:blipFill>
+                <a:blip r:embed="rId136"/>
+                <a:stretch>
+                  <a:fillRect/>
+                </a:stretch>
+              </p:blipFill>
+              <p:spPr>
+                <a:xfrm>
+                  <a:off x="2838720" y="610320"/>
+                  <a:ext cx="33480" cy="61920"/>
+                </a:xfrm>
+                <a:prstGeom prst="rect">
+                  <a:avLst/>
+                </a:prstGeom>
+              </p:spPr>
+            </p:pic>
+          </mc:Fallback>
+        </mc:AlternateContent>
+        <mc:AlternateContent xmlns:mc="http://schemas.openxmlformats.org/markup-compatibility/2006">
+          <mc:Choice xmlns:p14="http://schemas.microsoft.com/office/powerpoint/2010/main" Requires="p14">
+            <p:contentPart p14:bwMode="auto" r:id="rId137">
+              <p14:nvContentPartPr>
+                <p14:cNvPr id="78" name="Ink 77">
+                  <a:extLst>
+                    <a:ext uri="{FF2B5EF4-FFF2-40B4-BE49-F238E27FC236}">
+                      <a16:creationId xmlns:a16="http://schemas.microsoft.com/office/drawing/2014/main" id="{661B9DF0-050E-24A4-291F-C796D3324ABA}"/>
+                    </a:ext>
+                  </a:extLst>
+                </p14:cNvPr>
+                <p14:cNvContentPartPr/>
+                <p14:nvPr/>
+              </p14:nvContentPartPr>
+              <p14:xfrm>
+                <a:off x="2913240" y="656040"/>
+                <a:ext cx="34920" cy="93600"/>
+              </p14:xfrm>
+            </p:contentPart>
+          </mc:Choice>
+          <mc:Fallback>
+            <p:pic>
+              <p:nvPicPr>
+                <p:cNvPr id="78" name="Ink 77">
+                  <a:extLst>
+                    <a:ext uri="{FF2B5EF4-FFF2-40B4-BE49-F238E27FC236}">
+                      <a16:creationId xmlns:a16="http://schemas.microsoft.com/office/drawing/2014/main" id="{661B9DF0-050E-24A4-291F-C796D3324ABA}"/>
+                    </a:ext>
+                  </a:extLst>
+                </p:cNvPr>
+                <p:cNvPicPr/>
+                <p:nvPr/>
+              </p:nvPicPr>
+              <p:blipFill>
+                <a:blip r:embed="rId138"/>
+                <a:stretch>
+                  <a:fillRect/>
+                </a:stretch>
+              </p:blipFill>
+              <p:spPr>
+                <a:xfrm>
+                  <a:off x="2908920" y="651720"/>
+                  <a:ext cx="43560" cy="102240"/>
+                </a:xfrm>
+                <a:prstGeom prst="rect">
+                  <a:avLst/>
+                </a:prstGeom>
+              </p:spPr>
+            </p:pic>
+          </mc:Fallback>
+        </mc:AlternateContent>
+        <mc:AlternateContent xmlns:mc="http://schemas.openxmlformats.org/markup-compatibility/2006">
+          <mc:Choice xmlns:p14="http://schemas.microsoft.com/office/powerpoint/2010/main" Requires="p14">
+            <p:contentPart p14:bwMode="auto" r:id="rId139">
+              <p14:nvContentPartPr>
+                <p14:cNvPr id="79" name="Ink 78">
+                  <a:extLst>
+                    <a:ext uri="{FF2B5EF4-FFF2-40B4-BE49-F238E27FC236}">
+                      <a16:creationId xmlns:a16="http://schemas.microsoft.com/office/drawing/2014/main" id="{80556B9D-5F54-DFCE-82AB-1294412B20DF}"/>
+                    </a:ext>
+                  </a:extLst>
+                </p14:cNvPr>
+                <p14:cNvContentPartPr/>
+                <p14:nvPr/>
+              </p14:nvContentPartPr>
+              <p14:xfrm>
+                <a:off x="2952120" y="644520"/>
+                <a:ext cx="111960" cy="120960"/>
+              </p14:xfrm>
+            </p:contentPart>
+          </mc:Choice>
+          <mc:Fallback>
+            <p:pic>
+              <p:nvPicPr>
+                <p:cNvPr id="79" name="Ink 78">
+                  <a:extLst>
+                    <a:ext uri="{FF2B5EF4-FFF2-40B4-BE49-F238E27FC236}">
+                      <a16:creationId xmlns:a16="http://schemas.microsoft.com/office/drawing/2014/main" id="{80556B9D-5F54-DFCE-82AB-1294412B20DF}"/>
+                    </a:ext>
+                  </a:extLst>
+                </p:cNvPr>
+                <p:cNvPicPr/>
+                <p:nvPr/>
+              </p:nvPicPr>
+              <p:blipFill>
+                <a:blip r:embed="rId140"/>
+                <a:stretch>
+                  <a:fillRect/>
+                </a:stretch>
+              </p:blipFill>
+              <p:spPr>
+                <a:xfrm>
+                  <a:off x="2947800" y="640200"/>
+                  <a:ext cx="120600" cy="129600"/>
                 </a:xfrm>
                 <a:prstGeom prst="rect">
                   <a:avLst/>
